--- a/Module6_demographic/6.LifeTablesLeslieMatrices.pptx
+++ b/Module6_demographic/6.LifeTablesLeslieMatrices.pptx
@@ -5,10 +5,10 @@
     <p:sldMasterId id="2147483653" r:id="rId1"/>
   </p:sldMasterIdLst>
   <p:notesMasterIdLst>
-    <p:notesMasterId r:id="rId36"/>
+    <p:notesMasterId r:id="rId37"/>
   </p:notesMasterIdLst>
   <p:handoutMasterIdLst>
-    <p:handoutMasterId r:id="rId37"/>
+    <p:handoutMasterId r:id="rId38"/>
   </p:handoutMasterIdLst>
   <p:sldIdLst>
     <p:sldId id="297" r:id="rId2"/>
@@ -28,23 +28,24 @@
     <p:sldId id="303" r:id="rId16"/>
     <p:sldId id="313" r:id="rId17"/>
     <p:sldId id="316" r:id="rId18"/>
-    <p:sldId id="317" r:id="rId19"/>
-    <p:sldId id="318" r:id="rId20"/>
-    <p:sldId id="320" r:id="rId21"/>
-    <p:sldId id="322" r:id="rId22"/>
-    <p:sldId id="321" r:id="rId23"/>
-    <p:sldId id="319" r:id="rId24"/>
-    <p:sldId id="323" r:id="rId25"/>
-    <p:sldId id="324" r:id="rId26"/>
-    <p:sldId id="294" r:id="rId27"/>
-    <p:sldId id="327" r:id="rId28"/>
-    <p:sldId id="328" r:id="rId29"/>
-    <p:sldId id="329" r:id="rId30"/>
-    <p:sldId id="330" r:id="rId31"/>
-    <p:sldId id="332" r:id="rId32"/>
-    <p:sldId id="333" r:id="rId33"/>
-    <p:sldId id="336" r:id="rId34"/>
-    <p:sldId id="337" r:id="rId35"/>
+    <p:sldId id="338" r:id="rId19"/>
+    <p:sldId id="317" r:id="rId20"/>
+    <p:sldId id="318" r:id="rId21"/>
+    <p:sldId id="320" r:id="rId22"/>
+    <p:sldId id="322" r:id="rId23"/>
+    <p:sldId id="321" r:id="rId24"/>
+    <p:sldId id="319" r:id="rId25"/>
+    <p:sldId id="323" r:id="rId26"/>
+    <p:sldId id="327" r:id="rId27"/>
+    <p:sldId id="328" r:id="rId28"/>
+    <p:sldId id="329" r:id="rId29"/>
+    <p:sldId id="330" r:id="rId30"/>
+    <p:sldId id="332" r:id="rId31"/>
+    <p:sldId id="333" r:id="rId32"/>
+    <p:sldId id="336" r:id="rId33"/>
+    <p:sldId id="324" r:id="rId34"/>
+    <p:sldId id="294" r:id="rId35"/>
+    <p:sldId id="337" r:id="rId36"/>
   </p:sldIdLst>
   <p:sldSz cx="9144000" cy="6858000" type="screen4x3"/>
   <p:notesSz cx="7315200" cy="9601200"/>
@@ -1147,7 +1148,7 @@
               <a:pPr>
                 <a:defRPr/>
               </a:pPr>
-              <a:t>26</a:t>
+              <a:t>34</a:t>
             </a:fld>
             <a:endParaRPr lang="en-US"/>
           </a:p>
@@ -1156,7 +1157,7 @@
     </p:spTree>
     <p:extLst>
       <p:ext uri="{BB962C8B-B14F-4D97-AF65-F5344CB8AC3E}">
-        <p14:creationId xmlns:p14="http://schemas.microsoft.com/office/powerpoint/2010/main" val="2659866249"/>
+        <p14:creationId xmlns:p14="http://schemas.microsoft.com/office/powerpoint/2010/main" val="3560963209"/>
       </p:ext>
     </p:extLst>
   </p:cSld>
@@ -5912,6 +5913,82 @@
           </a:p>
         </p:txBody>
       </p:sp>
+      <p:sp>
+        <p:nvSpPr>
+          <p:cNvPr id="3" name="TextBox 2">
+            <a:extLst>
+              <a:ext uri="{FF2B5EF4-FFF2-40B4-BE49-F238E27FC236}">
+                <a16:creationId xmlns:a16="http://schemas.microsoft.com/office/drawing/2014/main" id="{0AF6DCFC-FD29-2807-A869-EBEAC56A779C}"/>
+              </a:ext>
+            </a:extLst>
+          </p:cNvPr>
+          <p:cNvSpPr txBox="1"/>
+          <p:nvPr/>
+        </p:nvSpPr>
+        <p:spPr>
+          <a:xfrm>
+            <a:off x="7429500" y="1060084"/>
+            <a:ext cx="1447800" cy="646331"/>
+          </a:xfrm>
+          <a:prstGeom prst="rect">
+            <a:avLst/>
+          </a:prstGeom>
+          <a:noFill/>
+          <a:ln>
+            <a:solidFill>
+              <a:schemeClr val="accent1"/>
+            </a:solidFill>
+          </a:ln>
+        </p:spPr>
+        <p:txBody>
+          <a:bodyPr wrap="square" rtlCol="0">
+            <a:spAutoFit/>
+          </a:bodyPr>
+          <a:lstStyle/>
+          <a:p>
+            <a:r>
+              <a:rPr lang="en-US" i="1" dirty="0">
+                <a:latin typeface="Times New Roman" panose="02020603050405020304" pitchFamily="18" charset="0"/>
+                <a:ea typeface="Calibri" panose="020F0502020204030204" pitchFamily="34" charset="0"/>
+                <a:cs typeface="Times New Roman" panose="02020603050405020304" pitchFamily="18" charset="0"/>
+              </a:rPr>
+              <a:t>l</a:t>
+            </a:r>
+            <a:r>
+              <a:rPr lang="en-US" i="1" baseline="-25000" dirty="0">
+                <a:latin typeface="Times New Roman" panose="02020603050405020304" pitchFamily="18" charset="0"/>
+                <a:ea typeface="Calibri" panose="020F0502020204030204" pitchFamily="34" charset="0"/>
+                <a:cs typeface="Times New Roman" panose="02020603050405020304" pitchFamily="18" charset="0"/>
+              </a:rPr>
+              <a:t>x</a:t>
+            </a:r>
+            <a:r>
+              <a:rPr lang="en-US" i="1" dirty="0">
+                <a:latin typeface="Times New Roman" panose="02020603050405020304" pitchFamily="18" charset="0"/>
+                <a:ea typeface="Calibri" panose="020F0502020204030204" pitchFamily="34" charset="0"/>
+                <a:cs typeface="Times New Roman" panose="02020603050405020304" pitchFamily="18" charset="0"/>
+              </a:rPr>
+              <a:t>= survival m</a:t>
+            </a:r>
+            <a:r>
+              <a:rPr lang="en-US" i="1" baseline="-25000" dirty="0">
+                <a:latin typeface="Times New Roman" panose="02020603050405020304" pitchFamily="18" charset="0"/>
+                <a:ea typeface="Calibri" panose="020F0502020204030204" pitchFamily="34" charset="0"/>
+                <a:cs typeface="Times New Roman" panose="02020603050405020304" pitchFamily="18" charset="0"/>
+              </a:rPr>
+              <a:t>x</a:t>
+            </a:r>
+            <a:r>
+              <a:rPr lang="en-US" i="1" dirty="0">
+                <a:latin typeface="Times New Roman" panose="02020603050405020304" pitchFamily="18" charset="0"/>
+                <a:ea typeface="Calibri" panose="020F0502020204030204" pitchFamily="34" charset="0"/>
+                <a:cs typeface="Times New Roman" panose="02020603050405020304" pitchFamily="18" charset="0"/>
+              </a:rPr>
+              <a:t>=fecundity</a:t>
+            </a:r>
+          </a:p>
+        </p:txBody>
+      </p:sp>
     </p:spTree>
     <p:extLst>
       <p:ext uri="{BB962C8B-B14F-4D97-AF65-F5344CB8AC3E}">
@@ -7180,8 +7257,8 @@
           </a:p>
         </p:txBody>
       </p:sp>
-      <mc:AlternateContent xmlns:mc="http://schemas.openxmlformats.org/markup-compatibility/2006">
-        <mc:Choice xmlns:a14="http://schemas.microsoft.com/office/drawing/2010/main" Requires="a14">
+      <mc:AlternateContent xmlns:mc="http://schemas.openxmlformats.org/markup-compatibility/2006" xmlns:a14="http://schemas.microsoft.com/office/drawing/2010/main">
+        <mc:Choice Requires="a14">
           <p:sp>
             <p:nvSpPr>
               <p:cNvPr id="3" name="Content Placeholder 2">
@@ -7301,7 +7378,7 @@
             </p:txBody>
           </p:sp>
         </mc:Choice>
-        <mc:Fallback>
+        <mc:Fallback xmlns="">
           <p:sp>
             <p:nvSpPr>
               <p:cNvPr id="3" name="Content Placeholder 2">
@@ -7710,7 +7787,7 @@
                 <a:effectLst/>
                 <a:latin typeface="Helvetica Neue"/>
               </a:rPr>
-              <a:t>Substituting</a:t>
+              <a:t>Substituting </a:t>
             </a:r>
             <a:endParaRPr kumimoji="0" lang="en-US" altLang="en-US" sz="1600" b="0" i="0" u="none" strike="noStrike" cap="none" normalizeH="0" baseline="0" dirty="0">
               <a:ln>
@@ -7953,7 +8030,7 @@
         </p:blipFill>
         <p:spPr>
           <a:xfrm>
-            <a:off x="3205173" y="2050975"/>
+            <a:off x="3200400" y="1961386"/>
             <a:ext cx="1790950" cy="600159"/>
           </a:xfrm>
           <a:prstGeom prst="rect">
@@ -7983,7 +8060,7 @@
         </p:blipFill>
         <p:spPr>
           <a:xfrm>
-            <a:off x="3309676" y="2641602"/>
+            <a:off x="2971800" y="2620464"/>
             <a:ext cx="3743847" cy="1057423"/>
           </a:xfrm>
           <a:prstGeom prst="rect">
@@ -8151,6 +8228,171 @@
           <p:cNvPr id="2" name="Title 1">
             <a:extLst>
               <a:ext uri="{FF2B5EF4-FFF2-40B4-BE49-F238E27FC236}">
+                <a16:creationId xmlns:a16="http://schemas.microsoft.com/office/drawing/2014/main" id="{E823FCEE-1167-1458-AAC3-AFBD0055D943}"/>
+              </a:ext>
+            </a:extLst>
+          </p:cNvPr>
+          <p:cNvSpPr>
+            <a:spLocks noGrp="1"/>
+          </p:cNvSpPr>
+          <p:nvPr>
+            <p:ph type="title"/>
+          </p:nvPr>
+        </p:nvSpPr>
+        <p:spPr/>
+        <p:txBody>
+          <a:bodyPr/>
+          <a:lstStyle/>
+          <a:p>
+            <a:r>
+              <a:rPr lang="en-US" dirty="0"/>
+              <a:t>Euler-Lotka interpretation</a:t>
+            </a:r>
+          </a:p>
+        </p:txBody>
+      </p:sp>
+      <p:pic>
+        <p:nvPicPr>
+          <p:cNvPr id="5" name="Content Placeholder 4">
+            <a:extLst>
+              <a:ext uri="{FF2B5EF4-FFF2-40B4-BE49-F238E27FC236}">
+                <a16:creationId xmlns:a16="http://schemas.microsoft.com/office/drawing/2014/main" id="{450550B1-6AD5-D990-80E0-D5FE5A21D161}"/>
+              </a:ext>
+            </a:extLst>
+          </p:cNvPr>
+          <p:cNvPicPr>
+            <a:picLocks noGrp="1" noChangeAspect="1"/>
+          </p:cNvPicPr>
+          <p:nvPr>
+            <p:ph idx="1"/>
+          </p:nvPr>
+        </p:nvPicPr>
+        <p:blipFill>
+          <a:blip r:embed="rId2"/>
+          <a:srcRect l="30569" t="1" b="-887"/>
+          <a:stretch>
+            <a:fillRect/>
+          </a:stretch>
+        </p:blipFill>
+        <p:spPr>
+          <a:xfrm>
+            <a:off x="609600" y="1295400"/>
+            <a:ext cx="2076867" cy="1066800"/>
+          </a:xfrm>
+          <a:prstGeom prst="rect">
+            <a:avLst/>
+          </a:prstGeom>
+        </p:spPr>
+      </p:pic>
+      <p:sp>
+        <p:nvSpPr>
+          <p:cNvPr id="6" name="TextBox 5">
+            <a:extLst>
+              <a:ext uri="{FF2B5EF4-FFF2-40B4-BE49-F238E27FC236}">
+                <a16:creationId xmlns:a16="http://schemas.microsoft.com/office/drawing/2014/main" id="{506A14E3-C3B8-140C-E41E-B75C1EE643C5}"/>
+              </a:ext>
+            </a:extLst>
+          </p:cNvPr>
+          <p:cNvSpPr txBox="1"/>
+          <p:nvPr/>
+        </p:nvSpPr>
+        <p:spPr>
+          <a:xfrm>
+            <a:off x="3048000" y="1644134"/>
+            <a:ext cx="5029201" cy="1938992"/>
+          </a:xfrm>
+          <a:prstGeom prst="rect">
+            <a:avLst/>
+          </a:prstGeom>
+          <a:noFill/>
+        </p:spPr>
+        <p:txBody>
+          <a:bodyPr wrap="square" rtlCol="0">
+            <a:spAutoFit/>
+          </a:bodyPr>
+          <a:lstStyle/>
+          <a:p>
+            <a:r>
+              <a:rPr lang="en-US" sz="2000" dirty="0"/>
+              <a:t>  is a female’s lifetime reproduction discounted by the fact that ones born later contribute less to population growth</a:t>
+            </a:r>
+          </a:p>
+          <a:p>
+            <a:endParaRPr lang="en-US" sz="2000" dirty="0"/>
+          </a:p>
+          <a:p>
+            <a:r>
+              <a:rPr lang="en-US" sz="2000" dirty="0"/>
+              <a:t>This must equal 1 to maintain a stable age structure</a:t>
+            </a:r>
+          </a:p>
+        </p:txBody>
+      </p:sp>
+      <p:pic>
+        <p:nvPicPr>
+          <p:cNvPr id="8" name="Picture 7">
+            <a:extLst>
+              <a:ext uri="{FF2B5EF4-FFF2-40B4-BE49-F238E27FC236}">
+                <a16:creationId xmlns:a16="http://schemas.microsoft.com/office/drawing/2014/main" id="{63E39CBA-CEDF-9726-F5E3-06C8F8725178}"/>
+              </a:ext>
+            </a:extLst>
+          </p:cNvPr>
+          <p:cNvPicPr>
+            <a:picLocks noChangeAspect="1"/>
+          </p:cNvPicPr>
+          <p:nvPr/>
+        </p:nvPicPr>
+        <p:blipFill>
+          <a:blip r:embed="rId3"/>
+          <a:stretch>
+            <a:fillRect/>
+          </a:stretch>
+        </p:blipFill>
+        <p:spPr>
+          <a:xfrm>
+            <a:off x="974785" y="4135856"/>
+            <a:ext cx="2867425" cy="962159"/>
+          </a:xfrm>
+          <a:prstGeom prst="rect">
+            <a:avLst/>
+          </a:prstGeom>
+        </p:spPr>
+      </p:pic>
+    </p:spTree>
+    <p:extLst>
+      <p:ext uri="{BB962C8B-B14F-4D97-AF65-F5344CB8AC3E}">
+        <p14:creationId xmlns:p14="http://schemas.microsoft.com/office/powerpoint/2010/main" val="2271002093"/>
+      </p:ext>
+    </p:extLst>
+  </p:cSld>
+  <p:clrMapOvr>
+    <a:masterClrMapping/>
+  </p:clrMapOvr>
+</p:sld>
+</file>
+
+<file path=ppt/slides/slide19.xml><?xml version="1.0" encoding="utf-8"?>
+<p:sld xmlns:a="http://schemas.openxmlformats.org/drawingml/2006/main" xmlns:r="http://schemas.openxmlformats.org/officeDocument/2006/relationships" xmlns:p="http://schemas.openxmlformats.org/presentationml/2006/main">
+  <p:cSld>
+    <p:spTree>
+      <p:nvGrpSpPr>
+        <p:cNvPr id="1" name=""/>
+        <p:cNvGrpSpPr/>
+        <p:nvPr/>
+      </p:nvGrpSpPr>
+      <p:grpSpPr>
+        <a:xfrm>
+          <a:off x="0" y="0"/>
+          <a:ext cx="0" cy="0"/>
+          <a:chOff x="0" y="0"/>
+          <a:chExt cx="0" cy="0"/>
+        </a:xfrm>
+      </p:grpSpPr>
+      <p:sp>
+        <p:nvSpPr>
+          <p:cNvPr id="2" name="Title 1">
+            <a:extLst>
+              <a:ext uri="{FF2B5EF4-FFF2-40B4-BE49-F238E27FC236}">
                 <a16:creationId xmlns:a16="http://schemas.microsoft.com/office/drawing/2014/main" id="{C8DBFDD1-2AA6-3DCE-7336-9A52064CD64D}"/>
               </a:ext>
             </a:extLst>
@@ -8314,7 +8556,119 @@
 </p:sld>
 </file>
 
-<file path=ppt/slides/slide19.xml><?xml version="1.0" encoding="utf-8"?>
+<file path=ppt/slides/slide2.xml><?xml version="1.0" encoding="utf-8"?>
+<p:sld xmlns:a="http://schemas.openxmlformats.org/drawingml/2006/main" xmlns:r="http://schemas.openxmlformats.org/officeDocument/2006/relationships" xmlns:p="http://schemas.openxmlformats.org/presentationml/2006/main">
+  <p:cSld>
+    <p:spTree>
+      <p:nvGrpSpPr>
+        <p:cNvPr id="1" name=""/>
+        <p:cNvGrpSpPr/>
+        <p:nvPr/>
+      </p:nvGrpSpPr>
+      <p:grpSpPr>
+        <a:xfrm>
+          <a:off x="0" y="0"/>
+          <a:ext cx="0" cy="0"/>
+          <a:chOff x="0" y="0"/>
+          <a:chExt cx="0" cy="0"/>
+        </a:xfrm>
+      </p:grpSpPr>
+      <p:sp>
+        <p:nvSpPr>
+          <p:cNvPr id="2" name="Title 1">
+            <a:extLst>
+              <a:ext uri="{FF2B5EF4-FFF2-40B4-BE49-F238E27FC236}">
+                <a16:creationId xmlns:a16="http://schemas.microsoft.com/office/drawing/2014/main" id="{8B6803B1-E3C7-D288-AB34-789322252573}"/>
+              </a:ext>
+            </a:extLst>
+          </p:cNvPr>
+          <p:cNvSpPr>
+            <a:spLocks noGrp="1"/>
+          </p:cNvSpPr>
+          <p:nvPr>
+            <p:ph type="title"/>
+          </p:nvPr>
+        </p:nvSpPr>
+        <p:spPr/>
+        <p:txBody>
+          <a:bodyPr/>
+          <a:lstStyle/>
+          <a:p>
+            <a:r>
+              <a:rPr lang="en-US" dirty="0"/>
+              <a:t>Age-structured models</a:t>
+            </a:r>
+          </a:p>
+        </p:txBody>
+      </p:sp>
+      <p:sp>
+        <p:nvSpPr>
+          <p:cNvPr id="3" name="Content Placeholder 2">
+            <a:extLst>
+              <a:ext uri="{FF2B5EF4-FFF2-40B4-BE49-F238E27FC236}">
+                <a16:creationId xmlns:a16="http://schemas.microsoft.com/office/drawing/2014/main" id="{12D0DF42-6C52-3A1E-1B70-52455625B3F1}"/>
+              </a:ext>
+            </a:extLst>
+          </p:cNvPr>
+          <p:cNvSpPr>
+            <a:spLocks noGrp="1"/>
+          </p:cNvSpPr>
+          <p:nvPr>
+            <p:ph idx="1"/>
+          </p:nvPr>
+        </p:nvSpPr>
+        <p:spPr/>
+        <p:txBody>
+          <a:bodyPr/>
+          <a:lstStyle/>
+          <a:p>
+            <a:r>
+              <a:rPr lang="en-US" dirty="0"/>
+              <a:t>Leslie matrices and other demographic methods</a:t>
+            </a:r>
+          </a:p>
+          <a:p>
+            <a:pPr lvl="1"/>
+            <a:r>
+              <a:rPr lang="en-US" dirty="0"/>
+              <a:t>Incorporate the idea that mortality rates and fecundity rates vary by age and sometimes sex</a:t>
+            </a:r>
+          </a:p>
+          <a:p>
+            <a:pPr lvl="1"/>
+            <a:r>
+              <a:rPr lang="en-US" dirty="0"/>
+              <a:t>Generally no density dependence</a:t>
+            </a:r>
+          </a:p>
+          <a:p>
+            <a:r>
+              <a:rPr lang="en-US" dirty="0"/>
+              <a:t>These methods are often used to derive priors for r in logistic models</a:t>
+            </a:r>
+          </a:p>
+          <a:p>
+            <a:r>
+              <a:rPr lang="en-US" dirty="0"/>
+              <a:t>They are often used directly for protected species like sea turtles, marine mammals. </a:t>
+            </a:r>
+          </a:p>
+        </p:txBody>
+      </p:sp>
+    </p:spTree>
+    <p:extLst>
+      <p:ext uri="{BB962C8B-B14F-4D97-AF65-F5344CB8AC3E}">
+        <p14:creationId xmlns:p14="http://schemas.microsoft.com/office/powerpoint/2010/main" val="3697310824"/>
+      </p:ext>
+    </p:extLst>
+  </p:cSld>
+  <p:clrMapOvr>
+    <a:masterClrMapping/>
+  </p:clrMapOvr>
+</p:sld>
+</file>
+
+<file path=ppt/slides/slide20.xml><?xml version="1.0" encoding="utf-8"?>
 <p:sld xmlns:a="http://schemas.openxmlformats.org/drawingml/2006/main" xmlns:r="http://schemas.openxmlformats.org/officeDocument/2006/relationships" xmlns:p="http://schemas.openxmlformats.org/presentationml/2006/main">
   <p:cSld>
     <p:spTree>
@@ -8359,8 +8713,8 @@
           </a:p>
         </p:txBody>
       </p:sp>
-      <mc:AlternateContent xmlns:mc="http://schemas.openxmlformats.org/markup-compatibility/2006">
-        <mc:Choice xmlns:a14="http://schemas.microsoft.com/office/drawing/2010/main" Requires="a14">
+      <mc:AlternateContent xmlns:mc="http://schemas.openxmlformats.org/markup-compatibility/2006" xmlns:a14="http://schemas.microsoft.com/office/drawing/2010/main">
+        <mc:Choice Requires="a14">
           <p:sp>
             <p:nvSpPr>
               <p:cNvPr id="3" name="Content Placeholder 2">
@@ -8548,7 +8902,7 @@
             </p:txBody>
           </p:sp>
         </mc:Choice>
-        <mc:Fallback>
+        <mc:Fallback xmlns="">
           <p:sp>
             <p:nvSpPr>
               <p:cNvPr id="3" name="Content Placeholder 2">
@@ -8636,119 +8990,7 @@
 </p:sld>
 </file>
 
-<file path=ppt/slides/slide2.xml><?xml version="1.0" encoding="utf-8"?>
-<p:sld xmlns:a="http://schemas.openxmlformats.org/drawingml/2006/main" xmlns:r="http://schemas.openxmlformats.org/officeDocument/2006/relationships" xmlns:p="http://schemas.openxmlformats.org/presentationml/2006/main">
-  <p:cSld>
-    <p:spTree>
-      <p:nvGrpSpPr>
-        <p:cNvPr id="1" name=""/>
-        <p:cNvGrpSpPr/>
-        <p:nvPr/>
-      </p:nvGrpSpPr>
-      <p:grpSpPr>
-        <a:xfrm>
-          <a:off x="0" y="0"/>
-          <a:ext cx="0" cy="0"/>
-          <a:chOff x="0" y="0"/>
-          <a:chExt cx="0" cy="0"/>
-        </a:xfrm>
-      </p:grpSpPr>
-      <p:sp>
-        <p:nvSpPr>
-          <p:cNvPr id="2" name="Title 1">
-            <a:extLst>
-              <a:ext uri="{FF2B5EF4-FFF2-40B4-BE49-F238E27FC236}">
-                <a16:creationId xmlns:a16="http://schemas.microsoft.com/office/drawing/2014/main" id="{8B6803B1-E3C7-D288-AB34-789322252573}"/>
-              </a:ext>
-            </a:extLst>
-          </p:cNvPr>
-          <p:cNvSpPr>
-            <a:spLocks noGrp="1"/>
-          </p:cNvSpPr>
-          <p:nvPr>
-            <p:ph type="title"/>
-          </p:nvPr>
-        </p:nvSpPr>
-        <p:spPr/>
-        <p:txBody>
-          <a:bodyPr/>
-          <a:lstStyle/>
-          <a:p>
-            <a:r>
-              <a:rPr lang="en-US" dirty="0"/>
-              <a:t>Age-structured models</a:t>
-            </a:r>
-          </a:p>
-        </p:txBody>
-      </p:sp>
-      <p:sp>
-        <p:nvSpPr>
-          <p:cNvPr id="3" name="Content Placeholder 2">
-            <a:extLst>
-              <a:ext uri="{FF2B5EF4-FFF2-40B4-BE49-F238E27FC236}">
-                <a16:creationId xmlns:a16="http://schemas.microsoft.com/office/drawing/2014/main" id="{12D0DF42-6C52-3A1E-1B70-52455625B3F1}"/>
-              </a:ext>
-            </a:extLst>
-          </p:cNvPr>
-          <p:cNvSpPr>
-            <a:spLocks noGrp="1"/>
-          </p:cNvSpPr>
-          <p:nvPr>
-            <p:ph idx="1"/>
-          </p:nvPr>
-        </p:nvSpPr>
-        <p:spPr/>
-        <p:txBody>
-          <a:bodyPr/>
-          <a:lstStyle/>
-          <a:p>
-            <a:r>
-              <a:rPr lang="en-US" dirty="0"/>
-              <a:t>Leslie matrices and other demographic methods</a:t>
-            </a:r>
-          </a:p>
-          <a:p>
-            <a:pPr lvl="1"/>
-            <a:r>
-              <a:rPr lang="en-US" dirty="0"/>
-              <a:t>Incorporate the idea that mortality rates and fecundity rates vary by age and sometimes sex</a:t>
-            </a:r>
-          </a:p>
-          <a:p>
-            <a:pPr lvl="1"/>
-            <a:r>
-              <a:rPr lang="en-US" dirty="0"/>
-              <a:t>Generally no density dependence</a:t>
-            </a:r>
-          </a:p>
-          <a:p>
-            <a:r>
-              <a:rPr lang="en-US" dirty="0"/>
-              <a:t>These methods are often used to derive priors for r in logistic models</a:t>
-            </a:r>
-          </a:p>
-          <a:p>
-            <a:r>
-              <a:rPr lang="en-US" dirty="0"/>
-              <a:t>They are often used directly for protected species like sea turtles, marine mammals. </a:t>
-            </a:r>
-          </a:p>
-        </p:txBody>
-      </p:sp>
-    </p:spTree>
-    <p:extLst>
-      <p:ext uri="{BB962C8B-B14F-4D97-AF65-F5344CB8AC3E}">
-        <p14:creationId xmlns:p14="http://schemas.microsoft.com/office/powerpoint/2010/main" val="3697310824"/>
-      </p:ext>
-    </p:extLst>
-  </p:cSld>
-  <p:clrMapOvr>
-    <a:masterClrMapping/>
-  </p:clrMapOvr>
-</p:sld>
-</file>
-
-<file path=ppt/slides/slide20.xml><?xml version="1.0" encoding="utf-8"?>
+<file path=ppt/slides/slide21.xml><?xml version="1.0" encoding="utf-8"?>
 <p:sld xmlns:a="http://schemas.openxmlformats.org/drawingml/2006/main" xmlns:r="http://schemas.openxmlformats.org/officeDocument/2006/relationships" xmlns:p="http://schemas.openxmlformats.org/presentationml/2006/main">
   <p:cSld>
     <p:spTree>
@@ -8905,7 +9147,7 @@
 </p:sld>
 </file>
 
-<file path=ppt/slides/slide21.xml><?xml version="1.0" encoding="utf-8"?>
+<file path=ppt/slides/slide22.xml><?xml version="1.0" encoding="utf-8"?>
 <p:sld xmlns:a="http://schemas.openxmlformats.org/drawingml/2006/main" xmlns:r="http://schemas.openxmlformats.org/officeDocument/2006/relationships" xmlns:p="http://schemas.openxmlformats.org/presentationml/2006/main">
   <p:cSld>
     <p:spTree>
@@ -9059,7 +9301,7 @@
 </p:sld>
 </file>
 
-<file path=ppt/slides/slide22.xml><?xml version="1.0" encoding="utf-8"?>
+<file path=ppt/slides/slide23.xml><?xml version="1.0" encoding="utf-8"?>
 <p:sld xmlns:a="http://schemas.openxmlformats.org/drawingml/2006/main" xmlns:r="http://schemas.openxmlformats.org/officeDocument/2006/relationships" xmlns:p="http://schemas.openxmlformats.org/presentationml/2006/main">
   <p:cSld>
     <p:spTree>
@@ -9257,7 +9499,7 @@
 </p:sld>
 </file>
 
-<file path=ppt/slides/slide23.xml><?xml version="1.0" encoding="utf-8"?>
+<file path=ppt/slides/slide24.xml><?xml version="1.0" encoding="utf-8"?>
 <p:sld xmlns:a="http://schemas.openxmlformats.org/drawingml/2006/main" xmlns:r="http://schemas.openxmlformats.org/officeDocument/2006/relationships" xmlns:p="http://schemas.openxmlformats.org/presentationml/2006/main">
   <p:cSld>
     <p:spTree>
@@ -10329,7 +10571,7 @@
 </p:sld>
 </file>
 
-<file path=ppt/slides/slide24.xml><?xml version="1.0" encoding="utf-8"?>
+<file path=ppt/slides/slide25.xml><?xml version="1.0" encoding="utf-8"?>
 <p:sld xmlns:a="http://schemas.openxmlformats.org/drawingml/2006/main" xmlns:r="http://schemas.openxmlformats.org/officeDocument/2006/relationships" xmlns:p="http://schemas.openxmlformats.org/presentationml/2006/main">
   <p:cSld>
     <p:spTree>
@@ -10486,7 +10728,2200 @@
 </p:sld>
 </file>
 
-<file path=ppt/slides/slide25.xml><?xml version="1.0" encoding="utf-8"?>
+<file path=ppt/slides/slide26.xml><?xml version="1.0" encoding="utf-8"?>
+<p:sld xmlns:a="http://schemas.openxmlformats.org/drawingml/2006/main" xmlns:r="http://schemas.openxmlformats.org/officeDocument/2006/relationships" xmlns:p="http://schemas.openxmlformats.org/presentationml/2006/main">
+  <p:cSld>
+    <p:spTree>
+      <p:nvGrpSpPr>
+        <p:cNvPr id="1" name=""/>
+        <p:cNvGrpSpPr/>
+        <p:nvPr/>
+      </p:nvGrpSpPr>
+      <p:grpSpPr>
+        <a:xfrm>
+          <a:off x="0" y="0"/>
+          <a:ext cx="0" cy="0"/>
+          <a:chOff x="0" y="0"/>
+          <a:chExt cx="0" cy="0"/>
+        </a:xfrm>
+      </p:grpSpPr>
+      <p:sp>
+        <p:nvSpPr>
+          <p:cNvPr id="2" name="Title 1">
+            <a:extLst>
+              <a:ext uri="{FF2B5EF4-FFF2-40B4-BE49-F238E27FC236}">
+                <a16:creationId xmlns:a16="http://schemas.microsoft.com/office/drawing/2014/main" id="{F610C504-3719-4138-3BD8-FCF460C6D77C}"/>
+              </a:ext>
+            </a:extLst>
+          </p:cNvPr>
+          <p:cNvSpPr>
+            <a:spLocks noGrp="1"/>
+          </p:cNvSpPr>
+          <p:nvPr>
+            <p:ph type="title"/>
+          </p:nvPr>
+        </p:nvSpPr>
+        <p:spPr/>
+        <p:txBody>
+          <a:bodyPr/>
+          <a:lstStyle/>
+          <a:p>
+            <a:r>
+              <a:rPr lang="en-US" dirty="0"/>
+              <a:t>Elasticity analysis</a:t>
+            </a:r>
+          </a:p>
+        </p:txBody>
+      </p:sp>
+      <p:sp>
+        <p:nvSpPr>
+          <p:cNvPr id="3" name="Content Placeholder 2">
+            <a:extLst>
+              <a:ext uri="{FF2B5EF4-FFF2-40B4-BE49-F238E27FC236}">
+                <a16:creationId xmlns:a16="http://schemas.microsoft.com/office/drawing/2014/main" id="{D25B476B-DD63-AD77-D96F-5092DC3F9B5C}"/>
+              </a:ext>
+            </a:extLst>
+          </p:cNvPr>
+          <p:cNvSpPr>
+            <a:spLocks noGrp="1"/>
+          </p:cNvSpPr>
+          <p:nvPr>
+            <p:ph sz="half" idx="1"/>
+          </p:nvPr>
+        </p:nvSpPr>
+        <p:spPr>
+          <a:xfrm>
+            <a:off x="533400" y="1384687"/>
+            <a:ext cx="8305800" cy="4525963"/>
+          </a:xfrm>
+        </p:spPr>
+        <p:txBody>
+          <a:bodyPr/>
+          <a:lstStyle/>
+          <a:p>
+            <a:r>
+              <a:rPr lang="en-US" dirty="0"/>
+              <a:t>Elasticity is how much lambda changes for a given change in a cell in the Leslie matrix</a:t>
+            </a:r>
+          </a:p>
+          <a:p>
+            <a:r>
+              <a:rPr lang="en-US" dirty="0"/>
+              <a:t>Ages or parameters with higher elasticity are more influential on population growth, so are more important for conservation actions</a:t>
+            </a:r>
+          </a:p>
+          <a:p>
+            <a:pPr lvl="1"/>
+            <a:r>
+              <a:rPr lang="en-US" dirty="0"/>
+              <a:t>Often protecting older females from mortality is more important than protecting juveniles, because of their high fecundity</a:t>
+            </a:r>
+          </a:p>
+          <a:p>
+            <a:r>
+              <a:rPr lang="en-US" dirty="0"/>
+              <a:t>Elasticity can be calculated with matrix algebra</a:t>
+            </a:r>
+          </a:p>
+          <a:p>
+            <a:r>
+              <a:rPr lang="en-US" dirty="0"/>
+              <a:t>Elasticities are additive, so you can calculate the total elasticity of a life stage (Juvenile, adult, etc.)</a:t>
+            </a:r>
+          </a:p>
+        </p:txBody>
+      </p:sp>
+    </p:spTree>
+    <p:extLst>
+      <p:ext uri="{BB962C8B-B14F-4D97-AF65-F5344CB8AC3E}">
+        <p14:creationId xmlns:p14="http://schemas.microsoft.com/office/powerpoint/2010/main" val="2390301193"/>
+      </p:ext>
+    </p:extLst>
+  </p:cSld>
+  <p:clrMapOvr>
+    <a:masterClrMapping/>
+  </p:clrMapOvr>
+</p:sld>
+</file>
+
+<file path=ppt/slides/slide27.xml><?xml version="1.0" encoding="utf-8"?>
+<p:sld xmlns:a="http://schemas.openxmlformats.org/drawingml/2006/main" xmlns:r="http://schemas.openxmlformats.org/officeDocument/2006/relationships" xmlns:p="http://schemas.openxmlformats.org/presentationml/2006/main">
+  <p:cSld>
+    <p:spTree>
+      <p:nvGrpSpPr>
+        <p:cNvPr id="1" name=""/>
+        <p:cNvGrpSpPr/>
+        <p:nvPr/>
+      </p:nvGrpSpPr>
+      <p:grpSpPr>
+        <a:xfrm>
+          <a:off x="0" y="0"/>
+          <a:ext cx="0" cy="0"/>
+          <a:chOff x="0" y="0"/>
+          <a:chExt cx="0" cy="0"/>
+        </a:xfrm>
+      </p:grpSpPr>
+      <p:sp>
+        <p:nvSpPr>
+          <p:cNvPr id="2" name="Title 1">
+            <a:extLst>
+              <a:ext uri="{FF2B5EF4-FFF2-40B4-BE49-F238E27FC236}">
+                <a16:creationId xmlns:a16="http://schemas.microsoft.com/office/drawing/2014/main" id="{E5CB2281-3D49-37F7-979C-8E4F033F4B50}"/>
+              </a:ext>
+            </a:extLst>
+          </p:cNvPr>
+          <p:cNvSpPr>
+            <a:spLocks noGrp="1"/>
+          </p:cNvSpPr>
+          <p:nvPr>
+            <p:ph type="title"/>
+          </p:nvPr>
+        </p:nvSpPr>
+        <p:spPr/>
+        <p:txBody>
+          <a:bodyPr/>
+          <a:lstStyle/>
+          <a:p>
+            <a:r>
+              <a:rPr lang="en-US" sz="4000" dirty="0"/>
+              <a:t>Elasticity calculations</a:t>
+            </a:r>
+          </a:p>
+        </p:txBody>
+      </p:sp>
+      <p:sp>
+        <p:nvSpPr>
+          <p:cNvPr id="3" name="Content Placeholder 2">
+            <a:extLst>
+              <a:ext uri="{FF2B5EF4-FFF2-40B4-BE49-F238E27FC236}">
+                <a16:creationId xmlns:a16="http://schemas.microsoft.com/office/drawing/2014/main" id="{64243FE8-9BBC-D502-15B0-1F5C179B72AE}"/>
+              </a:ext>
+            </a:extLst>
+          </p:cNvPr>
+          <p:cNvSpPr>
+            <a:spLocks noGrp="1"/>
+          </p:cNvSpPr>
+          <p:nvPr>
+            <p:ph sz="half" idx="1"/>
+          </p:nvPr>
+        </p:nvSpPr>
+        <p:spPr>
+          <a:xfrm>
+            <a:off x="568411" y="1166018"/>
+            <a:ext cx="8270789" cy="4525963"/>
+          </a:xfrm>
+        </p:spPr>
+        <p:txBody>
+          <a:bodyPr/>
+          <a:lstStyle/>
+          <a:p>
+            <a:r>
+              <a:rPr lang="en-US" sz="2400" dirty="0"/>
+              <a:t>Elasticity is change in proportional change lambda with change in a cell in the Leslie matrix (A)</a:t>
+            </a:r>
+          </a:p>
+          <a:p>
+            <a:r>
+              <a:rPr lang="en-US" sz="2400" dirty="0"/>
+              <a:t>Elasticity=</a:t>
+            </a:r>
+          </a:p>
+          <a:p>
+            <a:endParaRPr lang="en-US" sz="2400" dirty="0"/>
+          </a:p>
+          <a:p>
+            <a:endParaRPr lang="en-US" sz="2400" dirty="0"/>
+          </a:p>
+          <a:p>
+            <a:endParaRPr lang="en-US" sz="2400" dirty="0"/>
+          </a:p>
+          <a:p>
+            <a:r>
+              <a:rPr lang="en-US" sz="2400" dirty="0"/>
+              <a:t>From sensitivity matrix </a:t>
+            </a:r>
+          </a:p>
+          <a:p>
+            <a:r>
+              <a:rPr lang="en-US" sz="2400" dirty="0"/>
+              <a:t>w is the stable age distribution = right eigenvector of A, scaled to sum to 1</a:t>
+            </a:r>
+          </a:p>
+          <a:p>
+            <a:r>
+              <a:rPr lang="en-US" sz="2400" dirty="0"/>
+              <a:t>v is the age specific mortality vector = left eigenvector of A (eigenvector of transpose), scaled so first value is 1</a:t>
+            </a:r>
+          </a:p>
+          <a:p>
+            <a:r>
+              <a:rPr lang="en-US" sz="2400" dirty="0"/>
+              <a:t>The inner product            is the sum of w1*v1+w1*v2, etc. </a:t>
+            </a:r>
+          </a:p>
+          <a:p>
+            <a:endParaRPr lang="en-US" sz="2400" dirty="0"/>
+          </a:p>
+          <a:p>
+            <a:endParaRPr lang="en-US" sz="2400" dirty="0"/>
+          </a:p>
+          <a:p>
+            <a:endParaRPr lang="en-US" sz="2400" dirty="0"/>
+          </a:p>
+        </p:txBody>
+      </p:sp>
+      <p:pic>
+        <p:nvPicPr>
+          <p:cNvPr id="6" name="Picture 5">
+            <a:extLst>
+              <a:ext uri="{FF2B5EF4-FFF2-40B4-BE49-F238E27FC236}">
+                <a16:creationId xmlns:a16="http://schemas.microsoft.com/office/drawing/2014/main" id="{81557756-D53E-00F5-9BD9-EDEB44237D48}"/>
+              </a:ext>
+            </a:extLst>
+          </p:cNvPr>
+          <p:cNvPicPr>
+            <a:picLocks noChangeAspect="1"/>
+          </p:cNvPicPr>
+          <p:nvPr/>
+        </p:nvPicPr>
+        <p:blipFill>
+          <a:blip r:embed="rId2"/>
+          <a:stretch>
+            <a:fillRect/>
+          </a:stretch>
+        </p:blipFill>
+        <p:spPr>
+          <a:xfrm>
+            <a:off x="4343400" y="3377031"/>
+            <a:ext cx="2038635" cy="924054"/>
+          </a:xfrm>
+          <a:prstGeom prst="rect">
+            <a:avLst/>
+          </a:prstGeom>
+        </p:spPr>
+      </p:pic>
+      <p:pic>
+        <p:nvPicPr>
+          <p:cNvPr id="8" name="Picture 7">
+            <a:extLst>
+              <a:ext uri="{FF2B5EF4-FFF2-40B4-BE49-F238E27FC236}">
+                <a16:creationId xmlns:a16="http://schemas.microsoft.com/office/drawing/2014/main" id="{0641BAB8-7C25-98D6-C969-4E72D98FE6A0}"/>
+              </a:ext>
+            </a:extLst>
+          </p:cNvPr>
+          <p:cNvPicPr>
+            <a:picLocks noChangeAspect="1"/>
+          </p:cNvPicPr>
+          <p:nvPr/>
+        </p:nvPicPr>
+        <p:blipFill>
+          <a:blip r:embed="rId3"/>
+          <a:stretch>
+            <a:fillRect/>
+          </a:stretch>
+        </p:blipFill>
+        <p:spPr>
+          <a:xfrm>
+            <a:off x="3263862" y="5864802"/>
+            <a:ext cx="885949" cy="342948"/>
+          </a:xfrm>
+          <a:prstGeom prst="rect">
+            <a:avLst/>
+          </a:prstGeom>
+        </p:spPr>
+      </p:pic>
+      <p:sp>
+        <p:nvSpPr>
+          <p:cNvPr id="10" name="TextBox 9">
+            <a:extLst>
+              <a:ext uri="{FF2B5EF4-FFF2-40B4-BE49-F238E27FC236}">
+                <a16:creationId xmlns:a16="http://schemas.microsoft.com/office/drawing/2014/main" id="{185B8EAE-C1EF-9A77-692F-836071A09F26}"/>
+              </a:ext>
+            </a:extLst>
+          </p:cNvPr>
+          <p:cNvSpPr txBox="1"/>
+          <p:nvPr/>
+        </p:nvSpPr>
+        <p:spPr>
+          <a:xfrm>
+            <a:off x="6858000" y="6248400"/>
+            <a:ext cx="1981200" cy="338554"/>
+          </a:xfrm>
+          <a:prstGeom prst="rect">
+            <a:avLst/>
+          </a:prstGeom>
+          <a:noFill/>
+        </p:spPr>
+        <p:txBody>
+          <a:bodyPr wrap="square" rtlCol="0">
+            <a:spAutoFit/>
+          </a:bodyPr>
+          <a:lstStyle/>
+          <a:p>
+            <a:r>
+              <a:rPr lang="en-US" sz="1600" dirty="0"/>
+              <a:t>Heppell 2007</a:t>
+            </a:r>
+          </a:p>
+        </p:txBody>
+      </p:sp>
+      <p:pic>
+        <p:nvPicPr>
+          <p:cNvPr id="12" name="Picture 11">
+            <a:extLst>
+              <a:ext uri="{FF2B5EF4-FFF2-40B4-BE49-F238E27FC236}">
+                <a16:creationId xmlns:a16="http://schemas.microsoft.com/office/drawing/2014/main" id="{03B57403-CF57-FAD5-F9D0-02B41E9D1EAC}"/>
+              </a:ext>
+            </a:extLst>
+          </p:cNvPr>
+          <p:cNvPicPr>
+            <a:picLocks noChangeAspect="1"/>
+          </p:cNvPicPr>
+          <p:nvPr/>
+        </p:nvPicPr>
+        <p:blipFill>
+          <a:blip r:embed="rId4"/>
+          <a:srcRect r="69224" b="5522"/>
+          <a:stretch>
+            <a:fillRect/>
+          </a:stretch>
+        </p:blipFill>
+        <p:spPr>
+          <a:xfrm>
+            <a:off x="2528687" y="2004571"/>
+            <a:ext cx="1509913" cy="891029"/>
+          </a:xfrm>
+          <a:prstGeom prst="rect">
+            <a:avLst/>
+          </a:prstGeom>
+        </p:spPr>
+      </p:pic>
+      <p:pic>
+        <p:nvPicPr>
+          <p:cNvPr id="4" name="Picture 3">
+            <a:extLst>
+              <a:ext uri="{FF2B5EF4-FFF2-40B4-BE49-F238E27FC236}">
+                <a16:creationId xmlns:a16="http://schemas.microsoft.com/office/drawing/2014/main" id="{61C8D38B-5B15-33A7-6E7E-2339C7BD752E}"/>
+              </a:ext>
+            </a:extLst>
+          </p:cNvPr>
+          <p:cNvPicPr>
+            <a:picLocks noChangeAspect="1"/>
+          </p:cNvPicPr>
+          <p:nvPr/>
+        </p:nvPicPr>
+        <p:blipFill>
+          <a:blip r:embed="rId4"/>
+          <a:srcRect l="60287"/>
+          <a:stretch>
+            <a:fillRect/>
+          </a:stretch>
+        </p:blipFill>
+        <p:spPr>
+          <a:xfrm>
+            <a:off x="4149811" y="2059799"/>
+            <a:ext cx="1948347" cy="943107"/>
+          </a:xfrm>
+          <a:prstGeom prst="rect">
+            <a:avLst/>
+          </a:prstGeom>
+        </p:spPr>
+      </p:pic>
+    </p:spTree>
+    <p:extLst>
+      <p:ext uri="{BB962C8B-B14F-4D97-AF65-F5344CB8AC3E}">
+        <p14:creationId xmlns:p14="http://schemas.microsoft.com/office/powerpoint/2010/main" val="4188333284"/>
+      </p:ext>
+    </p:extLst>
+  </p:cSld>
+  <p:clrMapOvr>
+    <a:masterClrMapping/>
+  </p:clrMapOvr>
+</p:sld>
+</file>
+
+<file path=ppt/slides/slide28.xml><?xml version="1.0" encoding="utf-8"?>
+<p:sld xmlns:a="http://schemas.openxmlformats.org/drawingml/2006/main" xmlns:r="http://schemas.openxmlformats.org/officeDocument/2006/relationships" xmlns:p="http://schemas.openxmlformats.org/presentationml/2006/main">
+  <p:cSld>
+    <p:spTree>
+      <p:nvGrpSpPr>
+        <p:cNvPr id="1" name=""/>
+        <p:cNvGrpSpPr/>
+        <p:nvPr/>
+      </p:nvGrpSpPr>
+      <p:grpSpPr>
+        <a:xfrm>
+          <a:off x="0" y="0"/>
+          <a:ext cx="0" cy="0"/>
+          <a:chOff x="0" y="0"/>
+          <a:chExt cx="0" cy="0"/>
+        </a:xfrm>
+      </p:grpSpPr>
+      <p:sp>
+        <p:nvSpPr>
+          <p:cNvPr id="2" name="Title 1">
+            <a:extLst>
+              <a:ext uri="{FF2B5EF4-FFF2-40B4-BE49-F238E27FC236}">
+                <a16:creationId xmlns:a16="http://schemas.microsoft.com/office/drawing/2014/main" id="{561D0610-8EA0-6E8E-A0C8-A98E1F72B1C5}"/>
+              </a:ext>
+            </a:extLst>
+          </p:cNvPr>
+          <p:cNvSpPr>
+            <a:spLocks noGrp="1"/>
+          </p:cNvSpPr>
+          <p:nvPr>
+            <p:ph type="title"/>
+          </p:nvPr>
+        </p:nvSpPr>
+        <p:spPr/>
+        <p:txBody>
+          <a:bodyPr/>
+          <a:lstStyle/>
+          <a:p>
+            <a:r>
+              <a:rPr lang="en-US" dirty="0"/>
+              <a:t>Elasticity for squirrels</a:t>
+            </a:r>
+          </a:p>
+        </p:txBody>
+      </p:sp>
+      <p:graphicFrame>
+        <p:nvGraphicFramePr>
+          <p:cNvPr id="5" name="Content Placeholder 4">
+            <a:extLst>
+              <a:ext uri="{FF2B5EF4-FFF2-40B4-BE49-F238E27FC236}">
+                <a16:creationId xmlns:a16="http://schemas.microsoft.com/office/drawing/2014/main" id="{2F69596C-E9C0-9785-695E-FE7F23F6CD3B}"/>
+              </a:ext>
+            </a:extLst>
+          </p:cNvPr>
+          <p:cNvGraphicFramePr>
+            <a:graphicFrameLocks noGrp="1"/>
+          </p:cNvGraphicFramePr>
+          <p:nvPr>
+            <p:ph sz="half" idx="1"/>
+            <p:extLst>
+              <p:ext uri="{D42A27DB-BD31-4B8C-83A1-F6EECF244321}">
+                <p14:modId xmlns:p14="http://schemas.microsoft.com/office/powerpoint/2010/main" val="3819756815"/>
+              </p:ext>
+            </p:extLst>
+          </p:nvPr>
+        </p:nvGraphicFramePr>
+        <p:xfrm>
+          <a:off x="990600" y="1524000"/>
+          <a:ext cx="4572000" cy="2224884"/>
+        </p:xfrm>
+        <a:graphic>
+          <a:graphicData uri="http://schemas.openxmlformats.org/drawingml/2006/table">
+            <a:tbl>
+              <a:tblPr>
+                <a:tableStyleId>{5C22544A-7EE6-4342-B048-85BDC9FD1C3A}</a:tableStyleId>
+              </a:tblPr>
+              <a:tblGrid>
+                <a:gridCol w="762000">
+                  <a:extLst>
+                    <a:ext uri="{9D8B030D-6E8A-4147-A177-3AD203B41FA5}">
+                      <a16:colId xmlns:a16="http://schemas.microsoft.com/office/drawing/2014/main" val="2120907187"/>
+                    </a:ext>
+                  </a:extLst>
+                </a:gridCol>
+                <a:gridCol w="762000">
+                  <a:extLst>
+                    <a:ext uri="{9D8B030D-6E8A-4147-A177-3AD203B41FA5}">
+                      <a16:colId xmlns:a16="http://schemas.microsoft.com/office/drawing/2014/main" val="2160110545"/>
+                    </a:ext>
+                  </a:extLst>
+                </a:gridCol>
+                <a:gridCol w="762000">
+                  <a:extLst>
+                    <a:ext uri="{9D8B030D-6E8A-4147-A177-3AD203B41FA5}">
+                      <a16:colId xmlns:a16="http://schemas.microsoft.com/office/drawing/2014/main" val="1418670477"/>
+                    </a:ext>
+                  </a:extLst>
+                </a:gridCol>
+                <a:gridCol w="762000">
+                  <a:extLst>
+                    <a:ext uri="{9D8B030D-6E8A-4147-A177-3AD203B41FA5}">
+                      <a16:colId xmlns:a16="http://schemas.microsoft.com/office/drawing/2014/main" val="2961258084"/>
+                    </a:ext>
+                  </a:extLst>
+                </a:gridCol>
+                <a:gridCol w="762000">
+                  <a:extLst>
+                    <a:ext uri="{9D8B030D-6E8A-4147-A177-3AD203B41FA5}">
+                      <a16:colId xmlns:a16="http://schemas.microsoft.com/office/drawing/2014/main" val="1952923094"/>
+                    </a:ext>
+                  </a:extLst>
+                </a:gridCol>
+                <a:gridCol w="762000">
+                  <a:extLst>
+                    <a:ext uri="{9D8B030D-6E8A-4147-A177-3AD203B41FA5}">
+                      <a16:colId xmlns:a16="http://schemas.microsoft.com/office/drawing/2014/main" val="3357754842"/>
+                    </a:ext>
+                  </a:extLst>
+                </a:gridCol>
+              </a:tblGrid>
+              <a:tr h="370814">
+                <a:tc>
+                  <a:txBody>
+                    <a:bodyPr/>
+                    <a:lstStyle/>
+                    <a:p>
+                      <a:pPr algn="l" fontAlgn="b">
+                        <a:buNone/>
+                      </a:pPr>
+                      <a:endParaRPr lang="en-US" sz="2000" b="0" i="0" u="none" strike="noStrike" dirty="0">
+                        <a:solidFill>
+                          <a:srgbClr val="000000"/>
+                        </a:solidFill>
+                        <a:effectLst/>
+                        <a:latin typeface="Aptos Narrow" panose="020B0004020202020204" pitchFamily="34" charset="0"/>
+                      </a:endParaRPr>
+                    </a:p>
+                  </a:txBody>
+                  <a:tcPr marL="7620" marR="7620" marT="7620" marB="0" anchor="b"/>
+                </a:tc>
+                <a:tc>
+                  <a:txBody>
+                    <a:bodyPr/>
+                    <a:lstStyle/>
+                    <a:p>
+                      <a:pPr algn="l" fontAlgn="b">
+                        <a:buNone/>
+                      </a:pPr>
+                      <a:r>
+                        <a:rPr lang="en-US" sz="2000" u="none" strike="noStrike">
+                          <a:effectLst/>
+                        </a:rPr>
+                        <a:t>[,1]</a:t>
+                      </a:r>
+                      <a:endParaRPr lang="en-US" sz="2000" b="0" i="0" u="none" strike="noStrike">
+                        <a:solidFill>
+                          <a:srgbClr val="000000"/>
+                        </a:solidFill>
+                        <a:effectLst/>
+                        <a:latin typeface="Aptos Narrow" panose="020B0004020202020204" pitchFamily="34" charset="0"/>
+                      </a:endParaRPr>
+                    </a:p>
+                  </a:txBody>
+                  <a:tcPr marL="7620" marR="7620" marT="7620" marB="0" anchor="b"/>
+                </a:tc>
+                <a:tc>
+                  <a:txBody>
+                    <a:bodyPr/>
+                    <a:lstStyle/>
+                    <a:p>
+                      <a:pPr algn="l" fontAlgn="b">
+                        <a:buNone/>
+                      </a:pPr>
+                      <a:r>
+                        <a:rPr lang="en-US" sz="2000" u="none" strike="noStrike">
+                          <a:effectLst/>
+                        </a:rPr>
+                        <a:t>[,2]</a:t>
+                      </a:r>
+                      <a:endParaRPr lang="en-US" sz="2000" b="0" i="0" u="none" strike="noStrike">
+                        <a:solidFill>
+                          <a:srgbClr val="000000"/>
+                        </a:solidFill>
+                        <a:effectLst/>
+                        <a:latin typeface="Aptos Narrow" panose="020B0004020202020204" pitchFamily="34" charset="0"/>
+                      </a:endParaRPr>
+                    </a:p>
+                  </a:txBody>
+                  <a:tcPr marL="7620" marR="7620" marT="7620" marB="0" anchor="b"/>
+                </a:tc>
+                <a:tc>
+                  <a:txBody>
+                    <a:bodyPr/>
+                    <a:lstStyle/>
+                    <a:p>
+                      <a:pPr algn="l" fontAlgn="b">
+                        <a:buNone/>
+                      </a:pPr>
+                      <a:r>
+                        <a:rPr lang="en-US" sz="2000" u="none" strike="noStrike">
+                          <a:effectLst/>
+                        </a:rPr>
+                        <a:t>[,3]</a:t>
+                      </a:r>
+                      <a:endParaRPr lang="en-US" sz="2000" b="0" i="0" u="none" strike="noStrike">
+                        <a:solidFill>
+                          <a:srgbClr val="000000"/>
+                        </a:solidFill>
+                        <a:effectLst/>
+                        <a:latin typeface="Aptos Narrow" panose="020B0004020202020204" pitchFamily="34" charset="0"/>
+                      </a:endParaRPr>
+                    </a:p>
+                  </a:txBody>
+                  <a:tcPr marL="7620" marR="7620" marT="7620" marB="0" anchor="b"/>
+                </a:tc>
+                <a:tc>
+                  <a:txBody>
+                    <a:bodyPr/>
+                    <a:lstStyle/>
+                    <a:p>
+                      <a:pPr algn="l" fontAlgn="b">
+                        <a:buNone/>
+                      </a:pPr>
+                      <a:r>
+                        <a:rPr lang="en-US" sz="2000" u="none" strike="noStrike">
+                          <a:effectLst/>
+                        </a:rPr>
+                        <a:t>[,4]</a:t>
+                      </a:r>
+                      <a:endParaRPr lang="en-US" sz="2000" b="0" i="0" u="none" strike="noStrike">
+                        <a:solidFill>
+                          <a:srgbClr val="000000"/>
+                        </a:solidFill>
+                        <a:effectLst/>
+                        <a:latin typeface="Aptos Narrow" panose="020B0004020202020204" pitchFamily="34" charset="0"/>
+                      </a:endParaRPr>
+                    </a:p>
+                  </a:txBody>
+                  <a:tcPr marL="7620" marR="7620" marT="7620" marB="0" anchor="b"/>
+                </a:tc>
+                <a:tc>
+                  <a:txBody>
+                    <a:bodyPr/>
+                    <a:lstStyle/>
+                    <a:p>
+                      <a:pPr algn="l" fontAlgn="b">
+                        <a:buNone/>
+                      </a:pPr>
+                      <a:r>
+                        <a:rPr lang="en-US" sz="2000" u="none" strike="noStrike">
+                          <a:effectLst/>
+                        </a:rPr>
+                        <a:t>[,5]</a:t>
+                      </a:r>
+                      <a:endParaRPr lang="en-US" sz="2000" b="0" i="0" u="none" strike="noStrike">
+                        <a:solidFill>
+                          <a:srgbClr val="000000"/>
+                        </a:solidFill>
+                        <a:effectLst/>
+                        <a:latin typeface="Aptos Narrow" panose="020B0004020202020204" pitchFamily="34" charset="0"/>
+                      </a:endParaRPr>
+                    </a:p>
+                  </a:txBody>
+                  <a:tcPr marL="7620" marR="7620" marT="7620" marB="0" anchor="b"/>
+                </a:tc>
+                <a:extLst>
+                  <a:ext uri="{0D108BD9-81ED-4DB2-BD59-A6C34878D82A}">
+                    <a16:rowId xmlns:a16="http://schemas.microsoft.com/office/drawing/2014/main" val="596258354"/>
+                  </a:ext>
+                </a:extLst>
+              </a:tr>
+              <a:tr h="370814">
+                <a:tc>
+                  <a:txBody>
+                    <a:bodyPr/>
+                    <a:lstStyle/>
+                    <a:p>
+                      <a:pPr algn="l" fontAlgn="b">
+                        <a:buNone/>
+                      </a:pPr>
+                      <a:r>
+                        <a:rPr lang="en-US" sz="2000" u="none" strike="noStrike">
+                          <a:effectLst/>
+                        </a:rPr>
+                        <a:t>[1,]</a:t>
+                      </a:r>
+                      <a:endParaRPr lang="en-US" sz="2000" b="0" i="0" u="none" strike="noStrike">
+                        <a:solidFill>
+                          <a:srgbClr val="000000"/>
+                        </a:solidFill>
+                        <a:effectLst/>
+                        <a:latin typeface="Aptos Narrow" panose="020B0004020202020204" pitchFamily="34" charset="0"/>
+                      </a:endParaRPr>
+                    </a:p>
+                  </a:txBody>
+                  <a:tcPr marL="7620" marR="7620" marT="7620" marB="0" anchor="b"/>
+                </a:tc>
+                <a:tc>
+                  <a:txBody>
+                    <a:bodyPr/>
+                    <a:lstStyle/>
+                    <a:p>
+                      <a:pPr algn="r" fontAlgn="b">
+                        <a:buNone/>
+                      </a:pPr>
+                      <a:r>
+                        <a:rPr lang="en-US" sz="2000" u="none" strike="noStrike" dirty="0">
+                          <a:effectLst/>
+                        </a:rPr>
+                        <a:t>0.34</a:t>
+                      </a:r>
+                      <a:endParaRPr lang="en-US" sz="2000" b="0" i="0" u="none" strike="noStrike" dirty="0">
+                        <a:solidFill>
+                          <a:srgbClr val="000000"/>
+                        </a:solidFill>
+                        <a:effectLst/>
+                        <a:latin typeface="Aptos Narrow" panose="020B0004020202020204" pitchFamily="34" charset="0"/>
+                      </a:endParaRPr>
+                    </a:p>
+                  </a:txBody>
+                  <a:tcPr marL="7620" marR="7620" marT="7620" marB="0" anchor="b"/>
+                </a:tc>
+                <a:tc>
+                  <a:txBody>
+                    <a:bodyPr/>
+                    <a:lstStyle/>
+                    <a:p>
+                      <a:pPr algn="r" fontAlgn="b">
+                        <a:buNone/>
+                      </a:pPr>
+                      <a:r>
+                        <a:rPr lang="en-US" sz="2000" u="none" strike="noStrike" dirty="0">
+                          <a:effectLst/>
+                        </a:rPr>
+                        <a:t>0.20 </a:t>
+                      </a:r>
+                      <a:endParaRPr lang="en-US" sz="2000" b="0" i="0" u="none" strike="noStrike" dirty="0">
+                        <a:solidFill>
+                          <a:srgbClr val="000000"/>
+                        </a:solidFill>
+                        <a:effectLst/>
+                        <a:latin typeface="Aptos Narrow" panose="020B0004020202020204" pitchFamily="34" charset="0"/>
+                      </a:endParaRPr>
+                    </a:p>
+                  </a:txBody>
+                  <a:tcPr marL="7620" marR="7620" marT="7620" marB="0" anchor="b"/>
+                </a:tc>
+                <a:tc>
+                  <a:txBody>
+                    <a:bodyPr/>
+                    <a:lstStyle/>
+                    <a:p>
+                      <a:pPr algn="r" fontAlgn="b">
+                        <a:buNone/>
+                      </a:pPr>
+                      <a:r>
+                        <a:rPr lang="en-US" sz="2000" u="none" strike="noStrike">
+                          <a:effectLst/>
+                        </a:rPr>
+                        <a:t>0.06</a:t>
+                      </a:r>
+                      <a:endParaRPr lang="en-US" sz="2000" b="0" i="0" u="none" strike="noStrike">
+                        <a:solidFill>
+                          <a:srgbClr val="000000"/>
+                        </a:solidFill>
+                        <a:effectLst/>
+                        <a:latin typeface="Aptos Narrow" panose="020B0004020202020204" pitchFamily="34" charset="0"/>
+                      </a:endParaRPr>
+                    </a:p>
+                  </a:txBody>
+                  <a:tcPr marL="7620" marR="7620" marT="7620" marB="0" anchor="b"/>
+                </a:tc>
+                <a:tc>
+                  <a:txBody>
+                    <a:bodyPr/>
+                    <a:lstStyle/>
+                    <a:p>
+                      <a:pPr algn="r" fontAlgn="b">
+                        <a:buNone/>
+                      </a:pPr>
+                      <a:r>
+                        <a:rPr lang="en-US" sz="2000" u="none" strike="noStrike">
+                          <a:effectLst/>
+                        </a:rPr>
+                        <a:t>0.02</a:t>
+                      </a:r>
+                      <a:endParaRPr lang="en-US" sz="2000" b="0" i="0" u="none" strike="noStrike">
+                        <a:solidFill>
+                          <a:srgbClr val="000000"/>
+                        </a:solidFill>
+                        <a:effectLst/>
+                        <a:latin typeface="Aptos Narrow" panose="020B0004020202020204" pitchFamily="34" charset="0"/>
+                      </a:endParaRPr>
+                    </a:p>
+                  </a:txBody>
+                  <a:tcPr marL="7620" marR="7620" marT="7620" marB="0" anchor="b"/>
+                </a:tc>
+                <a:tc>
+                  <a:txBody>
+                    <a:bodyPr/>
+                    <a:lstStyle/>
+                    <a:p>
+                      <a:pPr algn="r" fontAlgn="b">
+                        <a:buNone/>
+                      </a:pPr>
+                      <a:r>
+                        <a:rPr lang="en-US" sz="2000" u="none" strike="noStrike">
+                          <a:effectLst/>
+                        </a:rPr>
+                        <a:t>0</a:t>
+                      </a:r>
+                      <a:endParaRPr lang="en-US" sz="2000" b="0" i="0" u="none" strike="noStrike">
+                        <a:solidFill>
+                          <a:srgbClr val="000000"/>
+                        </a:solidFill>
+                        <a:effectLst/>
+                        <a:latin typeface="Aptos Narrow" panose="020B0004020202020204" pitchFamily="34" charset="0"/>
+                      </a:endParaRPr>
+                    </a:p>
+                  </a:txBody>
+                  <a:tcPr marL="7620" marR="7620" marT="7620" marB="0" anchor="b"/>
+                </a:tc>
+                <a:extLst>
+                  <a:ext uri="{0D108BD9-81ED-4DB2-BD59-A6C34878D82A}">
+                    <a16:rowId xmlns:a16="http://schemas.microsoft.com/office/drawing/2014/main" val="2233104178"/>
+                  </a:ext>
+                </a:extLst>
+              </a:tr>
+              <a:tr h="370814">
+                <a:tc>
+                  <a:txBody>
+                    <a:bodyPr/>
+                    <a:lstStyle/>
+                    <a:p>
+                      <a:pPr algn="l" fontAlgn="b">
+                        <a:buNone/>
+                      </a:pPr>
+                      <a:r>
+                        <a:rPr lang="en-US" sz="2000" u="none" strike="noStrike">
+                          <a:effectLst/>
+                        </a:rPr>
+                        <a:t>[2,]</a:t>
+                      </a:r>
+                      <a:endParaRPr lang="en-US" sz="2000" b="0" i="0" u="none" strike="noStrike">
+                        <a:solidFill>
+                          <a:srgbClr val="000000"/>
+                        </a:solidFill>
+                        <a:effectLst/>
+                        <a:latin typeface="Aptos Narrow" panose="020B0004020202020204" pitchFamily="34" charset="0"/>
+                      </a:endParaRPr>
+                    </a:p>
+                  </a:txBody>
+                  <a:tcPr marL="7620" marR="7620" marT="7620" marB="0" anchor="b"/>
+                </a:tc>
+                <a:tc>
+                  <a:txBody>
+                    <a:bodyPr/>
+                    <a:lstStyle/>
+                    <a:p>
+                      <a:pPr algn="r" fontAlgn="b">
+                        <a:buNone/>
+                      </a:pPr>
+                      <a:r>
+                        <a:rPr lang="en-US" sz="2000" u="none" strike="noStrike">
+                          <a:effectLst/>
+                        </a:rPr>
+                        <a:t>0.28</a:t>
+                      </a:r>
+                      <a:endParaRPr lang="en-US" sz="2000" b="0" i="0" u="none" strike="noStrike">
+                        <a:solidFill>
+                          <a:srgbClr val="000000"/>
+                        </a:solidFill>
+                        <a:effectLst/>
+                        <a:latin typeface="Aptos Narrow" panose="020B0004020202020204" pitchFamily="34" charset="0"/>
+                      </a:endParaRPr>
+                    </a:p>
+                  </a:txBody>
+                  <a:tcPr marL="7620" marR="7620" marT="7620" marB="0" anchor="b"/>
+                </a:tc>
+                <a:tc>
+                  <a:txBody>
+                    <a:bodyPr/>
+                    <a:lstStyle/>
+                    <a:p>
+                      <a:pPr algn="r" fontAlgn="b">
+                        <a:buNone/>
+                      </a:pPr>
+                      <a:r>
+                        <a:rPr lang="en-US" sz="2000" u="none" strike="noStrike">
+                          <a:effectLst/>
+                        </a:rPr>
+                        <a:t>0</a:t>
+                      </a:r>
+                      <a:endParaRPr lang="en-US" sz="2000" b="0" i="0" u="none" strike="noStrike">
+                        <a:solidFill>
+                          <a:srgbClr val="000000"/>
+                        </a:solidFill>
+                        <a:effectLst/>
+                        <a:latin typeface="Aptos Narrow" panose="020B0004020202020204" pitchFamily="34" charset="0"/>
+                      </a:endParaRPr>
+                    </a:p>
+                  </a:txBody>
+                  <a:tcPr marL="7620" marR="7620" marT="7620" marB="0" anchor="b"/>
+                </a:tc>
+                <a:tc>
+                  <a:txBody>
+                    <a:bodyPr/>
+                    <a:lstStyle/>
+                    <a:p>
+                      <a:pPr algn="r" fontAlgn="b">
+                        <a:buNone/>
+                      </a:pPr>
+                      <a:r>
+                        <a:rPr lang="en-US" sz="2000" u="none" strike="noStrike">
+                          <a:effectLst/>
+                        </a:rPr>
+                        <a:t>0</a:t>
+                      </a:r>
+                      <a:endParaRPr lang="en-US" sz="2000" b="0" i="0" u="none" strike="noStrike">
+                        <a:solidFill>
+                          <a:srgbClr val="000000"/>
+                        </a:solidFill>
+                        <a:effectLst/>
+                        <a:latin typeface="Aptos Narrow" panose="020B0004020202020204" pitchFamily="34" charset="0"/>
+                      </a:endParaRPr>
+                    </a:p>
+                  </a:txBody>
+                  <a:tcPr marL="7620" marR="7620" marT="7620" marB="0" anchor="b"/>
+                </a:tc>
+                <a:tc>
+                  <a:txBody>
+                    <a:bodyPr/>
+                    <a:lstStyle/>
+                    <a:p>
+                      <a:pPr algn="r" fontAlgn="b">
+                        <a:buNone/>
+                      </a:pPr>
+                      <a:r>
+                        <a:rPr lang="en-US" sz="2000" u="none" strike="noStrike">
+                          <a:effectLst/>
+                        </a:rPr>
+                        <a:t>0</a:t>
+                      </a:r>
+                      <a:endParaRPr lang="en-US" sz="2000" b="0" i="0" u="none" strike="noStrike">
+                        <a:solidFill>
+                          <a:srgbClr val="000000"/>
+                        </a:solidFill>
+                        <a:effectLst/>
+                        <a:latin typeface="Aptos Narrow" panose="020B0004020202020204" pitchFamily="34" charset="0"/>
+                      </a:endParaRPr>
+                    </a:p>
+                  </a:txBody>
+                  <a:tcPr marL="7620" marR="7620" marT="7620" marB="0" anchor="b"/>
+                </a:tc>
+                <a:tc>
+                  <a:txBody>
+                    <a:bodyPr/>
+                    <a:lstStyle/>
+                    <a:p>
+                      <a:pPr algn="r" fontAlgn="b">
+                        <a:buNone/>
+                      </a:pPr>
+                      <a:r>
+                        <a:rPr lang="en-US" sz="2000" u="none" strike="noStrike">
+                          <a:effectLst/>
+                        </a:rPr>
+                        <a:t>0</a:t>
+                      </a:r>
+                      <a:endParaRPr lang="en-US" sz="2000" b="0" i="0" u="none" strike="noStrike">
+                        <a:solidFill>
+                          <a:srgbClr val="000000"/>
+                        </a:solidFill>
+                        <a:effectLst/>
+                        <a:latin typeface="Aptos Narrow" panose="020B0004020202020204" pitchFamily="34" charset="0"/>
+                      </a:endParaRPr>
+                    </a:p>
+                  </a:txBody>
+                  <a:tcPr marL="7620" marR="7620" marT="7620" marB="0" anchor="b"/>
+                </a:tc>
+                <a:extLst>
+                  <a:ext uri="{0D108BD9-81ED-4DB2-BD59-A6C34878D82A}">
+                    <a16:rowId xmlns:a16="http://schemas.microsoft.com/office/drawing/2014/main" val="66938762"/>
+                  </a:ext>
+                </a:extLst>
+              </a:tr>
+              <a:tr h="370814">
+                <a:tc>
+                  <a:txBody>
+                    <a:bodyPr/>
+                    <a:lstStyle/>
+                    <a:p>
+                      <a:pPr algn="l" fontAlgn="b">
+                        <a:buNone/>
+                      </a:pPr>
+                      <a:r>
+                        <a:rPr lang="en-US" sz="2000" u="none" strike="noStrike">
+                          <a:effectLst/>
+                        </a:rPr>
+                        <a:t>[3,]</a:t>
+                      </a:r>
+                      <a:endParaRPr lang="en-US" sz="2000" b="0" i="0" u="none" strike="noStrike">
+                        <a:solidFill>
+                          <a:srgbClr val="000000"/>
+                        </a:solidFill>
+                        <a:effectLst/>
+                        <a:latin typeface="Aptos Narrow" panose="020B0004020202020204" pitchFamily="34" charset="0"/>
+                      </a:endParaRPr>
+                    </a:p>
+                  </a:txBody>
+                  <a:tcPr marL="7620" marR="7620" marT="7620" marB="0" anchor="b"/>
+                </a:tc>
+                <a:tc>
+                  <a:txBody>
+                    <a:bodyPr/>
+                    <a:lstStyle/>
+                    <a:p>
+                      <a:pPr algn="r" fontAlgn="b">
+                        <a:buNone/>
+                      </a:pPr>
+                      <a:r>
+                        <a:rPr lang="en-US" sz="2000" u="none" strike="noStrike">
+                          <a:effectLst/>
+                        </a:rPr>
+                        <a:t>0</a:t>
+                      </a:r>
+                      <a:endParaRPr lang="en-US" sz="2000" b="0" i="0" u="none" strike="noStrike">
+                        <a:solidFill>
+                          <a:srgbClr val="000000"/>
+                        </a:solidFill>
+                        <a:effectLst/>
+                        <a:latin typeface="Aptos Narrow" panose="020B0004020202020204" pitchFamily="34" charset="0"/>
+                      </a:endParaRPr>
+                    </a:p>
+                  </a:txBody>
+                  <a:tcPr marL="7620" marR="7620" marT="7620" marB="0" anchor="b"/>
+                </a:tc>
+                <a:tc>
+                  <a:txBody>
+                    <a:bodyPr/>
+                    <a:lstStyle/>
+                    <a:p>
+                      <a:pPr algn="r" fontAlgn="b">
+                        <a:buNone/>
+                      </a:pPr>
+                      <a:r>
+                        <a:rPr lang="en-US" sz="2000" u="none" strike="noStrike">
+                          <a:effectLst/>
+                        </a:rPr>
+                        <a:t>0.08</a:t>
+                      </a:r>
+                      <a:endParaRPr lang="en-US" sz="2000" b="0" i="0" u="none" strike="noStrike">
+                        <a:solidFill>
+                          <a:srgbClr val="000000"/>
+                        </a:solidFill>
+                        <a:effectLst/>
+                        <a:latin typeface="Aptos Narrow" panose="020B0004020202020204" pitchFamily="34" charset="0"/>
+                      </a:endParaRPr>
+                    </a:p>
+                  </a:txBody>
+                  <a:tcPr marL="7620" marR="7620" marT="7620" marB="0" anchor="b"/>
+                </a:tc>
+                <a:tc>
+                  <a:txBody>
+                    <a:bodyPr/>
+                    <a:lstStyle/>
+                    <a:p>
+                      <a:pPr algn="r" fontAlgn="b">
+                        <a:buNone/>
+                      </a:pPr>
+                      <a:r>
+                        <a:rPr lang="en-US" sz="2000" u="none" strike="noStrike" dirty="0">
+                          <a:effectLst/>
+                        </a:rPr>
+                        <a:t>0</a:t>
+                      </a:r>
+                      <a:endParaRPr lang="en-US" sz="2000" b="0" i="0" u="none" strike="noStrike" dirty="0">
+                        <a:solidFill>
+                          <a:srgbClr val="000000"/>
+                        </a:solidFill>
+                        <a:effectLst/>
+                        <a:latin typeface="Aptos Narrow" panose="020B0004020202020204" pitchFamily="34" charset="0"/>
+                      </a:endParaRPr>
+                    </a:p>
+                  </a:txBody>
+                  <a:tcPr marL="7620" marR="7620" marT="7620" marB="0" anchor="b"/>
+                </a:tc>
+                <a:tc>
+                  <a:txBody>
+                    <a:bodyPr/>
+                    <a:lstStyle/>
+                    <a:p>
+                      <a:pPr algn="r" fontAlgn="b">
+                        <a:buNone/>
+                      </a:pPr>
+                      <a:r>
+                        <a:rPr lang="en-US" sz="2000" u="none" strike="noStrike">
+                          <a:effectLst/>
+                        </a:rPr>
+                        <a:t>0</a:t>
+                      </a:r>
+                      <a:endParaRPr lang="en-US" sz="2000" b="0" i="0" u="none" strike="noStrike">
+                        <a:solidFill>
+                          <a:srgbClr val="000000"/>
+                        </a:solidFill>
+                        <a:effectLst/>
+                        <a:latin typeface="Aptos Narrow" panose="020B0004020202020204" pitchFamily="34" charset="0"/>
+                      </a:endParaRPr>
+                    </a:p>
+                  </a:txBody>
+                  <a:tcPr marL="7620" marR="7620" marT="7620" marB="0" anchor="b"/>
+                </a:tc>
+                <a:tc>
+                  <a:txBody>
+                    <a:bodyPr/>
+                    <a:lstStyle/>
+                    <a:p>
+                      <a:pPr algn="r" fontAlgn="b">
+                        <a:buNone/>
+                      </a:pPr>
+                      <a:r>
+                        <a:rPr lang="en-US" sz="2000" u="none" strike="noStrike">
+                          <a:effectLst/>
+                        </a:rPr>
+                        <a:t>0</a:t>
+                      </a:r>
+                      <a:endParaRPr lang="en-US" sz="2000" b="0" i="0" u="none" strike="noStrike">
+                        <a:solidFill>
+                          <a:srgbClr val="000000"/>
+                        </a:solidFill>
+                        <a:effectLst/>
+                        <a:latin typeface="Aptos Narrow" panose="020B0004020202020204" pitchFamily="34" charset="0"/>
+                      </a:endParaRPr>
+                    </a:p>
+                  </a:txBody>
+                  <a:tcPr marL="7620" marR="7620" marT="7620" marB="0" anchor="b"/>
+                </a:tc>
+                <a:extLst>
+                  <a:ext uri="{0D108BD9-81ED-4DB2-BD59-A6C34878D82A}">
+                    <a16:rowId xmlns:a16="http://schemas.microsoft.com/office/drawing/2014/main" val="2753957334"/>
+                  </a:ext>
+                </a:extLst>
+              </a:tr>
+              <a:tr h="370814">
+                <a:tc>
+                  <a:txBody>
+                    <a:bodyPr/>
+                    <a:lstStyle/>
+                    <a:p>
+                      <a:pPr algn="l" fontAlgn="b">
+                        <a:buNone/>
+                      </a:pPr>
+                      <a:r>
+                        <a:rPr lang="en-US" sz="2000" u="none" strike="noStrike">
+                          <a:effectLst/>
+                        </a:rPr>
+                        <a:t>[4,]</a:t>
+                      </a:r>
+                      <a:endParaRPr lang="en-US" sz="2000" b="0" i="0" u="none" strike="noStrike">
+                        <a:solidFill>
+                          <a:srgbClr val="000000"/>
+                        </a:solidFill>
+                        <a:effectLst/>
+                        <a:latin typeface="Aptos Narrow" panose="020B0004020202020204" pitchFamily="34" charset="0"/>
+                      </a:endParaRPr>
+                    </a:p>
+                  </a:txBody>
+                  <a:tcPr marL="7620" marR="7620" marT="7620" marB="0" anchor="b"/>
+                </a:tc>
+                <a:tc>
+                  <a:txBody>
+                    <a:bodyPr/>
+                    <a:lstStyle/>
+                    <a:p>
+                      <a:pPr algn="r" fontAlgn="b">
+                        <a:buNone/>
+                      </a:pPr>
+                      <a:r>
+                        <a:rPr lang="en-US" sz="2000" u="none" strike="noStrike">
+                          <a:effectLst/>
+                        </a:rPr>
+                        <a:t>0</a:t>
+                      </a:r>
+                      <a:endParaRPr lang="en-US" sz="2000" b="0" i="0" u="none" strike="noStrike">
+                        <a:solidFill>
+                          <a:srgbClr val="000000"/>
+                        </a:solidFill>
+                        <a:effectLst/>
+                        <a:latin typeface="Aptos Narrow" panose="020B0004020202020204" pitchFamily="34" charset="0"/>
+                      </a:endParaRPr>
+                    </a:p>
+                  </a:txBody>
+                  <a:tcPr marL="7620" marR="7620" marT="7620" marB="0" anchor="b"/>
+                </a:tc>
+                <a:tc>
+                  <a:txBody>
+                    <a:bodyPr/>
+                    <a:lstStyle/>
+                    <a:p>
+                      <a:pPr algn="r" fontAlgn="b">
+                        <a:buNone/>
+                      </a:pPr>
+                      <a:r>
+                        <a:rPr lang="en-US" sz="2000" u="none" strike="noStrike">
+                          <a:effectLst/>
+                        </a:rPr>
+                        <a:t>0</a:t>
+                      </a:r>
+                      <a:endParaRPr lang="en-US" sz="2000" b="0" i="0" u="none" strike="noStrike">
+                        <a:solidFill>
+                          <a:srgbClr val="000000"/>
+                        </a:solidFill>
+                        <a:effectLst/>
+                        <a:latin typeface="Aptos Narrow" panose="020B0004020202020204" pitchFamily="34" charset="0"/>
+                      </a:endParaRPr>
+                    </a:p>
+                  </a:txBody>
+                  <a:tcPr marL="7620" marR="7620" marT="7620" marB="0" anchor="b"/>
+                </a:tc>
+                <a:tc>
+                  <a:txBody>
+                    <a:bodyPr/>
+                    <a:lstStyle/>
+                    <a:p>
+                      <a:pPr algn="r" fontAlgn="b">
+                        <a:buNone/>
+                      </a:pPr>
+                      <a:r>
+                        <a:rPr lang="en-US" sz="2000" u="none" strike="noStrike">
+                          <a:effectLst/>
+                        </a:rPr>
+                        <a:t>0.02</a:t>
+                      </a:r>
+                      <a:endParaRPr lang="en-US" sz="2000" b="0" i="0" u="none" strike="noStrike">
+                        <a:solidFill>
+                          <a:srgbClr val="000000"/>
+                        </a:solidFill>
+                        <a:effectLst/>
+                        <a:latin typeface="Aptos Narrow" panose="020B0004020202020204" pitchFamily="34" charset="0"/>
+                      </a:endParaRPr>
+                    </a:p>
+                  </a:txBody>
+                  <a:tcPr marL="7620" marR="7620" marT="7620" marB="0" anchor="b"/>
+                </a:tc>
+                <a:tc>
+                  <a:txBody>
+                    <a:bodyPr/>
+                    <a:lstStyle/>
+                    <a:p>
+                      <a:pPr algn="r" fontAlgn="b">
+                        <a:buNone/>
+                      </a:pPr>
+                      <a:r>
+                        <a:rPr lang="en-US" sz="2000" u="none" strike="noStrike">
+                          <a:effectLst/>
+                        </a:rPr>
+                        <a:t>0</a:t>
+                      </a:r>
+                      <a:endParaRPr lang="en-US" sz="2000" b="0" i="0" u="none" strike="noStrike">
+                        <a:solidFill>
+                          <a:srgbClr val="000000"/>
+                        </a:solidFill>
+                        <a:effectLst/>
+                        <a:latin typeface="Aptos Narrow" panose="020B0004020202020204" pitchFamily="34" charset="0"/>
+                      </a:endParaRPr>
+                    </a:p>
+                  </a:txBody>
+                  <a:tcPr marL="7620" marR="7620" marT="7620" marB="0" anchor="b"/>
+                </a:tc>
+                <a:tc>
+                  <a:txBody>
+                    <a:bodyPr/>
+                    <a:lstStyle/>
+                    <a:p>
+                      <a:pPr algn="r" fontAlgn="b">
+                        <a:buNone/>
+                      </a:pPr>
+                      <a:r>
+                        <a:rPr lang="en-US" sz="2000" u="none" strike="noStrike" dirty="0">
+                          <a:effectLst/>
+                        </a:rPr>
+                        <a:t>0</a:t>
+                      </a:r>
+                      <a:endParaRPr lang="en-US" sz="2000" b="0" i="0" u="none" strike="noStrike" dirty="0">
+                        <a:solidFill>
+                          <a:srgbClr val="000000"/>
+                        </a:solidFill>
+                        <a:effectLst/>
+                        <a:latin typeface="Aptos Narrow" panose="020B0004020202020204" pitchFamily="34" charset="0"/>
+                      </a:endParaRPr>
+                    </a:p>
+                  </a:txBody>
+                  <a:tcPr marL="7620" marR="7620" marT="7620" marB="0" anchor="b"/>
+                </a:tc>
+                <a:extLst>
+                  <a:ext uri="{0D108BD9-81ED-4DB2-BD59-A6C34878D82A}">
+                    <a16:rowId xmlns:a16="http://schemas.microsoft.com/office/drawing/2014/main" val="1666235910"/>
+                  </a:ext>
+                </a:extLst>
+              </a:tr>
+              <a:tr h="370814">
+                <a:tc>
+                  <a:txBody>
+                    <a:bodyPr/>
+                    <a:lstStyle/>
+                    <a:p>
+                      <a:pPr algn="l" fontAlgn="b">
+                        <a:buNone/>
+                      </a:pPr>
+                      <a:r>
+                        <a:rPr lang="en-US" sz="2000" u="none" strike="noStrike">
+                          <a:effectLst/>
+                        </a:rPr>
+                        <a:t>[5,]</a:t>
+                      </a:r>
+                      <a:endParaRPr lang="en-US" sz="2000" b="0" i="0" u="none" strike="noStrike">
+                        <a:solidFill>
+                          <a:srgbClr val="000000"/>
+                        </a:solidFill>
+                        <a:effectLst/>
+                        <a:latin typeface="Aptos Narrow" panose="020B0004020202020204" pitchFamily="34" charset="0"/>
+                      </a:endParaRPr>
+                    </a:p>
+                  </a:txBody>
+                  <a:tcPr marL="7620" marR="7620" marT="7620" marB="0" anchor="b"/>
+                </a:tc>
+                <a:tc>
+                  <a:txBody>
+                    <a:bodyPr/>
+                    <a:lstStyle/>
+                    <a:p>
+                      <a:pPr algn="r" fontAlgn="b">
+                        <a:buNone/>
+                      </a:pPr>
+                      <a:r>
+                        <a:rPr lang="en-US" sz="2000" u="none" strike="noStrike">
+                          <a:effectLst/>
+                        </a:rPr>
+                        <a:t>0</a:t>
+                      </a:r>
+                      <a:endParaRPr lang="en-US" sz="2000" b="0" i="0" u="none" strike="noStrike">
+                        <a:solidFill>
+                          <a:srgbClr val="000000"/>
+                        </a:solidFill>
+                        <a:effectLst/>
+                        <a:latin typeface="Aptos Narrow" panose="020B0004020202020204" pitchFamily="34" charset="0"/>
+                      </a:endParaRPr>
+                    </a:p>
+                  </a:txBody>
+                  <a:tcPr marL="7620" marR="7620" marT="7620" marB="0" anchor="b"/>
+                </a:tc>
+                <a:tc>
+                  <a:txBody>
+                    <a:bodyPr/>
+                    <a:lstStyle/>
+                    <a:p>
+                      <a:pPr algn="r" fontAlgn="b">
+                        <a:buNone/>
+                      </a:pPr>
+                      <a:r>
+                        <a:rPr lang="en-US" sz="2000" u="none" strike="noStrike">
+                          <a:effectLst/>
+                        </a:rPr>
+                        <a:t>0</a:t>
+                      </a:r>
+                      <a:endParaRPr lang="en-US" sz="2000" b="0" i="0" u="none" strike="noStrike">
+                        <a:solidFill>
+                          <a:srgbClr val="000000"/>
+                        </a:solidFill>
+                        <a:effectLst/>
+                        <a:latin typeface="Aptos Narrow" panose="020B0004020202020204" pitchFamily="34" charset="0"/>
+                      </a:endParaRPr>
+                    </a:p>
+                  </a:txBody>
+                  <a:tcPr marL="7620" marR="7620" marT="7620" marB="0" anchor="b"/>
+                </a:tc>
+                <a:tc>
+                  <a:txBody>
+                    <a:bodyPr/>
+                    <a:lstStyle/>
+                    <a:p>
+                      <a:pPr algn="r" fontAlgn="b">
+                        <a:buNone/>
+                      </a:pPr>
+                      <a:r>
+                        <a:rPr lang="en-US" sz="2000" u="none" strike="noStrike">
+                          <a:effectLst/>
+                        </a:rPr>
+                        <a:t>0</a:t>
+                      </a:r>
+                      <a:endParaRPr lang="en-US" sz="2000" b="0" i="0" u="none" strike="noStrike">
+                        <a:solidFill>
+                          <a:srgbClr val="000000"/>
+                        </a:solidFill>
+                        <a:effectLst/>
+                        <a:latin typeface="Aptos Narrow" panose="020B0004020202020204" pitchFamily="34" charset="0"/>
+                      </a:endParaRPr>
+                    </a:p>
+                  </a:txBody>
+                  <a:tcPr marL="7620" marR="7620" marT="7620" marB="0" anchor="b"/>
+                </a:tc>
+                <a:tc>
+                  <a:txBody>
+                    <a:bodyPr/>
+                    <a:lstStyle/>
+                    <a:p>
+                      <a:pPr algn="r" fontAlgn="b">
+                        <a:buNone/>
+                      </a:pPr>
+                      <a:r>
+                        <a:rPr lang="en-US" sz="2000" u="none" strike="noStrike">
+                          <a:effectLst/>
+                        </a:rPr>
+                        <a:t>0</a:t>
+                      </a:r>
+                      <a:endParaRPr lang="en-US" sz="2000" b="0" i="0" u="none" strike="noStrike">
+                        <a:solidFill>
+                          <a:srgbClr val="000000"/>
+                        </a:solidFill>
+                        <a:effectLst/>
+                        <a:latin typeface="Aptos Narrow" panose="020B0004020202020204" pitchFamily="34" charset="0"/>
+                      </a:endParaRPr>
+                    </a:p>
+                  </a:txBody>
+                  <a:tcPr marL="7620" marR="7620" marT="7620" marB="0" anchor="b"/>
+                </a:tc>
+                <a:tc>
+                  <a:txBody>
+                    <a:bodyPr/>
+                    <a:lstStyle/>
+                    <a:p>
+                      <a:pPr algn="r" fontAlgn="b">
+                        <a:buNone/>
+                      </a:pPr>
+                      <a:r>
+                        <a:rPr lang="en-US" sz="2000" u="none" strike="noStrike" dirty="0">
+                          <a:effectLst/>
+                        </a:rPr>
+                        <a:t>0</a:t>
+                      </a:r>
+                      <a:endParaRPr lang="en-US" sz="2000" b="0" i="0" u="none" strike="noStrike" dirty="0">
+                        <a:solidFill>
+                          <a:srgbClr val="000000"/>
+                        </a:solidFill>
+                        <a:effectLst/>
+                        <a:latin typeface="Aptos Narrow" panose="020B0004020202020204" pitchFamily="34" charset="0"/>
+                      </a:endParaRPr>
+                    </a:p>
+                  </a:txBody>
+                  <a:tcPr marL="7620" marR="7620" marT="7620" marB="0" anchor="b"/>
+                </a:tc>
+                <a:extLst>
+                  <a:ext uri="{0D108BD9-81ED-4DB2-BD59-A6C34878D82A}">
+                    <a16:rowId xmlns:a16="http://schemas.microsoft.com/office/drawing/2014/main" val="3524156765"/>
+                  </a:ext>
+                </a:extLst>
+              </a:tr>
+            </a:tbl>
+          </a:graphicData>
+        </a:graphic>
+      </p:graphicFrame>
+      <p:sp>
+        <p:nvSpPr>
+          <p:cNvPr id="6" name="TextBox 5">
+            <a:extLst>
+              <a:ext uri="{FF2B5EF4-FFF2-40B4-BE49-F238E27FC236}">
+                <a16:creationId xmlns:a16="http://schemas.microsoft.com/office/drawing/2014/main" id="{CB0B2BBC-2987-CB35-C4A9-A08314C8A1F3}"/>
+              </a:ext>
+            </a:extLst>
+          </p:cNvPr>
+          <p:cNvSpPr txBox="1"/>
+          <p:nvPr/>
+        </p:nvSpPr>
+        <p:spPr>
+          <a:xfrm>
+            <a:off x="838200" y="4114800"/>
+            <a:ext cx="7162800" cy="2215991"/>
+          </a:xfrm>
+          <a:prstGeom prst="rect">
+            <a:avLst/>
+          </a:prstGeom>
+          <a:noFill/>
+        </p:spPr>
+        <p:txBody>
+          <a:bodyPr wrap="square" rtlCol="0">
+            <a:spAutoFit/>
+          </a:bodyPr>
+          <a:lstStyle/>
+          <a:p>
+            <a:pPr marL="285750" indent="-285750">
+              <a:buFont typeface="Arial" panose="020B0604020202020204" pitchFamily="34" charset="0"/>
+              <a:buChar char="•"/>
+            </a:pPr>
+            <a:r>
+              <a:rPr lang="en-US" sz="2400" dirty="0"/>
+              <a:t>Read as proportional change in lambda with proportional change in the cell of the Leslie matrix. </a:t>
+            </a:r>
+          </a:p>
+          <a:p>
+            <a:pPr marL="285750" indent="-285750">
+              <a:buFont typeface="Arial" panose="020B0604020202020204" pitchFamily="34" charset="0"/>
+              <a:buChar char="•"/>
+            </a:pPr>
+            <a:r>
+              <a:rPr lang="en-US" sz="2400" dirty="0"/>
+              <a:t>E.g. 10% change in probability of surviving to age 1 and reproducing is a 3.4% change in lambda</a:t>
+            </a:r>
+          </a:p>
+          <a:p>
+            <a:endParaRPr lang="en-US" dirty="0"/>
+          </a:p>
+        </p:txBody>
+      </p:sp>
+    </p:spTree>
+    <p:extLst>
+      <p:ext uri="{BB962C8B-B14F-4D97-AF65-F5344CB8AC3E}">
+        <p14:creationId xmlns:p14="http://schemas.microsoft.com/office/powerpoint/2010/main" val="3889365513"/>
+      </p:ext>
+    </p:extLst>
+  </p:cSld>
+  <p:clrMapOvr>
+    <a:masterClrMapping/>
+  </p:clrMapOvr>
+</p:sld>
+</file>
+
+<file path=ppt/slides/slide29.xml><?xml version="1.0" encoding="utf-8"?>
+<p:sld xmlns:a="http://schemas.openxmlformats.org/drawingml/2006/main" xmlns:r="http://schemas.openxmlformats.org/officeDocument/2006/relationships" xmlns:p="http://schemas.openxmlformats.org/presentationml/2006/main">
+  <p:cSld>
+    <p:spTree>
+      <p:nvGrpSpPr>
+        <p:cNvPr id="1" name=""/>
+        <p:cNvGrpSpPr/>
+        <p:nvPr/>
+      </p:nvGrpSpPr>
+      <p:grpSpPr>
+        <a:xfrm>
+          <a:off x="0" y="0"/>
+          <a:ext cx="0" cy="0"/>
+          <a:chOff x="0" y="0"/>
+          <a:chExt cx="0" cy="0"/>
+        </a:xfrm>
+      </p:grpSpPr>
+      <p:sp>
+        <p:nvSpPr>
+          <p:cNvPr id="2" name="Title 1">
+            <a:extLst>
+              <a:ext uri="{FF2B5EF4-FFF2-40B4-BE49-F238E27FC236}">
+                <a16:creationId xmlns:a16="http://schemas.microsoft.com/office/drawing/2014/main" id="{160FD09B-1A7E-D993-A4D5-588CD9B5E5B0}"/>
+              </a:ext>
+            </a:extLst>
+          </p:cNvPr>
+          <p:cNvSpPr>
+            <a:spLocks noGrp="1"/>
+          </p:cNvSpPr>
+          <p:nvPr>
+            <p:ph type="title"/>
+          </p:nvPr>
+        </p:nvSpPr>
+        <p:spPr/>
+        <p:txBody>
+          <a:bodyPr/>
+          <a:lstStyle/>
+          <a:p>
+            <a:r>
+              <a:rPr lang="en-US" dirty="0"/>
+              <a:t>Elasticity summaries</a:t>
+            </a:r>
+          </a:p>
+        </p:txBody>
+      </p:sp>
+      <p:pic>
+        <p:nvPicPr>
+          <p:cNvPr id="2050" name="Picture 2">
+            <a:extLst>
+              <a:ext uri="{FF2B5EF4-FFF2-40B4-BE49-F238E27FC236}">
+                <a16:creationId xmlns:a16="http://schemas.microsoft.com/office/drawing/2014/main" id="{8CC92AE5-9BE4-E265-4E82-07BF155D75C0}"/>
+              </a:ext>
+            </a:extLst>
+          </p:cNvPr>
+          <p:cNvPicPr>
+            <a:picLocks noGrp="1" noChangeAspect="1" noChangeArrowheads="1"/>
+          </p:cNvPicPr>
+          <p:nvPr>
+            <p:ph sz="half" idx="1"/>
+          </p:nvPr>
+        </p:nvPicPr>
+        <p:blipFill>
+          <a:blip r:embed="rId2" cstate="print">
+            <a:extLst>
+              <a:ext uri="{28A0092B-C50C-407E-A947-70E740481C1C}">
+                <a14:useLocalDpi xmlns:a14="http://schemas.microsoft.com/office/drawing/2010/main" val="0"/>
+              </a:ext>
+            </a:extLst>
+          </a:blip>
+          <a:srcRect/>
+          <a:stretch>
+            <a:fillRect/>
+          </a:stretch>
+        </p:blipFill>
+        <p:spPr bwMode="auto">
+          <a:xfrm>
+            <a:off x="240955" y="1828800"/>
+            <a:ext cx="4267202" cy="3048000"/>
+          </a:xfrm>
+          <a:prstGeom prst="rect">
+            <a:avLst/>
+          </a:prstGeom>
+          <a:noFill/>
+          <a:extLst>
+            <a:ext uri="{909E8E84-426E-40DD-AFC4-6F175D3DCCD1}">
+              <a14:hiddenFill xmlns:a14="http://schemas.microsoft.com/office/drawing/2010/main">
+                <a:solidFill>
+                  <a:srgbClr val="FFFFFF"/>
+                </a:solidFill>
+              </a14:hiddenFill>
+            </a:ext>
+          </a:extLst>
+        </p:spPr>
+      </p:pic>
+      <p:pic>
+        <p:nvPicPr>
+          <p:cNvPr id="2052" name="Picture 4">
+            <a:extLst>
+              <a:ext uri="{FF2B5EF4-FFF2-40B4-BE49-F238E27FC236}">
+                <a16:creationId xmlns:a16="http://schemas.microsoft.com/office/drawing/2014/main" id="{F98436FA-9E97-BDDE-1629-AC30B7D1F140}"/>
+              </a:ext>
+            </a:extLst>
+          </p:cNvPr>
+          <p:cNvPicPr>
+            <a:picLocks noChangeAspect="1" noChangeArrowheads="1"/>
+          </p:cNvPicPr>
+          <p:nvPr/>
+        </p:nvPicPr>
+        <p:blipFill>
+          <a:blip r:embed="rId3" cstate="print">
+            <a:extLst>
+              <a:ext uri="{28A0092B-C50C-407E-A947-70E740481C1C}">
+                <a14:useLocalDpi xmlns:a14="http://schemas.microsoft.com/office/drawing/2010/main" val="0"/>
+              </a:ext>
+            </a:extLst>
+          </a:blip>
+          <a:srcRect/>
+          <a:stretch>
+            <a:fillRect/>
+          </a:stretch>
+        </p:blipFill>
+        <p:spPr bwMode="auto">
+          <a:xfrm>
+            <a:off x="4653906" y="1770288"/>
+            <a:ext cx="4267496" cy="3048000"/>
+          </a:xfrm>
+          <a:prstGeom prst="rect">
+            <a:avLst/>
+          </a:prstGeom>
+          <a:noFill/>
+          <a:extLst>
+            <a:ext uri="{909E8E84-426E-40DD-AFC4-6F175D3DCCD1}">
+              <a14:hiddenFill xmlns:a14="http://schemas.microsoft.com/office/drawing/2010/main">
+                <a:solidFill>
+                  <a:srgbClr val="FFFFFF"/>
+                </a:solidFill>
+              </a14:hiddenFill>
+            </a:ext>
+          </a:extLst>
+        </p:spPr>
+      </p:pic>
+      <p:sp>
+        <p:nvSpPr>
+          <p:cNvPr id="5" name="TextBox 4">
+            <a:extLst>
+              <a:ext uri="{FF2B5EF4-FFF2-40B4-BE49-F238E27FC236}">
+                <a16:creationId xmlns:a16="http://schemas.microsoft.com/office/drawing/2014/main" id="{61BA6A5A-F823-538A-75E9-99400B1CCA1C}"/>
+              </a:ext>
+            </a:extLst>
+          </p:cNvPr>
+          <p:cNvSpPr txBox="1"/>
+          <p:nvPr/>
+        </p:nvSpPr>
+        <p:spPr>
+          <a:xfrm>
+            <a:off x="914400" y="5486400"/>
+            <a:ext cx="7086600" cy="646331"/>
+          </a:xfrm>
+          <a:prstGeom prst="rect">
+            <a:avLst/>
+          </a:prstGeom>
+          <a:noFill/>
+        </p:spPr>
+        <p:txBody>
+          <a:bodyPr wrap="square" rtlCol="0">
+            <a:spAutoFit/>
+          </a:bodyPr>
+          <a:lstStyle/>
+          <a:p>
+            <a:r>
+              <a:rPr lang="en-US" dirty="0"/>
+              <a:t>Young animals are more important</a:t>
+            </a:r>
+          </a:p>
+          <a:p>
+            <a:r>
+              <a:rPr lang="en-US" dirty="0"/>
+              <a:t>For every age, reproduction matters more than survival</a:t>
+            </a:r>
+          </a:p>
+        </p:txBody>
+      </p:sp>
+    </p:spTree>
+    <p:extLst>
+      <p:ext uri="{BB962C8B-B14F-4D97-AF65-F5344CB8AC3E}">
+        <p14:creationId xmlns:p14="http://schemas.microsoft.com/office/powerpoint/2010/main" val="3856793448"/>
+      </p:ext>
+    </p:extLst>
+  </p:cSld>
+  <p:clrMapOvr>
+    <a:masterClrMapping/>
+  </p:clrMapOvr>
+</p:sld>
+</file>
+
+<file path=ppt/slides/slide3.xml><?xml version="1.0" encoding="utf-8"?>
+<p:sld xmlns:a="http://schemas.openxmlformats.org/drawingml/2006/main" xmlns:r="http://schemas.openxmlformats.org/officeDocument/2006/relationships" xmlns:p="http://schemas.openxmlformats.org/presentationml/2006/main">
+  <p:cSld>
+    <p:spTree>
+      <p:nvGrpSpPr>
+        <p:cNvPr id="1" name=""/>
+        <p:cNvGrpSpPr/>
+        <p:nvPr/>
+      </p:nvGrpSpPr>
+      <p:grpSpPr>
+        <a:xfrm>
+          <a:off x="0" y="0"/>
+          <a:ext cx="0" cy="0"/>
+          <a:chOff x="0" y="0"/>
+          <a:chExt cx="0" cy="0"/>
+        </a:xfrm>
+      </p:grpSpPr>
+      <p:sp>
+        <p:nvSpPr>
+          <p:cNvPr id="2" name="Title 1">
+            <a:extLst>
+              <a:ext uri="{FF2B5EF4-FFF2-40B4-BE49-F238E27FC236}">
+                <a16:creationId xmlns:a16="http://schemas.microsoft.com/office/drawing/2014/main" id="{C86286CA-F756-C0B3-4AA9-2E58FD4A1E84}"/>
+              </a:ext>
+            </a:extLst>
+          </p:cNvPr>
+          <p:cNvSpPr>
+            <a:spLocks noGrp="1"/>
+          </p:cNvSpPr>
+          <p:nvPr>
+            <p:ph type="title"/>
+          </p:nvPr>
+        </p:nvSpPr>
+        <p:spPr/>
+        <p:txBody>
+          <a:bodyPr/>
+          <a:lstStyle/>
+          <a:p>
+            <a:r>
+              <a:rPr lang="en-US" dirty="0"/>
+              <a:t>Life tables</a:t>
+            </a:r>
+          </a:p>
+        </p:txBody>
+      </p:sp>
+      <p:sp>
+        <p:nvSpPr>
+          <p:cNvPr id="3" name="Content Placeholder 2">
+            <a:extLst>
+              <a:ext uri="{FF2B5EF4-FFF2-40B4-BE49-F238E27FC236}">
+                <a16:creationId xmlns:a16="http://schemas.microsoft.com/office/drawing/2014/main" id="{ECE3689E-9895-65EC-7A0C-B200F7A28D7F}"/>
+              </a:ext>
+            </a:extLst>
+          </p:cNvPr>
+          <p:cNvSpPr>
+            <a:spLocks noGrp="1"/>
+          </p:cNvSpPr>
+          <p:nvPr>
+            <p:ph idx="1"/>
+          </p:nvPr>
+        </p:nvSpPr>
+        <p:spPr/>
+        <p:txBody>
+          <a:bodyPr/>
+          <a:lstStyle/>
+          <a:p>
+            <a:r>
+              <a:rPr lang="en-US" dirty="0"/>
+              <a:t>Age or stage structured models require age (or stage) specific mortality and fecundity rates</a:t>
+            </a:r>
+          </a:p>
+          <a:p>
+            <a:r>
+              <a:rPr lang="en-US" dirty="0"/>
+              <a:t>Life table keeps track of numbers and mortality at age (or stage) to get the age specific mortality rates</a:t>
+            </a:r>
+          </a:p>
+          <a:p>
+            <a:pPr marL="0" indent="0">
+              <a:buNone/>
+            </a:pPr>
+            <a:endParaRPr lang="en-US" dirty="0"/>
+          </a:p>
+          <a:p>
+            <a:endParaRPr lang="en-US" dirty="0"/>
+          </a:p>
+        </p:txBody>
+      </p:sp>
+    </p:spTree>
+    <p:extLst>
+      <p:ext uri="{BB962C8B-B14F-4D97-AF65-F5344CB8AC3E}">
+        <p14:creationId xmlns:p14="http://schemas.microsoft.com/office/powerpoint/2010/main" val="240145590"/>
+      </p:ext>
+    </p:extLst>
+  </p:cSld>
+  <p:clrMapOvr>
+    <a:masterClrMapping/>
+  </p:clrMapOvr>
+</p:sld>
+</file>
+
+<file path=ppt/slides/slide30.xml><?xml version="1.0" encoding="utf-8"?>
+<p:sld xmlns:a="http://schemas.openxmlformats.org/drawingml/2006/main" xmlns:r="http://schemas.openxmlformats.org/officeDocument/2006/relationships" xmlns:p="http://schemas.openxmlformats.org/presentationml/2006/main">
+  <p:cSld>
+    <p:spTree>
+      <p:nvGrpSpPr>
+        <p:cNvPr id="1" name=""/>
+        <p:cNvGrpSpPr/>
+        <p:nvPr/>
+      </p:nvGrpSpPr>
+      <p:grpSpPr>
+        <a:xfrm>
+          <a:off x="0" y="0"/>
+          <a:ext cx="0" cy="0"/>
+          <a:chOff x="0" y="0"/>
+          <a:chExt cx="0" cy="0"/>
+        </a:xfrm>
+      </p:grpSpPr>
+      <p:sp>
+        <p:nvSpPr>
+          <p:cNvPr id="2" name="Title 1">
+            <a:extLst>
+              <a:ext uri="{FF2B5EF4-FFF2-40B4-BE49-F238E27FC236}">
+                <a16:creationId xmlns:a16="http://schemas.microsoft.com/office/drawing/2014/main" id="{C4CF5AD8-E80E-DB4E-814C-71568956FC5D}"/>
+              </a:ext>
+            </a:extLst>
+          </p:cNvPr>
+          <p:cNvSpPr>
+            <a:spLocks noGrp="1"/>
+          </p:cNvSpPr>
+          <p:nvPr>
+            <p:ph type="title"/>
+          </p:nvPr>
+        </p:nvSpPr>
+        <p:spPr/>
+        <p:txBody>
+          <a:bodyPr/>
+          <a:lstStyle/>
+          <a:p>
+            <a:r>
+              <a:rPr lang="en-US" dirty="0"/>
+              <a:t>Adding uncertainty and variability</a:t>
+            </a:r>
+          </a:p>
+        </p:txBody>
+      </p:sp>
+      <p:sp>
+        <p:nvSpPr>
+          <p:cNvPr id="3" name="Content Placeholder 2">
+            <a:extLst>
+              <a:ext uri="{FF2B5EF4-FFF2-40B4-BE49-F238E27FC236}">
+                <a16:creationId xmlns:a16="http://schemas.microsoft.com/office/drawing/2014/main" id="{00D3D96E-424F-981A-7890-B0052A9606C3}"/>
+              </a:ext>
+            </a:extLst>
+          </p:cNvPr>
+          <p:cNvSpPr>
+            <a:spLocks noGrp="1"/>
+          </p:cNvSpPr>
+          <p:nvPr>
+            <p:ph sz="half" idx="1"/>
+          </p:nvPr>
+        </p:nvSpPr>
+        <p:spPr>
+          <a:xfrm>
+            <a:off x="457200" y="1600200"/>
+            <a:ext cx="7772400" cy="4525963"/>
+          </a:xfrm>
+        </p:spPr>
+        <p:txBody>
+          <a:bodyPr/>
+          <a:lstStyle/>
+          <a:p>
+            <a:r>
+              <a:rPr lang="en-US" dirty="0"/>
+              <a:t>Estimates of lx and mx are not known without error</a:t>
+            </a:r>
+          </a:p>
+          <a:p>
+            <a:r>
+              <a:rPr lang="en-US" dirty="0"/>
+              <a:t>They are often calculated from models fitted to data for maturity at size, etc. </a:t>
+            </a:r>
+          </a:p>
+          <a:p>
+            <a:r>
+              <a:rPr lang="en-US" dirty="0"/>
+              <a:t>Can add uncertainty to the estimates and get confidence intervals. </a:t>
+            </a:r>
+          </a:p>
+        </p:txBody>
+      </p:sp>
+    </p:spTree>
+    <p:extLst>
+      <p:ext uri="{BB962C8B-B14F-4D97-AF65-F5344CB8AC3E}">
+        <p14:creationId xmlns:p14="http://schemas.microsoft.com/office/powerpoint/2010/main" val="618131365"/>
+      </p:ext>
+    </p:extLst>
+  </p:cSld>
+  <p:clrMapOvr>
+    <a:masterClrMapping/>
+  </p:clrMapOvr>
+</p:sld>
+</file>
+
+<file path=ppt/slides/slide31.xml><?xml version="1.0" encoding="utf-8"?>
+<p:sld xmlns:a="http://schemas.openxmlformats.org/drawingml/2006/main" xmlns:r="http://schemas.openxmlformats.org/officeDocument/2006/relationships" xmlns:p="http://schemas.openxmlformats.org/presentationml/2006/main">
+  <p:cSld>
+    <p:spTree>
+      <p:nvGrpSpPr>
+        <p:cNvPr id="1" name=""/>
+        <p:cNvGrpSpPr/>
+        <p:nvPr/>
+      </p:nvGrpSpPr>
+      <p:grpSpPr>
+        <a:xfrm>
+          <a:off x="0" y="0"/>
+          <a:ext cx="0" cy="0"/>
+          <a:chOff x="0" y="0"/>
+          <a:chExt cx="0" cy="0"/>
+        </a:xfrm>
+      </p:grpSpPr>
+      <p:sp>
+        <p:nvSpPr>
+          <p:cNvPr id="2" name="Title 1">
+            <a:extLst>
+              <a:ext uri="{FF2B5EF4-FFF2-40B4-BE49-F238E27FC236}">
+                <a16:creationId xmlns:a16="http://schemas.microsoft.com/office/drawing/2014/main" id="{460A517B-7A5C-EB50-B068-8302EBB815B2}"/>
+              </a:ext>
+            </a:extLst>
+          </p:cNvPr>
+          <p:cNvSpPr>
+            <a:spLocks noGrp="1"/>
+          </p:cNvSpPr>
+          <p:nvPr>
+            <p:ph type="title"/>
+          </p:nvPr>
+        </p:nvSpPr>
+        <p:spPr/>
+        <p:txBody>
+          <a:bodyPr/>
+          <a:lstStyle/>
+          <a:p>
+            <a:r>
+              <a:rPr lang="en-US" dirty="0"/>
+              <a:t>Monte Carlo simulation</a:t>
+            </a:r>
+          </a:p>
+        </p:txBody>
+      </p:sp>
+      <p:sp>
+        <p:nvSpPr>
+          <p:cNvPr id="3" name="Content Placeholder 2">
+            <a:extLst>
+              <a:ext uri="{FF2B5EF4-FFF2-40B4-BE49-F238E27FC236}">
+                <a16:creationId xmlns:a16="http://schemas.microsoft.com/office/drawing/2014/main" id="{43BA8036-55BC-2E0B-71DE-6E57360F5A27}"/>
+              </a:ext>
+            </a:extLst>
+          </p:cNvPr>
+          <p:cNvSpPr>
+            <a:spLocks noGrp="1"/>
+          </p:cNvSpPr>
+          <p:nvPr>
+            <p:ph idx="1"/>
+          </p:nvPr>
+        </p:nvSpPr>
+        <p:spPr/>
+        <p:txBody>
+          <a:bodyPr/>
+          <a:lstStyle/>
+          <a:p>
+            <a:r>
+              <a:rPr lang="en-US" dirty="0"/>
+              <a:t>Define all the relevant parameters with a statistical distribution</a:t>
+            </a:r>
+          </a:p>
+          <a:p>
+            <a:r>
+              <a:rPr lang="en-US" dirty="0"/>
+              <a:t>Draw random values from each distribution</a:t>
+            </a:r>
+          </a:p>
+          <a:p>
+            <a:r>
+              <a:rPr lang="en-US" dirty="0"/>
+              <a:t>Recalculate lambda, R0, etc. </a:t>
+            </a:r>
+          </a:p>
+          <a:p>
+            <a:r>
+              <a:rPr lang="en-US" dirty="0"/>
+              <a:t>Calculate mean, </a:t>
+            </a:r>
+            <a:r>
+              <a:rPr lang="en-US" dirty="0" err="1"/>
+              <a:t>sd</a:t>
+            </a:r>
+            <a:r>
+              <a:rPr lang="en-US" dirty="0"/>
+              <a:t>, quantiles to get confidence intervals</a:t>
+            </a:r>
+          </a:p>
+        </p:txBody>
+      </p:sp>
+    </p:spTree>
+    <p:extLst>
+      <p:ext uri="{BB962C8B-B14F-4D97-AF65-F5344CB8AC3E}">
+        <p14:creationId xmlns:p14="http://schemas.microsoft.com/office/powerpoint/2010/main" val="880486333"/>
+      </p:ext>
+    </p:extLst>
+  </p:cSld>
+  <p:clrMapOvr>
+    <a:masterClrMapping/>
+  </p:clrMapOvr>
+</p:sld>
+</file>
+
+<file path=ppt/slides/slide32.xml><?xml version="1.0" encoding="utf-8"?>
+<p:sld xmlns:a="http://schemas.openxmlformats.org/drawingml/2006/main" xmlns:r="http://schemas.openxmlformats.org/officeDocument/2006/relationships" xmlns:p="http://schemas.openxmlformats.org/presentationml/2006/main">
+  <p:cSld>
+    <p:spTree>
+      <p:nvGrpSpPr>
+        <p:cNvPr id="1" name=""/>
+        <p:cNvGrpSpPr/>
+        <p:nvPr/>
+      </p:nvGrpSpPr>
+      <p:grpSpPr>
+        <a:xfrm>
+          <a:off x="0" y="0"/>
+          <a:ext cx="0" cy="0"/>
+          <a:chOff x="0" y="0"/>
+          <a:chExt cx="0" cy="0"/>
+        </a:xfrm>
+      </p:grpSpPr>
+      <p:sp>
+        <p:nvSpPr>
+          <p:cNvPr id="2" name="Title 1">
+            <a:extLst>
+              <a:ext uri="{FF2B5EF4-FFF2-40B4-BE49-F238E27FC236}">
+                <a16:creationId xmlns:a16="http://schemas.microsoft.com/office/drawing/2014/main" id="{095714C9-2830-8F52-48E1-0DE77A33E6C0}"/>
+              </a:ext>
+            </a:extLst>
+          </p:cNvPr>
+          <p:cNvSpPr>
+            <a:spLocks noGrp="1"/>
+          </p:cNvSpPr>
+          <p:nvPr>
+            <p:ph type="title"/>
+          </p:nvPr>
+        </p:nvSpPr>
+        <p:spPr/>
+        <p:txBody>
+          <a:bodyPr/>
+          <a:lstStyle/>
+          <a:p>
+            <a:r>
+              <a:rPr lang="en-US" dirty="0"/>
+              <a:t>Squirrel example</a:t>
+            </a:r>
+          </a:p>
+        </p:txBody>
+      </p:sp>
+      <p:sp>
+        <p:nvSpPr>
+          <p:cNvPr id="3" name="Content Placeholder 2">
+            <a:extLst>
+              <a:ext uri="{FF2B5EF4-FFF2-40B4-BE49-F238E27FC236}">
+                <a16:creationId xmlns:a16="http://schemas.microsoft.com/office/drawing/2014/main" id="{F899C2D4-C910-A3FA-78EC-E5C64BEF7BD8}"/>
+              </a:ext>
+            </a:extLst>
+          </p:cNvPr>
+          <p:cNvSpPr>
+            <a:spLocks noGrp="1"/>
+          </p:cNvSpPr>
+          <p:nvPr>
+            <p:ph idx="1"/>
+          </p:nvPr>
+        </p:nvSpPr>
+        <p:spPr/>
+        <p:txBody>
+          <a:bodyPr/>
+          <a:lstStyle/>
+          <a:p>
+            <a:r>
+              <a:rPr lang="en-US" dirty="0"/>
+              <a:t>Add a CV of 0.02 to all lx values, and 0.05 to mx values, with normal error</a:t>
+            </a:r>
+          </a:p>
+          <a:p>
+            <a:r>
+              <a:rPr lang="en-US" dirty="0"/>
+              <a:t>Results, 95% confidence interval of lambda is 0.95 to 1.14. </a:t>
+            </a:r>
+          </a:p>
+          <a:p>
+            <a:endParaRPr lang="en-US" dirty="0"/>
+          </a:p>
+          <a:p>
+            <a:endParaRPr lang="en-US" dirty="0"/>
+          </a:p>
+        </p:txBody>
+      </p:sp>
+      <p:pic>
+        <p:nvPicPr>
+          <p:cNvPr id="3076" name="Picture 4">
+            <a:extLst>
+              <a:ext uri="{FF2B5EF4-FFF2-40B4-BE49-F238E27FC236}">
+                <a16:creationId xmlns:a16="http://schemas.microsoft.com/office/drawing/2014/main" id="{28D90E2E-B9AD-D77F-1FA8-452D29E07BEA}"/>
+              </a:ext>
+            </a:extLst>
+          </p:cNvPr>
+          <p:cNvPicPr>
+            <a:picLocks noChangeAspect="1" noChangeArrowheads="1"/>
+          </p:cNvPicPr>
+          <p:nvPr/>
+        </p:nvPicPr>
+        <p:blipFill>
+          <a:blip r:embed="rId2" cstate="print">
+            <a:extLst>
+              <a:ext uri="{28A0092B-C50C-407E-A947-70E740481C1C}">
+                <a14:useLocalDpi xmlns:a14="http://schemas.microsoft.com/office/drawing/2010/main" val="0"/>
+              </a:ext>
+            </a:extLst>
+          </a:blip>
+          <a:srcRect/>
+          <a:stretch>
+            <a:fillRect/>
+          </a:stretch>
+        </p:blipFill>
+        <p:spPr bwMode="auto">
+          <a:xfrm>
+            <a:off x="609600" y="3352800"/>
+            <a:ext cx="4724400" cy="3374337"/>
+          </a:xfrm>
+          <a:prstGeom prst="rect">
+            <a:avLst/>
+          </a:prstGeom>
+          <a:noFill/>
+          <a:extLst>
+            <a:ext uri="{909E8E84-426E-40DD-AFC4-6F175D3DCCD1}">
+              <a14:hiddenFill xmlns:a14="http://schemas.microsoft.com/office/drawing/2010/main">
+                <a:solidFill>
+                  <a:srgbClr val="FFFFFF"/>
+                </a:solidFill>
+              </a14:hiddenFill>
+            </a:ext>
+          </a:extLst>
+        </p:spPr>
+      </p:pic>
+    </p:spTree>
+    <p:extLst>
+      <p:ext uri="{BB962C8B-B14F-4D97-AF65-F5344CB8AC3E}">
+        <p14:creationId xmlns:p14="http://schemas.microsoft.com/office/powerpoint/2010/main" val="3579452546"/>
+      </p:ext>
+    </p:extLst>
+  </p:cSld>
+  <p:clrMapOvr>
+    <a:masterClrMapping/>
+  </p:clrMapOvr>
+</p:sld>
+</file>
+
+<file path=ppt/slides/slide33.xml><?xml version="1.0" encoding="utf-8"?>
 <p:sld xmlns:a="http://schemas.openxmlformats.org/drawingml/2006/main" xmlns:r="http://schemas.openxmlformats.org/officeDocument/2006/relationships" xmlns:p="http://schemas.openxmlformats.org/presentationml/2006/main">
   <p:cSld>
     <p:spTree>
@@ -10586,7 +13021,7 @@
     </p:spTree>
     <p:extLst>
       <p:ext uri="{BB962C8B-B14F-4D97-AF65-F5344CB8AC3E}">
-        <p14:creationId xmlns:p14="http://schemas.microsoft.com/office/powerpoint/2010/main" val="696984713"/>
+        <p14:creationId xmlns:p14="http://schemas.microsoft.com/office/powerpoint/2010/main" val="825467868"/>
       </p:ext>
     </p:extLst>
   </p:cSld>
@@ -10596,7 +13031,7 @@
 </p:sld>
 </file>
 
-<file path=ppt/slides/slide26.xml><?xml version="1.0" encoding="utf-8"?>
+<file path=ppt/slides/slide34.xml><?xml version="1.0" encoding="utf-8"?>
 <p:sld xmlns:a="http://schemas.openxmlformats.org/drawingml/2006/main" xmlns:r="http://schemas.openxmlformats.org/officeDocument/2006/relationships" xmlns:p="http://schemas.openxmlformats.org/presentationml/2006/main">
   <p:cSld>
     <p:spTree>
@@ -10718,13 +13153,7 @@
           <p:cNvGraphicFramePr>
             <a:graphicFrameLocks noChangeAspect="1"/>
           </p:cNvGraphicFramePr>
-          <p:nvPr>
-            <p:extLst>
-              <p:ext uri="{D42A27DB-BD31-4B8C-83A1-F6EECF244321}">
-                <p14:modId xmlns:p14="http://schemas.microsoft.com/office/powerpoint/2010/main" val="1402841607"/>
-              </p:ext>
-            </p:extLst>
-          </p:nvPr>
+          <p:nvPr/>
         </p:nvGraphicFramePr>
         <p:xfrm>
           <a:off x="381000" y="1457882"/>
@@ -11017,120 +13446,9 @@
         </p:txBody>
       </p:sp>
     </p:spTree>
-  </p:cSld>
-  <p:clrMapOvr>
-    <a:masterClrMapping/>
-  </p:clrMapOvr>
-</p:sld>
-</file>
-
-<file path=ppt/slides/slide27.xml><?xml version="1.0" encoding="utf-8"?>
-<p:sld xmlns:a="http://schemas.openxmlformats.org/drawingml/2006/main" xmlns:r="http://schemas.openxmlformats.org/officeDocument/2006/relationships" xmlns:p="http://schemas.openxmlformats.org/presentationml/2006/main">
-  <p:cSld>
-    <p:spTree>
-      <p:nvGrpSpPr>
-        <p:cNvPr id="1" name=""/>
-        <p:cNvGrpSpPr/>
-        <p:nvPr/>
-      </p:nvGrpSpPr>
-      <p:grpSpPr>
-        <a:xfrm>
-          <a:off x="0" y="0"/>
-          <a:ext cx="0" cy="0"/>
-          <a:chOff x="0" y="0"/>
-          <a:chExt cx="0" cy="0"/>
-        </a:xfrm>
-      </p:grpSpPr>
-      <p:sp>
-        <p:nvSpPr>
-          <p:cNvPr id="2" name="Title 1">
-            <a:extLst>
-              <a:ext uri="{FF2B5EF4-FFF2-40B4-BE49-F238E27FC236}">
-                <a16:creationId xmlns:a16="http://schemas.microsoft.com/office/drawing/2014/main" id="{F610C504-3719-4138-3BD8-FCF460C6D77C}"/>
-              </a:ext>
-            </a:extLst>
-          </p:cNvPr>
-          <p:cNvSpPr>
-            <a:spLocks noGrp="1"/>
-          </p:cNvSpPr>
-          <p:nvPr>
-            <p:ph type="title"/>
-          </p:nvPr>
-        </p:nvSpPr>
-        <p:spPr/>
-        <p:txBody>
-          <a:bodyPr/>
-          <a:lstStyle/>
-          <a:p>
-            <a:r>
-              <a:rPr lang="en-US" dirty="0"/>
-              <a:t>Elasticity analysis</a:t>
-            </a:r>
-          </a:p>
-        </p:txBody>
-      </p:sp>
-      <p:sp>
-        <p:nvSpPr>
-          <p:cNvPr id="3" name="Content Placeholder 2">
-            <a:extLst>
-              <a:ext uri="{FF2B5EF4-FFF2-40B4-BE49-F238E27FC236}">
-                <a16:creationId xmlns:a16="http://schemas.microsoft.com/office/drawing/2014/main" id="{D25B476B-DD63-AD77-D96F-5092DC3F9B5C}"/>
-              </a:ext>
-            </a:extLst>
-          </p:cNvPr>
-          <p:cNvSpPr>
-            <a:spLocks noGrp="1"/>
-          </p:cNvSpPr>
-          <p:nvPr>
-            <p:ph sz="half" idx="1"/>
-          </p:nvPr>
-        </p:nvSpPr>
-        <p:spPr>
-          <a:xfrm>
-            <a:off x="533400" y="1384687"/>
-            <a:ext cx="8305800" cy="4525963"/>
-          </a:xfrm>
-        </p:spPr>
-        <p:txBody>
-          <a:bodyPr/>
-          <a:lstStyle/>
-          <a:p>
-            <a:r>
-              <a:rPr lang="en-US" dirty="0"/>
-              <a:t>Elasticity is how much lambda changes for a given change in a cell in the Leslie matrix</a:t>
-            </a:r>
-          </a:p>
-          <a:p>
-            <a:r>
-              <a:rPr lang="en-US" dirty="0"/>
-              <a:t>Ages or parameters with higher elasticity are more influential on population growth, so are more important for conservation actions</a:t>
-            </a:r>
-          </a:p>
-          <a:p>
-            <a:pPr lvl="1"/>
-            <a:r>
-              <a:rPr lang="en-US" dirty="0"/>
-              <a:t>Often protecting older females from mortality is more important than protecting juveniles, because of their high fecundity</a:t>
-            </a:r>
-          </a:p>
-          <a:p>
-            <a:r>
-              <a:rPr lang="en-US" dirty="0"/>
-              <a:t>Elasticity can be calculated with matrix algebra</a:t>
-            </a:r>
-          </a:p>
-          <a:p>
-            <a:r>
-              <a:rPr lang="en-US" dirty="0"/>
-              <a:t>Elasticities are additive, so you can calculate the total elasticity of a life stage (Juvenile, adult, etc.)</a:t>
-            </a:r>
-          </a:p>
-        </p:txBody>
-      </p:sp>
-    </p:spTree>
     <p:extLst>
       <p:ext uri="{BB962C8B-B14F-4D97-AF65-F5344CB8AC3E}">
-        <p14:creationId xmlns:p14="http://schemas.microsoft.com/office/powerpoint/2010/main" val="2390301193"/>
+        <p14:creationId xmlns:p14="http://schemas.microsoft.com/office/powerpoint/2010/main" val="3959771723"/>
       </p:ext>
     </p:extLst>
   </p:cSld>
@@ -11140,2084 +13458,7 @@
 </p:sld>
 </file>
 
-<file path=ppt/slides/slide28.xml><?xml version="1.0" encoding="utf-8"?>
-<p:sld xmlns:a="http://schemas.openxmlformats.org/drawingml/2006/main" xmlns:r="http://schemas.openxmlformats.org/officeDocument/2006/relationships" xmlns:p="http://schemas.openxmlformats.org/presentationml/2006/main">
-  <p:cSld>
-    <p:spTree>
-      <p:nvGrpSpPr>
-        <p:cNvPr id="1" name=""/>
-        <p:cNvGrpSpPr/>
-        <p:nvPr/>
-      </p:nvGrpSpPr>
-      <p:grpSpPr>
-        <a:xfrm>
-          <a:off x="0" y="0"/>
-          <a:ext cx="0" cy="0"/>
-          <a:chOff x="0" y="0"/>
-          <a:chExt cx="0" cy="0"/>
-        </a:xfrm>
-      </p:grpSpPr>
-      <p:sp>
-        <p:nvSpPr>
-          <p:cNvPr id="2" name="Title 1">
-            <a:extLst>
-              <a:ext uri="{FF2B5EF4-FFF2-40B4-BE49-F238E27FC236}">
-                <a16:creationId xmlns:a16="http://schemas.microsoft.com/office/drawing/2014/main" id="{E5CB2281-3D49-37F7-979C-8E4F033F4B50}"/>
-              </a:ext>
-            </a:extLst>
-          </p:cNvPr>
-          <p:cNvSpPr>
-            <a:spLocks noGrp="1"/>
-          </p:cNvSpPr>
-          <p:nvPr>
-            <p:ph type="title"/>
-          </p:nvPr>
-        </p:nvSpPr>
-        <p:spPr/>
-        <p:txBody>
-          <a:bodyPr/>
-          <a:lstStyle/>
-          <a:p>
-            <a:r>
-              <a:rPr lang="en-US" sz="4000" dirty="0"/>
-              <a:t>Elasticity calculations</a:t>
-            </a:r>
-          </a:p>
-        </p:txBody>
-      </p:sp>
-      <p:sp>
-        <p:nvSpPr>
-          <p:cNvPr id="3" name="Content Placeholder 2">
-            <a:extLst>
-              <a:ext uri="{FF2B5EF4-FFF2-40B4-BE49-F238E27FC236}">
-                <a16:creationId xmlns:a16="http://schemas.microsoft.com/office/drawing/2014/main" id="{64243FE8-9BBC-D502-15B0-1F5C179B72AE}"/>
-              </a:ext>
-            </a:extLst>
-          </p:cNvPr>
-          <p:cNvSpPr>
-            <a:spLocks noGrp="1"/>
-          </p:cNvSpPr>
-          <p:nvPr>
-            <p:ph sz="half" idx="1"/>
-          </p:nvPr>
-        </p:nvSpPr>
-        <p:spPr>
-          <a:xfrm>
-            <a:off x="568411" y="1166018"/>
-            <a:ext cx="8270789" cy="4525963"/>
-          </a:xfrm>
-        </p:spPr>
-        <p:txBody>
-          <a:bodyPr/>
-          <a:lstStyle/>
-          <a:p>
-            <a:r>
-              <a:rPr lang="en-US" sz="2400" dirty="0"/>
-              <a:t>Elasticity is change in proportional change lambda with change in a cell in the Leslie matrix (A)</a:t>
-            </a:r>
-          </a:p>
-          <a:p>
-            <a:r>
-              <a:rPr lang="en-US" sz="2400" dirty="0"/>
-              <a:t>Elasticity=</a:t>
-            </a:r>
-          </a:p>
-          <a:p>
-            <a:endParaRPr lang="en-US" sz="2400" dirty="0"/>
-          </a:p>
-          <a:p>
-            <a:endParaRPr lang="en-US" sz="2400" dirty="0"/>
-          </a:p>
-          <a:p>
-            <a:endParaRPr lang="en-US" sz="2400" dirty="0"/>
-          </a:p>
-          <a:p>
-            <a:r>
-              <a:rPr lang="en-US" sz="2400" dirty="0"/>
-              <a:t>From sensitivity matrix </a:t>
-            </a:r>
-          </a:p>
-          <a:p>
-            <a:r>
-              <a:rPr lang="en-US" sz="2400" dirty="0"/>
-              <a:t>w is the stable age distribution = right eigenvector of A, scaled to sum to 1</a:t>
-            </a:r>
-          </a:p>
-          <a:p>
-            <a:r>
-              <a:rPr lang="en-US" sz="2400" dirty="0"/>
-              <a:t>v is the age specific mortality vector = left eigenvector of A (eigenvector of transpose), scaled so first value is 1</a:t>
-            </a:r>
-          </a:p>
-          <a:p>
-            <a:r>
-              <a:rPr lang="en-US" sz="2400" dirty="0"/>
-              <a:t>The inner product            is the sum of w1*v1+w1*v2, etc. </a:t>
-            </a:r>
-          </a:p>
-          <a:p>
-            <a:endParaRPr lang="en-US" sz="2400" dirty="0"/>
-          </a:p>
-          <a:p>
-            <a:endParaRPr lang="en-US" sz="2400" dirty="0"/>
-          </a:p>
-          <a:p>
-            <a:endParaRPr lang="en-US" sz="2400" dirty="0"/>
-          </a:p>
-        </p:txBody>
-      </p:sp>
-      <p:pic>
-        <p:nvPicPr>
-          <p:cNvPr id="6" name="Picture 5">
-            <a:extLst>
-              <a:ext uri="{FF2B5EF4-FFF2-40B4-BE49-F238E27FC236}">
-                <a16:creationId xmlns:a16="http://schemas.microsoft.com/office/drawing/2014/main" id="{81557756-D53E-00F5-9BD9-EDEB44237D48}"/>
-              </a:ext>
-            </a:extLst>
-          </p:cNvPr>
-          <p:cNvPicPr>
-            <a:picLocks noChangeAspect="1"/>
-          </p:cNvPicPr>
-          <p:nvPr/>
-        </p:nvPicPr>
-        <p:blipFill>
-          <a:blip r:embed="rId2"/>
-          <a:stretch>
-            <a:fillRect/>
-          </a:stretch>
-        </p:blipFill>
-        <p:spPr>
-          <a:xfrm>
-            <a:off x="4343400" y="3377031"/>
-            <a:ext cx="2038635" cy="924054"/>
-          </a:xfrm>
-          <a:prstGeom prst="rect">
-            <a:avLst/>
-          </a:prstGeom>
-        </p:spPr>
-      </p:pic>
-      <p:pic>
-        <p:nvPicPr>
-          <p:cNvPr id="8" name="Picture 7">
-            <a:extLst>
-              <a:ext uri="{FF2B5EF4-FFF2-40B4-BE49-F238E27FC236}">
-                <a16:creationId xmlns:a16="http://schemas.microsoft.com/office/drawing/2014/main" id="{0641BAB8-7C25-98D6-C969-4E72D98FE6A0}"/>
-              </a:ext>
-            </a:extLst>
-          </p:cNvPr>
-          <p:cNvPicPr>
-            <a:picLocks noChangeAspect="1"/>
-          </p:cNvPicPr>
-          <p:nvPr/>
-        </p:nvPicPr>
-        <p:blipFill>
-          <a:blip r:embed="rId3"/>
-          <a:stretch>
-            <a:fillRect/>
-          </a:stretch>
-        </p:blipFill>
-        <p:spPr>
-          <a:xfrm>
-            <a:off x="3263862" y="5864802"/>
-            <a:ext cx="885949" cy="342948"/>
-          </a:xfrm>
-          <a:prstGeom prst="rect">
-            <a:avLst/>
-          </a:prstGeom>
-        </p:spPr>
-      </p:pic>
-      <p:sp>
-        <p:nvSpPr>
-          <p:cNvPr id="10" name="TextBox 9">
-            <a:extLst>
-              <a:ext uri="{FF2B5EF4-FFF2-40B4-BE49-F238E27FC236}">
-                <a16:creationId xmlns:a16="http://schemas.microsoft.com/office/drawing/2014/main" id="{185B8EAE-C1EF-9A77-692F-836071A09F26}"/>
-              </a:ext>
-            </a:extLst>
-          </p:cNvPr>
-          <p:cNvSpPr txBox="1"/>
-          <p:nvPr/>
-        </p:nvSpPr>
-        <p:spPr>
-          <a:xfrm>
-            <a:off x="6858000" y="6248400"/>
-            <a:ext cx="1981200" cy="338554"/>
-          </a:xfrm>
-          <a:prstGeom prst="rect">
-            <a:avLst/>
-          </a:prstGeom>
-          <a:noFill/>
-        </p:spPr>
-        <p:txBody>
-          <a:bodyPr wrap="square" rtlCol="0">
-            <a:spAutoFit/>
-          </a:bodyPr>
-          <a:lstStyle/>
-          <a:p>
-            <a:r>
-              <a:rPr lang="en-US" sz="1600" dirty="0"/>
-              <a:t>Heppell 2007</a:t>
-            </a:r>
-          </a:p>
-        </p:txBody>
-      </p:sp>
-      <p:pic>
-        <p:nvPicPr>
-          <p:cNvPr id="12" name="Picture 11">
-            <a:extLst>
-              <a:ext uri="{FF2B5EF4-FFF2-40B4-BE49-F238E27FC236}">
-                <a16:creationId xmlns:a16="http://schemas.microsoft.com/office/drawing/2014/main" id="{03B57403-CF57-FAD5-F9D0-02B41E9D1EAC}"/>
-              </a:ext>
-            </a:extLst>
-          </p:cNvPr>
-          <p:cNvPicPr>
-            <a:picLocks noChangeAspect="1"/>
-          </p:cNvPicPr>
-          <p:nvPr/>
-        </p:nvPicPr>
-        <p:blipFill>
-          <a:blip r:embed="rId4"/>
-          <a:srcRect r="69224" b="5522"/>
-          <a:stretch>
-            <a:fillRect/>
-          </a:stretch>
-        </p:blipFill>
-        <p:spPr>
-          <a:xfrm>
-            <a:off x="2528687" y="2004571"/>
-            <a:ext cx="1509913" cy="891029"/>
-          </a:xfrm>
-          <a:prstGeom prst="rect">
-            <a:avLst/>
-          </a:prstGeom>
-        </p:spPr>
-      </p:pic>
-      <p:pic>
-        <p:nvPicPr>
-          <p:cNvPr id="4" name="Picture 3">
-            <a:extLst>
-              <a:ext uri="{FF2B5EF4-FFF2-40B4-BE49-F238E27FC236}">
-                <a16:creationId xmlns:a16="http://schemas.microsoft.com/office/drawing/2014/main" id="{61C8D38B-5B15-33A7-6E7E-2339C7BD752E}"/>
-              </a:ext>
-            </a:extLst>
-          </p:cNvPr>
-          <p:cNvPicPr>
-            <a:picLocks noChangeAspect="1"/>
-          </p:cNvPicPr>
-          <p:nvPr/>
-        </p:nvPicPr>
-        <p:blipFill>
-          <a:blip r:embed="rId4"/>
-          <a:srcRect l="60287"/>
-          <a:stretch>
-            <a:fillRect/>
-          </a:stretch>
-        </p:blipFill>
-        <p:spPr>
-          <a:xfrm>
-            <a:off x="4149811" y="2059799"/>
-            <a:ext cx="1948347" cy="943107"/>
-          </a:xfrm>
-          <a:prstGeom prst="rect">
-            <a:avLst/>
-          </a:prstGeom>
-        </p:spPr>
-      </p:pic>
-    </p:spTree>
-    <p:extLst>
-      <p:ext uri="{BB962C8B-B14F-4D97-AF65-F5344CB8AC3E}">
-        <p14:creationId xmlns:p14="http://schemas.microsoft.com/office/powerpoint/2010/main" val="4188333284"/>
-      </p:ext>
-    </p:extLst>
-  </p:cSld>
-  <p:clrMapOvr>
-    <a:masterClrMapping/>
-  </p:clrMapOvr>
-</p:sld>
-</file>
-
-<file path=ppt/slides/slide29.xml><?xml version="1.0" encoding="utf-8"?>
-<p:sld xmlns:a="http://schemas.openxmlformats.org/drawingml/2006/main" xmlns:r="http://schemas.openxmlformats.org/officeDocument/2006/relationships" xmlns:p="http://schemas.openxmlformats.org/presentationml/2006/main">
-  <p:cSld>
-    <p:spTree>
-      <p:nvGrpSpPr>
-        <p:cNvPr id="1" name=""/>
-        <p:cNvGrpSpPr/>
-        <p:nvPr/>
-      </p:nvGrpSpPr>
-      <p:grpSpPr>
-        <a:xfrm>
-          <a:off x="0" y="0"/>
-          <a:ext cx="0" cy="0"/>
-          <a:chOff x="0" y="0"/>
-          <a:chExt cx="0" cy="0"/>
-        </a:xfrm>
-      </p:grpSpPr>
-      <p:sp>
-        <p:nvSpPr>
-          <p:cNvPr id="2" name="Title 1">
-            <a:extLst>
-              <a:ext uri="{FF2B5EF4-FFF2-40B4-BE49-F238E27FC236}">
-                <a16:creationId xmlns:a16="http://schemas.microsoft.com/office/drawing/2014/main" id="{561D0610-8EA0-6E8E-A0C8-A98E1F72B1C5}"/>
-              </a:ext>
-            </a:extLst>
-          </p:cNvPr>
-          <p:cNvSpPr>
-            <a:spLocks noGrp="1"/>
-          </p:cNvSpPr>
-          <p:nvPr>
-            <p:ph type="title"/>
-          </p:nvPr>
-        </p:nvSpPr>
-        <p:spPr/>
-        <p:txBody>
-          <a:bodyPr/>
-          <a:lstStyle/>
-          <a:p>
-            <a:r>
-              <a:rPr lang="en-US" dirty="0"/>
-              <a:t>Elasticity for squirrels</a:t>
-            </a:r>
-          </a:p>
-        </p:txBody>
-      </p:sp>
-      <p:graphicFrame>
-        <p:nvGraphicFramePr>
-          <p:cNvPr id="5" name="Content Placeholder 4">
-            <a:extLst>
-              <a:ext uri="{FF2B5EF4-FFF2-40B4-BE49-F238E27FC236}">
-                <a16:creationId xmlns:a16="http://schemas.microsoft.com/office/drawing/2014/main" id="{2F69596C-E9C0-9785-695E-FE7F23F6CD3B}"/>
-              </a:ext>
-            </a:extLst>
-          </p:cNvPr>
-          <p:cNvGraphicFramePr>
-            <a:graphicFrameLocks noGrp="1"/>
-          </p:cNvGraphicFramePr>
-          <p:nvPr>
-            <p:ph sz="half" idx="1"/>
-            <p:extLst>
-              <p:ext uri="{D42A27DB-BD31-4B8C-83A1-F6EECF244321}">
-                <p14:modId xmlns:p14="http://schemas.microsoft.com/office/powerpoint/2010/main" val="3819756815"/>
-              </p:ext>
-            </p:extLst>
-          </p:nvPr>
-        </p:nvGraphicFramePr>
-        <p:xfrm>
-          <a:off x="990600" y="1524000"/>
-          <a:ext cx="4572000" cy="2224884"/>
-        </p:xfrm>
-        <a:graphic>
-          <a:graphicData uri="http://schemas.openxmlformats.org/drawingml/2006/table">
-            <a:tbl>
-              <a:tblPr>
-                <a:tableStyleId>{5C22544A-7EE6-4342-B048-85BDC9FD1C3A}</a:tableStyleId>
-              </a:tblPr>
-              <a:tblGrid>
-                <a:gridCol w="762000">
-                  <a:extLst>
-                    <a:ext uri="{9D8B030D-6E8A-4147-A177-3AD203B41FA5}">
-                      <a16:colId xmlns:a16="http://schemas.microsoft.com/office/drawing/2014/main" val="2120907187"/>
-                    </a:ext>
-                  </a:extLst>
-                </a:gridCol>
-                <a:gridCol w="762000">
-                  <a:extLst>
-                    <a:ext uri="{9D8B030D-6E8A-4147-A177-3AD203B41FA5}">
-                      <a16:colId xmlns:a16="http://schemas.microsoft.com/office/drawing/2014/main" val="2160110545"/>
-                    </a:ext>
-                  </a:extLst>
-                </a:gridCol>
-                <a:gridCol w="762000">
-                  <a:extLst>
-                    <a:ext uri="{9D8B030D-6E8A-4147-A177-3AD203B41FA5}">
-                      <a16:colId xmlns:a16="http://schemas.microsoft.com/office/drawing/2014/main" val="1418670477"/>
-                    </a:ext>
-                  </a:extLst>
-                </a:gridCol>
-                <a:gridCol w="762000">
-                  <a:extLst>
-                    <a:ext uri="{9D8B030D-6E8A-4147-A177-3AD203B41FA5}">
-                      <a16:colId xmlns:a16="http://schemas.microsoft.com/office/drawing/2014/main" val="2961258084"/>
-                    </a:ext>
-                  </a:extLst>
-                </a:gridCol>
-                <a:gridCol w="762000">
-                  <a:extLst>
-                    <a:ext uri="{9D8B030D-6E8A-4147-A177-3AD203B41FA5}">
-                      <a16:colId xmlns:a16="http://schemas.microsoft.com/office/drawing/2014/main" val="1952923094"/>
-                    </a:ext>
-                  </a:extLst>
-                </a:gridCol>
-                <a:gridCol w="762000">
-                  <a:extLst>
-                    <a:ext uri="{9D8B030D-6E8A-4147-A177-3AD203B41FA5}">
-                      <a16:colId xmlns:a16="http://schemas.microsoft.com/office/drawing/2014/main" val="3357754842"/>
-                    </a:ext>
-                  </a:extLst>
-                </a:gridCol>
-              </a:tblGrid>
-              <a:tr h="370814">
-                <a:tc>
-                  <a:txBody>
-                    <a:bodyPr/>
-                    <a:lstStyle/>
-                    <a:p>
-                      <a:pPr algn="l" fontAlgn="b">
-                        <a:buNone/>
-                      </a:pPr>
-                      <a:endParaRPr lang="en-US" sz="2000" b="0" i="0" u="none" strike="noStrike" dirty="0">
-                        <a:solidFill>
-                          <a:srgbClr val="000000"/>
-                        </a:solidFill>
-                        <a:effectLst/>
-                        <a:latin typeface="Aptos Narrow" panose="020B0004020202020204" pitchFamily="34" charset="0"/>
-                      </a:endParaRPr>
-                    </a:p>
-                  </a:txBody>
-                  <a:tcPr marL="7620" marR="7620" marT="7620" marB="0" anchor="b"/>
-                </a:tc>
-                <a:tc>
-                  <a:txBody>
-                    <a:bodyPr/>
-                    <a:lstStyle/>
-                    <a:p>
-                      <a:pPr algn="l" fontAlgn="b">
-                        <a:buNone/>
-                      </a:pPr>
-                      <a:r>
-                        <a:rPr lang="en-US" sz="2000" u="none" strike="noStrike">
-                          <a:effectLst/>
-                        </a:rPr>
-                        <a:t>[,1]</a:t>
-                      </a:r>
-                      <a:endParaRPr lang="en-US" sz="2000" b="0" i="0" u="none" strike="noStrike">
-                        <a:solidFill>
-                          <a:srgbClr val="000000"/>
-                        </a:solidFill>
-                        <a:effectLst/>
-                        <a:latin typeface="Aptos Narrow" panose="020B0004020202020204" pitchFamily="34" charset="0"/>
-                      </a:endParaRPr>
-                    </a:p>
-                  </a:txBody>
-                  <a:tcPr marL="7620" marR="7620" marT="7620" marB="0" anchor="b"/>
-                </a:tc>
-                <a:tc>
-                  <a:txBody>
-                    <a:bodyPr/>
-                    <a:lstStyle/>
-                    <a:p>
-                      <a:pPr algn="l" fontAlgn="b">
-                        <a:buNone/>
-                      </a:pPr>
-                      <a:r>
-                        <a:rPr lang="en-US" sz="2000" u="none" strike="noStrike">
-                          <a:effectLst/>
-                        </a:rPr>
-                        <a:t>[,2]</a:t>
-                      </a:r>
-                      <a:endParaRPr lang="en-US" sz="2000" b="0" i="0" u="none" strike="noStrike">
-                        <a:solidFill>
-                          <a:srgbClr val="000000"/>
-                        </a:solidFill>
-                        <a:effectLst/>
-                        <a:latin typeface="Aptos Narrow" panose="020B0004020202020204" pitchFamily="34" charset="0"/>
-                      </a:endParaRPr>
-                    </a:p>
-                  </a:txBody>
-                  <a:tcPr marL="7620" marR="7620" marT="7620" marB="0" anchor="b"/>
-                </a:tc>
-                <a:tc>
-                  <a:txBody>
-                    <a:bodyPr/>
-                    <a:lstStyle/>
-                    <a:p>
-                      <a:pPr algn="l" fontAlgn="b">
-                        <a:buNone/>
-                      </a:pPr>
-                      <a:r>
-                        <a:rPr lang="en-US" sz="2000" u="none" strike="noStrike">
-                          <a:effectLst/>
-                        </a:rPr>
-                        <a:t>[,3]</a:t>
-                      </a:r>
-                      <a:endParaRPr lang="en-US" sz="2000" b="0" i="0" u="none" strike="noStrike">
-                        <a:solidFill>
-                          <a:srgbClr val="000000"/>
-                        </a:solidFill>
-                        <a:effectLst/>
-                        <a:latin typeface="Aptos Narrow" panose="020B0004020202020204" pitchFamily="34" charset="0"/>
-                      </a:endParaRPr>
-                    </a:p>
-                  </a:txBody>
-                  <a:tcPr marL="7620" marR="7620" marT="7620" marB="0" anchor="b"/>
-                </a:tc>
-                <a:tc>
-                  <a:txBody>
-                    <a:bodyPr/>
-                    <a:lstStyle/>
-                    <a:p>
-                      <a:pPr algn="l" fontAlgn="b">
-                        <a:buNone/>
-                      </a:pPr>
-                      <a:r>
-                        <a:rPr lang="en-US" sz="2000" u="none" strike="noStrike">
-                          <a:effectLst/>
-                        </a:rPr>
-                        <a:t>[,4]</a:t>
-                      </a:r>
-                      <a:endParaRPr lang="en-US" sz="2000" b="0" i="0" u="none" strike="noStrike">
-                        <a:solidFill>
-                          <a:srgbClr val="000000"/>
-                        </a:solidFill>
-                        <a:effectLst/>
-                        <a:latin typeface="Aptos Narrow" panose="020B0004020202020204" pitchFamily="34" charset="0"/>
-                      </a:endParaRPr>
-                    </a:p>
-                  </a:txBody>
-                  <a:tcPr marL="7620" marR="7620" marT="7620" marB="0" anchor="b"/>
-                </a:tc>
-                <a:tc>
-                  <a:txBody>
-                    <a:bodyPr/>
-                    <a:lstStyle/>
-                    <a:p>
-                      <a:pPr algn="l" fontAlgn="b">
-                        <a:buNone/>
-                      </a:pPr>
-                      <a:r>
-                        <a:rPr lang="en-US" sz="2000" u="none" strike="noStrike">
-                          <a:effectLst/>
-                        </a:rPr>
-                        <a:t>[,5]</a:t>
-                      </a:r>
-                      <a:endParaRPr lang="en-US" sz="2000" b="0" i="0" u="none" strike="noStrike">
-                        <a:solidFill>
-                          <a:srgbClr val="000000"/>
-                        </a:solidFill>
-                        <a:effectLst/>
-                        <a:latin typeface="Aptos Narrow" panose="020B0004020202020204" pitchFamily="34" charset="0"/>
-                      </a:endParaRPr>
-                    </a:p>
-                  </a:txBody>
-                  <a:tcPr marL="7620" marR="7620" marT="7620" marB="0" anchor="b"/>
-                </a:tc>
-                <a:extLst>
-                  <a:ext uri="{0D108BD9-81ED-4DB2-BD59-A6C34878D82A}">
-                    <a16:rowId xmlns:a16="http://schemas.microsoft.com/office/drawing/2014/main" val="596258354"/>
-                  </a:ext>
-                </a:extLst>
-              </a:tr>
-              <a:tr h="370814">
-                <a:tc>
-                  <a:txBody>
-                    <a:bodyPr/>
-                    <a:lstStyle/>
-                    <a:p>
-                      <a:pPr algn="l" fontAlgn="b">
-                        <a:buNone/>
-                      </a:pPr>
-                      <a:r>
-                        <a:rPr lang="en-US" sz="2000" u="none" strike="noStrike">
-                          <a:effectLst/>
-                        </a:rPr>
-                        <a:t>[1,]</a:t>
-                      </a:r>
-                      <a:endParaRPr lang="en-US" sz="2000" b="0" i="0" u="none" strike="noStrike">
-                        <a:solidFill>
-                          <a:srgbClr val="000000"/>
-                        </a:solidFill>
-                        <a:effectLst/>
-                        <a:latin typeface="Aptos Narrow" panose="020B0004020202020204" pitchFamily="34" charset="0"/>
-                      </a:endParaRPr>
-                    </a:p>
-                  </a:txBody>
-                  <a:tcPr marL="7620" marR="7620" marT="7620" marB="0" anchor="b"/>
-                </a:tc>
-                <a:tc>
-                  <a:txBody>
-                    <a:bodyPr/>
-                    <a:lstStyle/>
-                    <a:p>
-                      <a:pPr algn="r" fontAlgn="b">
-                        <a:buNone/>
-                      </a:pPr>
-                      <a:r>
-                        <a:rPr lang="en-US" sz="2000" u="none" strike="noStrike" dirty="0">
-                          <a:effectLst/>
-                        </a:rPr>
-                        <a:t>0.34</a:t>
-                      </a:r>
-                      <a:endParaRPr lang="en-US" sz="2000" b="0" i="0" u="none" strike="noStrike" dirty="0">
-                        <a:solidFill>
-                          <a:srgbClr val="000000"/>
-                        </a:solidFill>
-                        <a:effectLst/>
-                        <a:latin typeface="Aptos Narrow" panose="020B0004020202020204" pitchFamily="34" charset="0"/>
-                      </a:endParaRPr>
-                    </a:p>
-                  </a:txBody>
-                  <a:tcPr marL="7620" marR="7620" marT="7620" marB="0" anchor="b"/>
-                </a:tc>
-                <a:tc>
-                  <a:txBody>
-                    <a:bodyPr/>
-                    <a:lstStyle/>
-                    <a:p>
-                      <a:pPr algn="r" fontAlgn="b">
-                        <a:buNone/>
-                      </a:pPr>
-                      <a:r>
-                        <a:rPr lang="en-US" sz="2000" u="none" strike="noStrike" dirty="0">
-                          <a:effectLst/>
-                        </a:rPr>
-                        <a:t>0.20 </a:t>
-                      </a:r>
-                      <a:endParaRPr lang="en-US" sz="2000" b="0" i="0" u="none" strike="noStrike" dirty="0">
-                        <a:solidFill>
-                          <a:srgbClr val="000000"/>
-                        </a:solidFill>
-                        <a:effectLst/>
-                        <a:latin typeface="Aptos Narrow" panose="020B0004020202020204" pitchFamily="34" charset="0"/>
-                      </a:endParaRPr>
-                    </a:p>
-                  </a:txBody>
-                  <a:tcPr marL="7620" marR="7620" marT="7620" marB="0" anchor="b"/>
-                </a:tc>
-                <a:tc>
-                  <a:txBody>
-                    <a:bodyPr/>
-                    <a:lstStyle/>
-                    <a:p>
-                      <a:pPr algn="r" fontAlgn="b">
-                        <a:buNone/>
-                      </a:pPr>
-                      <a:r>
-                        <a:rPr lang="en-US" sz="2000" u="none" strike="noStrike">
-                          <a:effectLst/>
-                        </a:rPr>
-                        <a:t>0.06</a:t>
-                      </a:r>
-                      <a:endParaRPr lang="en-US" sz="2000" b="0" i="0" u="none" strike="noStrike">
-                        <a:solidFill>
-                          <a:srgbClr val="000000"/>
-                        </a:solidFill>
-                        <a:effectLst/>
-                        <a:latin typeface="Aptos Narrow" panose="020B0004020202020204" pitchFamily="34" charset="0"/>
-                      </a:endParaRPr>
-                    </a:p>
-                  </a:txBody>
-                  <a:tcPr marL="7620" marR="7620" marT="7620" marB="0" anchor="b"/>
-                </a:tc>
-                <a:tc>
-                  <a:txBody>
-                    <a:bodyPr/>
-                    <a:lstStyle/>
-                    <a:p>
-                      <a:pPr algn="r" fontAlgn="b">
-                        <a:buNone/>
-                      </a:pPr>
-                      <a:r>
-                        <a:rPr lang="en-US" sz="2000" u="none" strike="noStrike">
-                          <a:effectLst/>
-                        </a:rPr>
-                        <a:t>0.02</a:t>
-                      </a:r>
-                      <a:endParaRPr lang="en-US" sz="2000" b="0" i="0" u="none" strike="noStrike">
-                        <a:solidFill>
-                          <a:srgbClr val="000000"/>
-                        </a:solidFill>
-                        <a:effectLst/>
-                        <a:latin typeface="Aptos Narrow" panose="020B0004020202020204" pitchFamily="34" charset="0"/>
-                      </a:endParaRPr>
-                    </a:p>
-                  </a:txBody>
-                  <a:tcPr marL="7620" marR="7620" marT="7620" marB="0" anchor="b"/>
-                </a:tc>
-                <a:tc>
-                  <a:txBody>
-                    <a:bodyPr/>
-                    <a:lstStyle/>
-                    <a:p>
-                      <a:pPr algn="r" fontAlgn="b">
-                        <a:buNone/>
-                      </a:pPr>
-                      <a:r>
-                        <a:rPr lang="en-US" sz="2000" u="none" strike="noStrike">
-                          <a:effectLst/>
-                        </a:rPr>
-                        <a:t>0</a:t>
-                      </a:r>
-                      <a:endParaRPr lang="en-US" sz="2000" b="0" i="0" u="none" strike="noStrike">
-                        <a:solidFill>
-                          <a:srgbClr val="000000"/>
-                        </a:solidFill>
-                        <a:effectLst/>
-                        <a:latin typeface="Aptos Narrow" panose="020B0004020202020204" pitchFamily="34" charset="0"/>
-                      </a:endParaRPr>
-                    </a:p>
-                  </a:txBody>
-                  <a:tcPr marL="7620" marR="7620" marT="7620" marB="0" anchor="b"/>
-                </a:tc>
-                <a:extLst>
-                  <a:ext uri="{0D108BD9-81ED-4DB2-BD59-A6C34878D82A}">
-                    <a16:rowId xmlns:a16="http://schemas.microsoft.com/office/drawing/2014/main" val="2233104178"/>
-                  </a:ext>
-                </a:extLst>
-              </a:tr>
-              <a:tr h="370814">
-                <a:tc>
-                  <a:txBody>
-                    <a:bodyPr/>
-                    <a:lstStyle/>
-                    <a:p>
-                      <a:pPr algn="l" fontAlgn="b">
-                        <a:buNone/>
-                      </a:pPr>
-                      <a:r>
-                        <a:rPr lang="en-US" sz="2000" u="none" strike="noStrike">
-                          <a:effectLst/>
-                        </a:rPr>
-                        <a:t>[2,]</a:t>
-                      </a:r>
-                      <a:endParaRPr lang="en-US" sz="2000" b="0" i="0" u="none" strike="noStrike">
-                        <a:solidFill>
-                          <a:srgbClr val="000000"/>
-                        </a:solidFill>
-                        <a:effectLst/>
-                        <a:latin typeface="Aptos Narrow" panose="020B0004020202020204" pitchFamily="34" charset="0"/>
-                      </a:endParaRPr>
-                    </a:p>
-                  </a:txBody>
-                  <a:tcPr marL="7620" marR="7620" marT="7620" marB="0" anchor="b"/>
-                </a:tc>
-                <a:tc>
-                  <a:txBody>
-                    <a:bodyPr/>
-                    <a:lstStyle/>
-                    <a:p>
-                      <a:pPr algn="r" fontAlgn="b">
-                        <a:buNone/>
-                      </a:pPr>
-                      <a:r>
-                        <a:rPr lang="en-US" sz="2000" u="none" strike="noStrike">
-                          <a:effectLst/>
-                        </a:rPr>
-                        <a:t>0.28</a:t>
-                      </a:r>
-                      <a:endParaRPr lang="en-US" sz="2000" b="0" i="0" u="none" strike="noStrike">
-                        <a:solidFill>
-                          <a:srgbClr val="000000"/>
-                        </a:solidFill>
-                        <a:effectLst/>
-                        <a:latin typeface="Aptos Narrow" panose="020B0004020202020204" pitchFamily="34" charset="0"/>
-                      </a:endParaRPr>
-                    </a:p>
-                  </a:txBody>
-                  <a:tcPr marL="7620" marR="7620" marT="7620" marB="0" anchor="b"/>
-                </a:tc>
-                <a:tc>
-                  <a:txBody>
-                    <a:bodyPr/>
-                    <a:lstStyle/>
-                    <a:p>
-                      <a:pPr algn="r" fontAlgn="b">
-                        <a:buNone/>
-                      </a:pPr>
-                      <a:r>
-                        <a:rPr lang="en-US" sz="2000" u="none" strike="noStrike">
-                          <a:effectLst/>
-                        </a:rPr>
-                        <a:t>0</a:t>
-                      </a:r>
-                      <a:endParaRPr lang="en-US" sz="2000" b="0" i="0" u="none" strike="noStrike">
-                        <a:solidFill>
-                          <a:srgbClr val="000000"/>
-                        </a:solidFill>
-                        <a:effectLst/>
-                        <a:latin typeface="Aptos Narrow" panose="020B0004020202020204" pitchFamily="34" charset="0"/>
-                      </a:endParaRPr>
-                    </a:p>
-                  </a:txBody>
-                  <a:tcPr marL="7620" marR="7620" marT="7620" marB="0" anchor="b"/>
-                </a:tc>
-                <a:tc>
-                  <a:txBody>
-                    <a:bodyPr/>
-                    <a:lstStyle/>
-                    <a:p>
-                      <a:pPr algn="r" fontAlgn="b">
-                        <a:buNone/>
-                      </a:pPr>
-                      <a:r>
-                        <a:rPr lang="en-US" sz="2000" u="none" strike="noStrike">
-                          <a:effectLst/>
-                        </a:rPr>
-                        <a:t>0</a:t>
-                      </a:r>
-                      <a:endParaRPr lang="en-US" sz="2000" b="0" i="0" u="none" strike="noStrike">
-                        <a:solidFill>
-                          <a:srgbClr val="000000"/>
-                        </a:solidFill>
-                        <a:effectLst/>
-                        <a:latin typeface="Aptos Narrow" panose="020B0004020202020204" pitchFamily="34" charset="0"/>
-                      </a:endParaRPr>
-                    </a:p>
-                  </a:txBody>
-                  <a:tcPr marL="7620" marR="7620" marT="7620" marB="0" anchor="b"/>
-                </a:tc>
-                <a:tc>
-                  <a:txBody>
-                    <a:bodyPr/>
-                    <a:lstStyle/>
-                    <a:p>
-                      <a:pPr algn="r" fontAlgn="b">
-                        <a:buNone/>
-                      </a:pPr>
-                      <a:r>
-                        <a:rPr lang="en-US" sz="2000" u="none" strike="noStrike">
-                          <a:effectLst/>
-                        </a:rPr>
-                        <a:t>0</a:t>
-                      </a:r>
-                      <a:endParaRPr lang="en-US" sz="2000" b="0" i="0" u="none" strike="noStrike">
-                        <a:solidFill>
-                          <a:srgbClr val="000000"/>
-                        </a:solidFill>
-                        <a:effectLst/>
-                        <a:latin typeface="Aptos Narrow" panose="020B0004020202020204" pitchFamily="34" charset="0"/>
-                      </a:endParaRPr>
-                    </a:p>
-                  </a:txBody>
-                  <a:tcPr marL="7620" marR="7620" marT="7620" marB="0" anchor="b"/>
-                </a:tc>
-                <a:tc>
-                  <a:txBody>
-                    <a:bodyPr/>
-                    <a:lstStyle/>
-                    <a:p>
-                      <a:pPr algn="r" fontAlgn="b">
-                        <a:buNone/>
-                      </a:pPr>
-                      <a:r>
-                        <a:rPr lang="en-US" sz="2000" u="none" strike="noStrike">
-                          <a:effectLst/>
-                        </a:rPr>
-                        <a:t>0</a:t>
-                      </a:r>
-                      <a:endParaRPr lang="en-US" sz="2000" b="0" i="0" u="none" strike="noStrike">
-                        <a:solidFill>
-                          <a:srgbClr val="000000"/>
-                        </a:solidFill>
-                        <a:effectLst/>
-                        <a:latin typeface="Aptos Narrow" panose="020B0004020202020204" pitchFamily="34" charset="0"/>
-                      </a:endParaRPr>
-                    </a:p>
-                  </a:txBody>
-                  <a:tcPr marL="7620" marR="7620" marT="7620" marB="0" anchor="b"/>
-                </a:tc>
-                <a:extLst>
-                  <a:ext uri="{0D108BD9-81ED-4DB2-BD59-A6C34878D82A}">
-                    <a16:rowId xmlns:a16="http://schemas.microsoft.com/office/drawing/2014/main" val="66938762"/>
-                  </a:ext>
-                </a:extLst>
-              </a:tr>
-              <a:tr h="370814">
-                <a:tc>
-                  <a:txBody>
-                    <a:bodyPr/>
-                    <a:lstStyle/>
-                    <a:p>
-                      <a:pPr algn="l" fontAlgn="b">
-                        <a:buNone/>
-                      </a:pPr>
-                      <a:r>
-                        <a:rPr lang="en-US" sz="2000" u="none" strike="noStrike">
-                          <a:effectLst/>
-                        </a:rPr>
-                        <a:t>[3,]</a:t>
-                      </a:r>
-                      <a:endParaRPr lang="en-US" sz="2000" b="0" i="0" u="none" strike="noStrike">
-                        <a:solidFill>
-                          <a:srgbClr val="000000"/>
-                        </a:solidFill>
-                        <a:effectLst/>
-                        <a:latin typeface="Aptos Narrow" panose="020B0004020202020204" pitchFamily="34" charset="0"/>
-                      </a:endParaRPr>
-                    </a:p>
-                  </a:txBody>
-                  <a:tcPr marL="7620" marR="7620" marT="7620" marB="0" anchor="b"/>
-                </a:tc>
-                <a:tc>
-                  <a:txBody>
-                    <a:bodyPr/>
-                    <a:lstStyle/>
-                    <a:p>
-                      <a:pPr algn="r" fontAlgn="b">
-                        <a:buNone/>
-                      </a:pPr>
-                      <a:r>
-                        <a:rPr lang="en-US" sz="2000" u="none" strike="noStrike">
-                          <a:effectLst/>
-                        </a:rPr>
-                        <a:t>0</a:t>
-                      </a:r>
-                      <a:endParaRPr lang="en-US" sz="2000" b="0" i="0" u="none" strike="noStrike">
-                        <a:solidFill>
-                          <a:srgbClr val="000000"/>
-                        </a:solidFill>
-                        <a:effectLst/>
-                        <a:latin typeface="Aptos Narrow" panose="020B0004020202020204" pitchFamily="34" charset="0"/>
-                      </a:endParaRPr>
-                    </a:p>
-                  </a:txBody>
-                  <a:tcPr marL="7620" marR="7620" marT="7620" marB="0" anchor="b"/>
-                </a:tc>
-                <a:tc>
-                  <a:txBody>
-                    <a:bodyPr/>
-                    <a:lstStyle/>
-                    <a:p>
-                      <a:pPr algn="r" fontAlgn="b">
-                        <a:buNone/>
-                      </a:pPr>
-                      <a:r>
-                        <a:rPr lang="en-US" sz="2000" u="none" strike="noStrike">
-                          <a:effectLst/>
-                        </a:rPr>
-                        <a:t>0.08</a:t>
-                      </a:r>
-                      <a:endParaRPr lang="en-US" sz="2000" b="0" i="0" u="none" strike="noStrike">
-                        <a:solidFill>
-                          <a:srgbClr val="000000"/>
-                        </a:solidFill>
-                        <a:effectLst/>
-                        <a:latin typeface="Aptos Narrow" panose="020B0004020202020204" pitchFamily="34" charset="0"/>
-                      </a:endParaRPr>
-                    </a:p>
-                  </a:txBody>
-                  <a:tcPr marL="7620" marR="7620" marT="7620" marB="0" anchor="b"/>
-                </a:tc>
-                <a:tc>
-                  <a:txBody>
-                    <a:bodyPr/>
-                    <a:lstStyle/>
-                    <a:p>
-                      <a:pPr algn="r" fontAlgn="b">
-                        <a:buNone/>
-                      </a:pPr>
-                      <a:r>
-                        <a:rPr lang="en-US" sz="2000" u="none" strike="noStrike" dirty="0">
-                          <a:effectLst/>
-                        </a:rPr>
-                        <a:t>0</a:t>
-                      </a:r>
-                      <a:endParaRPr lang="en-US" sz="2000" b="0" i="0" u="none" strike="noStrike" dirty="0">
-                        <a:solidFill>
-                          <a:srgbClr val="000000"/>
-                        </a:solidFill>
-                        <a:effectLst/>
-                        <a:latin typeface="Aptos Narrow" panose="020B0004020202020204" pitchFamily="34" charset="0"/>
-                      </a:endParaRPr>
-                    </a:p>
-                  </a:txBody>
-                  <a:tcPr marL="7620" marR="7620" marT="7620" marB="0" anchor="b"/>
-                </a:tc>
-                <a:tc>
-                  <a:txBody>
-                    <a:bodyPr/>
-                    <a:lstStyle/>
-                    <a:p>
-                      <a:pPr algn="r" fontAlgn="b">
-                        <a:buNone/>
-                      </a:pPr>
-                      <a:r>
-                        <a:rPr lang="en-US" sz="2000" u="none" strike="noStrike">
-                          <a:effectLst/>
-                        </a:rPr>
-                        <a:t>0</a:t>
-                      </a:r>
-                      <a:endParaRPr lang="en-US" sz="2000" b="0" i="0" u="none" strike="noStrike">
-                        <a:solidFill>
-                          <a:srgbClr val="000000"/>
-                        </a:solidFill>
-                        <a:effectLst/>
-                        <a:latin typeface="Aptos Narrow" panose="020B0004020202020204" pitchFamily="34" charset="0"/>
-                      </a:endParaRPr>
-                    </a:p>
-                  </a:txBody>
-                  <a:tcPr marL="7620" marR="7620" marT="7620" marB="0" anchor="b"/>
-                </a:tc>
-                <a:tc>
-                  <a:txBody>
-                    <a:bodyPr/>
-                    <a:lstStyle/>
-                    <a:p>
-                      <a:pPr algn="r" fontAlgn="b">
-                        <a:buNone/>
-                      </a:pPr>
-                      <a:r>
-                        <a:rPr lang="en-US" sz="2000" u="none" strike="noStrike">
-                          <a:effectLst/>
-                        </a:rPr>
-                        <a:t>0</a:t>
-                      </a:r>
-                      <a:endParaRPr lang="en-US" sz="2000" b="0" i="0" u="none" strike="noStrike">
-                        <a:solidFill>
-                          <a:srgbClr val="000000"/>
-                        </a:solidFill>
-                        <a:effectLst/>
-                        <a:latin typeface="Aptos Narrow" panose="020B0004020202020204" pitchFamily="34" charset="0"/>
-                      </a:endParaRPr>
-                    </a:p>
-                  </a:txBody>
-                  <a:tcPr marL="7620" marR="7620" marT="7620" marB="0" anchor="b"/>
-                </a:tc>
-                <a:extLst>
-                  <a:ext uri="{0D108BD9-81ED-4DB2-BD59-A6C34878D82A}">
-                    <a16:rowId xmlns:a16="http://schemas.microsoft.com/office/drawing/2014/main" val="2753957334"/>
-                  </a:ext>
-                </a:extLst>
-              </a:tr>
-              <a:tr h="370814">
-                <a:tc>
-                  <a:txBody>
-                    <a:bodyPr/>
-                    <a:lstStyle/>
-                    <a:p>
-                      <a:pPr algn="l" fontAlgn="b">
-                        <a:buNone/>
-                      </a:pPr>
-                      <a:r>
-                        <a:rPr lang="en-US" sz="2000" u="none" strike="noStrike">
-                          <a:effectLst/>
-                        </a:rPr>
-                        <a:t>[4,]</a:t>
-                      </a:r>
-                      <a:endParaRPr lang="en-US" sz="2000" b="0" i="0" u="none" strike="noStrike">
-                        <a:solidFill>
-                          <a:srgbClr val="000000"/>
-                        </a:solidFill>
-                        <a:effectLst/>
-                        <a:latin typeface="Aptos Narrow" panose="020B0004020202020204" pitchFamily="34" charset="0"/>
-                      </a:endParaRPr>
-                    </a:p>
-                  </a:txBody>
-                  <a:tcPr marL="7620" marR="7620" marT="7620" marB="0" anchor="b"/>
-                </a:tc>
-                <a:tc>
-                  <a:txBody>
-                    <a:bodyPr/>
-                    <a:lstStyle/>
-                    <a:p>
-                      <a:pPr algn="r" fontAlgn="b">
-                        <a:buNone/>
-                      </a:pPr>
-                      <a:r>
-                        <a:rPr lang="en-US" sz="2000" u="none" strike="noStrike">
-                          <a:effectLst/>
-                        </a:rPr>
-                        <a:t>0</a:t>
-                      </a:r>
-                      <a:endParaRPr lang="en-US" sz="2000" b="0" i="0" u="none" strike="noStrike">
-                        <a:solidFill>
-                          <a:srgbClr val="000000"/>
-                        </a:solidFill>
-                        <a:effectLst/>
-                        <a:latin typeface="Aptos Narrow" panose="020B0004020202020204" pitchFamily="34" charset="0"/>
-                      </a:endParaRPr>
-                    </a:p>
-                  </a:txBody>
-                  <a:tcPr marL="7620" marR="7620" marT="7620" marB="0" anchor="b"/>
-                </a:tc>
-                <a:tc>
-                  <a:txBody>
-                    <a:bodyPr/>
-                    <a:lstStyle/>
-                    <a:p>
-                      <a:pPr algn="r" fontAlgn="b">
-                        <a:buNone/>
-                      </a:pPr>
-                      <a:r>
-                        <a:rPr lang="en-US" sz="2000" u="none" strike="noStrike">
-                          <a:effectLst/>
-                        </a:rPr>
-                        <a:t>0</a:t>
-                      </a:r>
-                      <a:endParaRPr lang="en-US" sz="2000" b="0" i="0" u="none" strike="noStrike">
-                        <a:solidFill>
-                          <a:srgbClr val="000000"/>
-                        </a:solidFill>
-                        <a:effectLst/>
-                        <a:latin typeface="Aptos Narrow" panose="020B0004020202020204" pitchFamily="34" charset="0"/>
-                      </a:endParaRPr>
-                    </a:p>
-                  </a:txBody>
-                  <a:tcPr marL="7620" marR="7620" marT="7620" marB="0" anchor="b"/>
-                </a:tc>
-                <a:tc>
-                  <a:txBody>
-                    <a:bodyPr/>
-                    <a:lstStyle/>
-                    <a:p>
-                      <a:pPr algn="r" fontAlgn="b">
-                        <a:buNone/>
-                      </a:pPr>
-                      <a:r>
-                        <a:rPr lang="en-US" sz="2000" u="none" strike="noStrike">
-                          <a:effectLst/>
-                        </a:rPr>
-                        <a:t>0.02</a:t>
-                      </a:r>
-                      <a:endParaRPr lang="en-US" sz="2000" b="0" i="0" u="none" strike="noStrike">
-                        <a:solidFill>
-                          <a:srgbClr val="000000"/>
-                        </a:solidFill>
-                        <a:effectLst/>
-                        <a:latin typeface="Aptos Narrow" panose="020B0004020202020204" pitchFamily="34" charset="0"/>
-                      </a:endParaRPr>
-                    </a:p>
-                  </a:txBody>
-                  <a:tcPr marL="7620" marR="7620" marT="7620" marB="0" anchor="b"/>
-                </a:tc>
-                <a:tc>
-                  <a:txBody>
-                    <a:bodyPr/>
-                    <a:lstStyle/>
-                    <a:p>
-                      <a:pPr algn="r" fontAlgn="b">
-                        <a:buNone/>
-                      </a:pPr>
-                      <a:r>
-                        <a:rPr lang="en-US" sz="2000" u="none" strike="noStrike">
-                          <a:effectLst/>
-                        </a:rPr>
-                        <a:t>0</a:t>
-                      </a:r>
-                      <a:endParaRPr lang="en-US" sz="2000" b="0" i="0" u="none" strike="noStrike">
-                        <a:solidFill>
-                          <a:srgbClr val="000000"/>
-                        </a:solidFill>
-                        <a:effectLst/>
-                        <a:latin typeface="Aptos Narrow" panose="020B0004020202020204" pitchFamily="34" charset="0"/>
-                      </a:endParaRPr>
-                    </a:p>
-                  </a:txBody>
-                  <a:tcPr marL="7620" marR="7620" marT="7620" marB="0" anchor="b"/>
-                </a:tc>
-                <a:tc>
-                  <a:txBody>
-                    <a:bodyPr/>
-                    <a:lstStyle/>
-                    <a:p>
-                      <a:pPr algn="r" fontAlgn="b">
-                        <a:buNone/>
-                      </a:pPr>
-                      <a:r>
-                        <a:rPr lang="en-US" sz="2000" u="none" strike="noStrike" dirty="0">
-                          <a:effectLst/>
-                        </a:rPr>
-                        <a:t>0</a:t>
-                      </a:r>
-                      <a:endParaRPr lang="en-US" sz="2000" b="0" i="0" u="none" strike="noStrike" dirty="0">
-                        <a:solidFill>
-                          <a:srgbClr val="000000"/>
-                        </a:solidFill>
-                        <a:effectLst/>
-                        <a:latin typeface="Aptos Narrow" panose="020B0004020202020204" pitchFamily="34" charset="0"/>
-                      </a:endParaRPr>
-                    </a:p>
-                  </a:txBody>
-                  <a:tcPr marL="7620" marR="7620" marT="7620" marB="0" anchor="b"/>
-                </a:tc>
-                <a:extLst>
-                  <a:ext uri="{0D108BD9-81ED-4DB2-BD59-A6C34878D82A}">
-                    <a16:rowId xmlns:a16="http://schemas.microsoft.com/office/drawing/2014/main" val="1666235910"/>
-                  </a:ext>
-                </a:extLst>
-              </a:tr>
-              <a:tr h="370814">
-                <a:tc>
-                  <a:txBody>
-                    <a:bodyPr/>
-                    <a:lstStyle/>
-                    <a:p>
-                      <a:pPr algn="l" fontAlgn="b">
-                        <a:buNone/>
-                      </a:pPr>
-                      <a:r>
-                        <a:rPr lang="en-US" sz="2000" u="none" strike="noStrike">
-                          <a:effectLst/>
-                        </a:rPr>
-                        <a:t>[5,]</a:t>
-                      </a:r>
-                      <a:endParaRPr lang="en-US" sz="2000" b="0" i="0" u="none" strike="noStrike">
-                        <a:solidFill>
-                          <a:srgbClr val="000000"/>
-                        </a:solidFill>
-                        <a:effectLst/>
-                        <a:latin typeface="Aptos Narrow" panose="020B0004020202020204" pitchFamily="34" charset="0"/>
-                      </a:endParaRPr>
-                    </a:p>
-                  </a:txBody>
-                  <a:tcPr marL="7620" marR="7620" marT="7620" marB="0" anchor="b"/>
-                </a:tc>
-                <a:tc>
-                  <a:txBody>
-                    <a:bodyPr/>
-                    <a:lstStyle/>
-                    <a:p>
-                      <a:pPr algn="r" fontAlgn="b">
-                        <a:buNone/>
-                      </a:pPr>
-                      <a:r>
-                        <a:rPr lang="en-US" sz="2000" u="none" strike="noStrike">
-                          <a:effectLst/>
-                        </a:rPr>
-                        <a:t>0</a:t>
-                      </a:r>
-                      <a:endParaRPr lang="en-US" sz="2000" b="0" i="0" u="none" strike="noStrike">
-                        <a:solidFill>
-                          <a:srgbClr val="000000"/>
-                        </a:solidFill>
-                        <a:effectLst/>
-                        <a:latin typeface="Aptos Narrow" panose="020B0004020202020204" pitchFamily="34" charset="0"/>
-                      </a:endParaRPr>
-                    </a:p>
-                  </a:txBody>
-                  <a:tcPr marL="7620" marR="7620" marT="7620" marB="0" anchor="b"/>
-                </a:tc>
-                <a:tc>
-                  <a:txBody>
-                    <a:bodyPr/>
-                    <a:lstStyle/>
-                    <a:p>
-                      <a:pPr algn="r" fontAlgn="b">
-                        <a:buNone/>
-                      </a:pPr>
-                      <a:r>
-                        <a:rPr lang="en-US" sz="2000" u="none" strike="noStrike">
-                          <a:effectLst/>
-                        </a:rPr>
-                        <a:t>0</a:t>
-                      </a:r>
-                      <a:endParaRPr lang="en-US" sz="2000" b="0" i="0" u="none" strike="noStrike">
-                        <a:solidFill>
-                          <a:srgbClr val="000000"/>
-                        </a:solidFill>
-                        <a:effectLst/>
-                        <a:latin typeface="Aptos Narrow" panose="020B0004020202020204" pitchFamily="34" charset="0"/>
-                      </a:endParaRPr>
-                    </a:p>
-                  </a:txBody>
-                  <a:tcPr marL="7620" marR="7620" marT="7620" marB="0" anchor="b"/>
-                </a:tc>
-                <a:tc>
-                  <a:txBody>
-                    <a:bodyPr/>
-                    <a:lstStyle/>
-                    <a:p>
-                      <a:pPr algn="r" fontAlgn="b">
-                        <a:buNone/>
-                      </a:pPr>
-                      <a:r>
-                        <a:rPr lang="en-US" sz="2000" u="none" strike="noStrike">
-                          <a:effectLst/>
-                        </a:rPr>
-                        <a:t>0</a:t>
-                      </a:r>
-                      <a:endParaRPr lang="en-US" sz="2000" b="0" i="0" u="none" strike="noStrike">
-                        <a:solidFill>
-                          <a:srgbClr val="000000"/>
-                        </a:solidFill>
-                        <a:effectLst/>
-                        <a:latin typeface="Aptos Narrow" panose="020B0004020202020204" pitchFamily="34" charset="0"/>
-                      </a:endParaRPr>
-                    </a:p>
-                  </a:txBody>
-                  <a:tcPr marL="7620" marR="7620" marT="7620" marB="0" anchor="b"/>
-                </a:tc>
-                <a:tc>
-                  <a:txBody>
-                    <a:bodyPr/>
-                    <a:lstStyle/>
-                    <a:p>
-                      <a:pPr algn="r" fontAlgn="b">
-                        <a:buNone/>
-                      </a:pPr>
-                      <a:r>
-                        <a:rPr lang="en-US" sz="2000" u="none" strike="noStrike">
-                          <a:effectLst/>
-                        </a:rPr>
-                        <a:t>0</a:t>
-                      </a:r>
-                      <a:endParaRPr lang="en-US" sz="2000" b="0" i="0" u="none" strike="noStrike">
-                        <a:solidFill>
-                          <a:srgbClr val="000000"/>
-                        </a:solidFill>
-                        <a:effectLst/>
-                        <a:latin typeface="Aptos Narrow" panose="020B0004020202020204" pitchFamily="34" charset="0"/>
-                      </a:endParaRPr>
-                    </a:p>
-                  </a:txBody>
-                  <a:tcPr marL="7620" marR="7620" marT="7620" marB="0" anchor="b"/>
-                </a:tc>
-                <a:tc>
-                  <a:txBody>
-                    <a:bodyPr/>
-                    <a:lstStyle/>
-                    <a:p>
-                      <a:pPr algn="r" fontAlgn="b">
-                        <a:buNone/>
-                      </a:pPr>
-                      <a:r>
-                        <a:rPr lang="en-US" sz="2000" u="none" strike="noStrike" dirty="0">
-                          <a:effectLst/>
-                        </a:rPr>
-                        <a:t>0</a:t>
-                      </a:r>
-                      <a:endParaRPr lang="en-US" sz="2000" b="0" i="0" u="none" strike="noStrike" dirty="0">
-                        <a:solidFill>
-                          <a:srgbClr val="000000"/>
-                        </a:solidFill>
-                        <a:effectLst/>
-                        <a:latin typeface="Aptos Narrow" panose="020B0004020202020204" pitchFamily="34" charset="0"/>
-                      </a:endParaRPr>
-                    </a:p>
-                  </a:txBody>
-                  <a:tcPr marL="7620" marR="7620" marT="7620" marB="0" anchor="b"/>
-                </a:tc>
-                <a:extLst>
-                  <a:ext uri="{0D108BD9-81ED-4DB2-BD59-A6C34878D82A}">
-                    <a16:rowId xmlns:a16="http://schemas.microsoft.com/office/drawing/2014/main" val="3524156765"/>
-                  </a:ext>
-                </a:extLst>
-              </a:tr>
-            </a:tbl>
-          </a:graphicData>
-        </a:graphic>
-      </p:graphicFrame>
-      <p:sp>
-        <p:nvSpPr>
-          <p:cNvPr id="6" name="TextBox 5">
-            <a:extLst>
-              <a:ext uri="{FF2B5EF4-FFF2-40B4-BE49-F238E27FC236}">
-                <a16:creationId xmlns:a16="http://schemas.microsoft.com/office/drawing/2014/main" id="{CB0B2BBC-2987-CB35-C4A9-A08314C8A1F3}"/>
-              </a:ext>
-            </a:extLst>
-          </p:cNvPr>
-          <p:cNvSpPr txBox="1"/>
-          <p:nvPr/>
-        </p:nvSpPr>
-        <p:spPr>
-          <a:xfrm>
-            <a:off x="838200" y="4114800"/>
-            <a:ext cx="7162800" cy="2215991"/>
-          </a:xfrm>
-          <a:prstGeom prst="rect">
-            <a:avLst/>
-          </a:prstGeom>
-          <a:noFill/>
-        </p:spPr>
-        <p:txBody>
-          <a:bodyPr wrap="square" rtlCol="0">
-            <a:spAutoFit/>
-          </a:bodyPr>
-          <a:lstStyle/>
-          <a:p>
-            <a:pPr marL="285750" indent="-285750">
-              <a:buFont typeface="Arial" panose="020B0604020202020204" pitchFamily="34" charset="0"/>
-              <a:buChar char="•"/>
-            </a:pPr>
-            <a:r>
-              <a:rPr lang="en-US" sz="2400" dirty="0"/>
-              <a:t>Read as proportional change in lambda with proportional change in the cell of the Leslie matrix. </a:t>
-            </a:r>
-          </a:p>
-          <a:p>
-            <a:pPr marL="285750" indent="-285750">
-              <a:buFont typeface="Arial" panose="020B0604020202020204" pitchFamily="34" charset="0"/>
-              <a:buChar char="•"/>
-            </a:pPr>
-            <a:r>
-              <a:rPr lang="en-US" sz="2400" dirty="0"/>
-              <a:t>E.g. 10% change in probability of surviving to age 1 and reproducing is a 3.4% change in lambda</a:t>
-            </a:r>
-          </a:p>
-          <a:p>
-            <a:endParaRPr lang="en-US" dirty="0"/>
-          </a:p>
-        </p:txBody>
-      </p:sp>
-    </p:spTree>
-    <p:extLst>
-      <p:ext uri="{BB962C8B-B14F-4D97-AF65-F5344CB8AC3E}">
-        <p14:creationId xmlns:p14="http://schemas.microsoft.com/office/powerpoint/2010/main" val="3889365513"/>
-      </p:ext>
-    </p:extLst>
-  </p:cSld>
-  <p:clrMapOvr>
-    <a:masterClrMapping/>
-  </p:clrMapOvr>
-</p:sld>
-</file>
-
-<file path=ppt/slides/slide3.xml><?xml version="1.0" encoding="utf-8"?>
-<p:sld xmlns:a="http://schemas.openxmlformats.org/drawingml/2006/main" xmlns:r="http://schemas.openxmlformats.org/officeDocument/2006/relationships" xmlns:p="http://schemas.openxmlformats.org/presentationml/2006/main">
-  <p:cSld>
-    <p:spTree>
-      <p:nvGrpSpPr>
-        <p:cNvPr id="1" name=""/>
-        <p:cNvGrpSpPr/>
-        <p:nvPr/>
-      </p:nvGrpSpPr>
-      <p:grpSpPr>
-        <a:xfrm>
-          <a:off x="0" y="0"/>
-          <a:ext cx="0" cy="0"/>
-          <a:chOff x="0" y="0"/>
-          <a:chExt cx="0" cy="0"/>
-        </a:xfrm>
-      </p:grpSpPr>
-      <p:sp>
-        <p:nvSpPr>
-          <p:cNvPr id="2" name="Title 1">
-            <a:extLst>
-              <a:ext uri="{FF2B5EF4-FFF2-40B4-BE49-F238E27FC236}">
-                <a16:creationId xmlns:a16="http://schemas.microsoft.com/office/drawing/2014/main" id="{C86286CA-F756-C0B3-4AA9-2E58FD4A1E84}"/>
-              </a:ext>
-            </a:extLst>
-          </p:cNvPr>
-          <p:cNvSpPr>
-            <a:spLocks noGrp="1"/>
-          </p:cNvSpPr>
-          <p:nvPr>
-            <p:ph type="title"/>
-          </p:nvPr>
-        </p:nvSpPr>
-        <p:spPr/>
-        <p:txBody>
-          <a:bodyPr/>
-          <a:lstStyle/>
-          <a:p>
-            <a:r>
-              <a:rPr lang="en-US" dirty="0"/>
-              <a:t>Life tables</a:t>
-            </a:r>
-          </a:p>
-        </p:txBody>
-      </p:sp>
-      <p:sp>
-        <p:nvSpPr>
-          <p:cNvPr id="3" name="Content Placeholder 2">
-            <a:extLst>
-              <a:ext uri="{FF2B5EF4-FFF2-40B4-BE49-F238E27FC236}">
-                <a16:creationId xmlns:a16="http://schemas.microsoft.com/office/drawing/2014/main" id="{ECE3689E-9895-65EC-7A0C-B200F7A28D7F}"/>
-              </a:ext>
-            </a:extLst>
-          </p:cNvPr>
-          <p:cNvSpPr>
-            <a:spLocks noGrp="1"/>
-          </p:cNvSpPr>
-          <p:nvPr>
-            <p:ph idx="1"/>
-          </p:nvPr>
-        </p:nvSpPr>
-        <p:spPr/>
-        <p:txBody>
-          <a:bodyPr/>
-          <a:lstStyle/>
-          <a:p>
-            <a:r>
-              <a:rPr lang="en-US" dirty="0"/>
-              <a:t>Age or stage structured models require age (or stage) specific mortality and fecundity rates</a:t>
-            </a:r>
-          </a:p>
-          <a:p>
-            <a:r>
-              <a:rPr lang="en-US" dirty="0"/>
-              <a:t>Life table keeps track of numbers and mortality at age (or stage) to get the age specific mortality rates</a:t>
-            </a:r>
-          </a:p>
-          <a:p>
-            <a:pPr marL="0" indent="0">
-              <a:buNone/>
-            </a:pPr>
-            <a:endParaRPr lang="en-US" dirty="0"/>
-          </a:p>
-          <a:p>
-            <a:endParaRPr lang="en-US" dirty="0"/>
-          </a:p>
-        </p:txBody>
-      </p:sp>
-    </p:spTree>
-    <p:extLst>
-      <p:ext uri="{BB962C8B-B14F-4D97-AF65-F5344CB8AC3E}">
-        <p14:creationId xmlns:p14="http://schemas.microsoft.com/office/powerpoint/2010/main" val="240145590"/>
-      </p:ext>
-    </p:extLst>
-  </p:cSld>
-  <p:clrMapOvr>
-    <a:masterClrMapping/>
-  </p:clrMapOvr>
-</p:sld>
-</file>
-
-<file path=ppt/slides/slide30.xml><?xml version="1.0" encoding="utf-8"?>
-<p:sld xmlns:a="http://schemas.openxmlformats.org/drawingml/2006/main" xmlns:r="http://schemas.openxmlformats.org/officeDocument/2006/relationships" xmlns:p="http://schemas.openxmlformats.org/presentationml/2006/main">
-  <p:cSld>
-    <p:spTree>
-      <p:nvGrpSpPr>
-        <p:cNvPr id="1" name=""/>
-        <p:cNvGrpSpPr/>
-        <p:nvPr/>
-      </p:nvGrpSpPr>
-      <p:grpSpPr>
-        <a:xfrm>
-          <a:off x="0" y="0"/>
-          <a:ext cx="0" cy="0"/>
-          <a:chOff x="0" y="0"/>
-          <a:chExt cx="0" cy="0"/>
-        </a:xfrm>
-      </p:grpSpPr>
-      <p:sp>
-        <p:nvSpPr>
-          <p:cNvPr id="2" name="Title 1">
-            <a:extLst>
-              <a:ext uri="{FF2B5EF4-FFF2-40B4-BE49-F238E27FC236}">
-                <a16:creationId xmlns:a16="http://schemas.microsoft.com/office/drawing/2014/main" id="{160FD09B-1A7E-D993-A4D5-588CD9B5E5B0}"/>
-              </a:ext>
-            </a:extLst>
-          </p:cNvPr>
-          <p:cNvSpPr>
-            <a:spLocks noGrp="1"/>
-          </p:cNvSpPr>
-          <p:nvPr>
-            <p:ph type="title"/>
-          </p:nvPr>
-        </p:nvSpPr>
-        <p:spPr/>
-        <p:txBody>
-          <a:bodyPr/>
-          <a:lstStyle/>
-          <a:p>
-            <a:r>
-              <a:rPr lang="en-US" dirty="0"/>
-              <a:t>Elasticity summaries</a:t>
-            </a:r>
-          </a:p>
-        </p:txBody>
-      </p:sp>
-      <p:pic>
-        <p:nvPicPr>
-          <p:cNvPr id="2050" name="Picture 2">
-            <a:extLst>
-              <a:ext uri="{FF2B5EF4-FFF2-40B4-BE49-F238E27FC236}">
-                <a16:creationId xmlns:a16="http://schemas.microsoft.com/office/drawing/2014/main" id="{8CC92AE5-9BE4-E265-4E82-07BF155D75C0}"/>
-              </a:ext>
-            </a:extLst>
-          </p:cNvPr>
-          <p:cNvPicPr>
-            <a:picLocks noGrp="1" noChangeAspect="1" noChangeArrowheads="1"/>
-          </p:cNvPicPr>
-          <p:nvPr>
-            <p:ph sz="half" idx="1"/>
-          </p:nvPr>
-        </p:nvPicPr>
-        <p:blipFill>
-          <a:blip r:embed="rId2" cstate="print">
-            <a:extLst>
-              <a:ext uri="{28A0092B-C50C-407E-A947-70E740481C1C}">
-                <a14:useLocalDpi xmlns:a14="http://schemas.microsoft.com/office/drawing/2010/main" val="0"/>
-              </a:ext>
-            </a:extLst>
-          </a:blip>
-          <a:srcRect/>
-          <a:stretch>
-            <a:fillRect/>
-          </a:stretch>
-        </p:blipFill>
-        <p:spPr bwMode="auto">
-          <a:xfrm>
-            <a:off x="240955" y="1828800"/>
-            <a:ext cx="4267202" cy="3048000"/>
-          </a:xfrm>
-          <a:prstGeom prst="rect">
-            <a:avLst/>
-          </a:prstGeom>
-          <a:noFill/>
-          <a:extLst>
-            <a:ext uri="{909E8E84-426E-40DD-AFC4-6F175D3DCCD1}">
-              <a14:hiddenFill xmlns:a14="http://schemas.microsoft.com/office/drawing/2010/main">
-                <a:solidFill>
-                  <a:srgbClr val="FFFFFF"/>
-                </a:solidFill>
-              </a14:hiddenFill>
-            </a:ext>
-          </a:extLst>
-        </p:spPr>
-      </p:pic>
-      <p:pic>
-        <p:nvPicPr>
-          <p:cNvPr id="2052" name="Picture 4">
-            <a:extLst>
-              <a:ext uri="{FF2B5EF4-FFF2-40B4-BE49-F238E27FC236}">
-                <a16:creationId xmlns:a16="http://schemas.microsoft.com/office/drawing/2014/main" id="{F98436FA-9E97-BDDE-1629-AC30B7D1F140}"/>
-              </a:ext>
-            </a:extLst>
-          </p:cNvPr>
-          <p:cNvPicPr>
-            <a:picLocks noChangeAspect="1" noChangeArrowheads="1"/>
-          </p:cNvPicPr>
-          <p:nvPr/>
-        </p:nvPicPr>
-        <p:blipFill>
-          <a:blip r:embed="rId3" cstate="print">
-            <a:extLst>
-              <a:ext uri="{28A0092B-C50C-407E-A947-70E740481C1C}">
-                <a14:useLocalDpi xmlns:a14="http://schemas.microsoft.com/office/drawing/2010/main" val="0"/>
-              </a:ext>
-            </a:extLst>
-          </a:blip>
-          <a:srcRect/>
-          <a:stretch>
-            <a:fillRect/>
-          </a:stretch>
-        </p:blipFill>
-        <p:spPr bwMode="auto">
-          <a:xfrm>
-            <a:off x="4653906" y="1770288"/>
-            <a:ext cx="4267496" cy="3048000"/>
-          </a:xfrm>
-          <a:prstGeom prst="rect">
-            <a:avLst/>
-          </a:prstGeom>
-          <a:noFill/>
-          <a:extLst>
-            <a:ext uri="{909E8E84-426E-40DD-AFC4-6F175D3DCCD1}">
-              <a14:hiddenFill xmlns:a14="http://schemas.microsoft.com/office/drawing/2010/main">
-                <a:solidFill>
-                  <a:srgbClr val="FFFFFF"/>
-                </a:solidFill>
-              </a14:hiddenFill>
-            </a:ext>
-          </a:extLst>
-        </p:spPr>
-      </p:pic>
-      <p:sp>
-        <p:nvSpPr>
-          <p:cNvPr id="5" name="TextBox 4">
-            <a:extLst>
-              <a:ext uri="{FF2B5EF4-FFF2-40B4-BE49-F238E27FC236}">
-                <a16:creationId xmlns:a16="http://schemas.microsoft.com/office/drawing/2014/main" id="{61BA6A5A-F823-538A-75E9-99400B1CCA1C}"/>
-              </a:ext>
-            </a:extLst>
-          </p:cNvPr>
-          <p:cNvSpPr txBox="1"/>
-          <p:nvPr/>
-        </p:nvSpPr>
-        <p:spPr>
-          <a:xfrm>
-            <a:off x="914400" y="5486400"/>
-            <a:ext cx="7086600" cy="646331"/>
-          </a:xfrm>
-          <a:prstGeom prst="rect">
-            <a:avLst/>
-          </a:prstGeom>
-          <a:noFill/>
-        </p:spPr>
-        <p:txBody>
-          <a:bodyPr wrap="square" rtlCol="0">
-            <a:spAutoFit/>
-          </a:bodyPr>
-          <a:lstStyle/>
-          <a:p>
-            <a:r>
-              <a:rPr lang="en-US" dirty="0"/>
-              <a:t>Young animals are more important</a:t>
-            </a:r>
-          </a:p>
-          <a:p>
-            <a:r>
-              <a:rPr lang="en-US" dirty="0"/>
-              <a:t>For every age, reproduction matters more than survival</a:t>
-            </a:r>
-          </a:p>
-        </p:txBody>
-      </p:sp>
-    </p:spTree>
-    <p:extLst>
-      <p:ext uri="{BB962C8B-B14F-4D97-AF65-F5344CB8AC3E}">
-        <p14:creationId xmlns:p14="http://schemas.microsoft.com/office/powerpoint/2010/main" val="3856793448"/>
-      </p:ext>
-    </p:extLst>
-  </p:cSld>
-  <p:clrMapOvr>
-    <a:masterClrMapping/>
-  </p:clrMapOvr>
-</p:sld>
-</file>
-
-<file path=ppt/slides/slide31.xml><?xml version="1.0" encoding="utf-8"?>
-<p:sld xmlns:a="http://schemas.openxmlformats.org/drawingml/2006/main" xmlns:r="http://schemas.openxmlformats.org/officeDocument/2006/relationships" xmlns:p="http://schemas.openxmlformats.org/presentationml/2006/main">
-  <p:cSld>
-    <p:spTree>
-      <p:nvGrpSpPr>
-        <p:cNvPr id="1" name=""/>
-        <p:cNvGrpSpPr/>
-        <p:nvPr/>
-      </p:nvGrpSpPr>
-      <p:grpSpPr>
-        <a:xfrm>
-          <a:off x="0" y="0"/>
-          <a:ext cx="0" cy="0"/>
-          <a:chOff x="0" y="0"/>
-          <a:chExt cx="0" cy="0"/>
-        </a:xfrm>
-      </p:grpSpPr>
-      <p:sp>
-        <p:nvSpPr>
-          <p:cNvPr id="2" name="Title 1">
-            <a:extLst>
-              <a:ext uri="{FF2B5EF4-FFF2-40B4-BE49-F238E27FC236}">
-                <a16:creationId xmlns:a16="http://schemas.microsoft.com/office/drawing/2014/main" id="{C4CF5AD8-E80E-DB4E-814C-71568956FC5D}"/>
-              </a:ext>
-            </a:extLst>
-          </p:cNvPr>
-          <p:cNvSpPr>
-            <a:spLocks noGrp="1"/>
-          </p:cNvSpPr>
-          <p:nvPr>
-            <p:ph type="title"/>
-          </p:nvPr>
-        </p:nvSpPr>
-        <p:spPr/>
-        <p:txBody>
-          <a:bodyPr/>
-          <a:lstStyle/>
-          <a:p>
-            <a:r>
-              <a:rPr lang="en-US" dirty="0"/>
-              <a:t>Adding uncertainty and variability</a:t>
-            </a:r>
-          </a:p>
-        </p:txBody>
-      </p:sp>
-      <p:sp>
-        <p:nvSpPr>
-          <p:cNvPr id="3" name="Content Placeholder 2">
-            <a:extLst>
-              <a:ext uri="{FF2B5EF4-FFF2-40B4-BE49-F238E27FC236}">
-                <a16:creationId xmlns:a16="http://schemas.microsoft.com/office/drawing/2014/main" id="{00D3D96E-424F-981A-7890-B0052A9606C3}"/>
-              </a:ext>
-            </a:extLst>
-          </p:cNvPr>
-          <p:cNvSpPr>
-            <a:spLocks noGrp="1"/>
-          </p:cNvSpPr>
-          <p:nvPr>
-            <p:ph sz="half" idx="1"/>
-          </p:nvPr>
-        </p:nvSpPr>
-        <p:spPr>
-          <a:xfrm>
-            <a:off x="457200" y="1600200"/>
-            <a:ext cx="7772400" cy="4525963"/>
-          </a:xfrm>
-        </p:spPr>
-        <p:txBody>
-          <a:bodyPr/>
-          <a:lstStyle/>
-          <a:p>
-            <a:r>
-              <a:rPr lang="en-US" dirty="0"/>
-              <a:t>Estimates of lx and mx are not known without error</a:t>
-            </a:r>
-          </a:p>
-          <a:p>
-            <a:r>
-              <a:rPr lang="en-US" dirty="0"/>
-              <a:t>They are often calculated from models fitted to data for maturity at size, etc. </a:t>
-            </a:r>
-          </a:p>
-          <a:p>
-            <a:r>
-              <a:rPr lang="en-US" dirty="0"/>
-              <a:t>Can add uncertainty to the estimates and get confidence intervals. </a:t>
-            </a:r>
-          </a:p>
-        </p:txBody>
-      </p:sp>
-    </p:spTree>
-    <p:extLst>
-      <p:ext uri="{BB962C8B-B14F-4D97-AF65-F5344CB8AC3E}">
-        <p14:creationId xmlns:p14="http://schemas.microsoft.com/office/powerpoint/2010/main" val="618131365"/>
-      </p:ext>
-    </p:extLst>
-  </p:cSld>
-  <p:clrMapOvr>
-    <a:masterClrMapping/>
-  </p:clrMapOvr>
-</p:sld>
-</file>
-
-<file path=ppt/slides/slide32.xml><?xml version="1.0" encoding="utf-8"?>
-<p:sld xmlns:a="http://schemas.openxmlformats.org/drawingml/2006/main" xmlns:r="http://schemas.openxmlformats.org/officeDocument/2006/relationships" xmlns:p="http://schemas.openxmlformats.org/presentationml/2006/main">
-  <p:cSld>
-    <p:spTree>
-      <p:nvGrpSpPr>
-        <p:cNvPr id="1" name=""/>
-        <p:cNvGrpSpPr/>
-        <p:nvPr/>
-      </p:nvGrpSpPr>
-      <p:grpSpPr>
-        <a:xfrm>
-          <a:off x="0" y="0"/>
-          <a:ext cx="0" cy="0"/>
-          <a:chOff x="0" y="0"/>
-          <a:chExt cx="0" cy="0"/>
-        </a:xfrm>
-      </p:grpSpPr>
-      <p:sp>
-        <p:nvSpPr>
-          <p:cNvPr id="2" name="Title 1">
-            <a:extLst>
-              <a:ext uri="{FF2B5EF4-FFF2-40B4-BE49-F238E27FC236}">
-                <a16:creationId xmlns:a16="http://schemas.microsoft.com/office/drawing/2014/main" id="{460A517B-7A5C-EB50-B068-8302EBB815B2}"/>
-              </a:ext>
-            </a:extLst>
-          </p:cNvPr>
-          <p:cNvSpPr>
-            <a:spLocks noGrp="1"/>
-          </p:cNvSpPr>
-          <p:nvPr>
-            <p:ph type="title"/>
-          </p:nvPr>
-        </p:nvSpPr>
-        <p:spPr/>
-        <p:txBody>
-          <a:bodyPr/>
-          <a:lstStyle/>
-          <a:p>
-            <a:r>
-              <a:rPr lang="en-US" dirty="0"/>
-              <a:t>Monte Carlo simulation</a:t>
-            </a:r>
-          </a:p>
-        </p:txBody>
-      </p:sp>
-      <p:sp>
-        <p:nvSpPr>
-          <p:cNvPr id="3" name="Content Placeholder 2">
-            <a:extLst>
-              <a:ext uri="{FF2B5EF4-FFF2-40B4-BE49-F238E27FC236}">
-                <a16:creationId xmlns:a16="http://schemas.microsoft.com/office/drawing/2014/main" id="{43BA8036-55BC-2E0B-71DE-6E57360F5A27}"/>
-              </a:ext>
-            </a:extLst>
-          </p:cNvPr>
-          <p:cNvSpPr>
-            <a:spLocks noGrp="1"/>
-          </p:cNvSpPr>
-          <p:nvPr>
-            <p:ph idx="1"/>
-          </p:nvPr>
-        </p:nvSpPr>
-        <p:spPr/>
-        <p:txBody>
-          <a:bodyPr/>
-          <a:lstStyle/>
-          <a:p>
-            <a:r>
-              <a:rPr lang="en-US" dirty="0"/>
-              <a:t>Define all the relevant parameters with a statistical distribution</a:t>
-            </a:r>
-          </a:p>
-          <a:p>
-            <a:r>
-              <a:rPr lang="en-US" dirty="0"/>
-              <a:t>Draw random values from each distribution</a:t>
-            </a:r>
-          </a:p>
-          <a:p>
-            <a:r>
-              <a:rPr lang="en-US" dirty="0"/>
-              <a:t>Recalculate lambda, R0, etc. </a:t>
-            </a:r>
-          </a:p>
-          <a:p>
-            <a:r>
-              <a:rPr lang="en-US" dirty="0"/>
-              <a:t>Calculate mean, </a:t>
-            </a:r>
-            <a:r>
-              <a:rPr lang="en-US" dirty="0" err="1"/>
-              <a:t>sd</a:t>
-            </a:r>
-            <a:r>
-              <a:rPr lang="en-US" dirty="0"/>
-              <a:t>, quantiles to get confidence intervals</a:t>
-            </a:r>
-          </a:p>
-        </p:txBody>
-      </p:sp>
-    </p:spTree>
-    <p:extLst>
-      <p:ext uri="{BB962C8B-B14F-4D97-AF65-F5344CB8AC3E}">
-        <p14:creationId xmlns:p14="http://schemas.microsoft.com/office/powerpoint/2010/main" val="880486333"/>
-      </p:ext>
-    </p:extLst>
-  </p:cSld>
-  <p:clrMapOvr>
-    <a:masterClrMapping/>
-  </p:clrMapOvr>
-</p:sld>
-</file>
-
-<file path=ppt/slides/slide33.xml><?xml version="1.0" encoding="utf-8"?>
-<p:sld xmlns:a="http://schemas.openxmlformats.org/drawingml/2006/main" xmlns:r="http://schemas.openxmlformats.org/officeDocument/2006/relationships" xmlns:p="http://schemas.openxmlformats.org/presentationml/2006/main">
-  <p:cSld>
-    <p:spTree>
-      <p:nvGrpSpPr>
-        <p:cNvPr id="1" name=""/>
-        <p:cNvGrpSpPr/>
-        <p:nvPr/>
-      </p:nvGrpSpPr>
-      <p:grpSpPr>
-        <a:xfrm>
-          <a:off x="0" y="0"/>
-          <a:ext cx="0" cy="0"/>
-          <a:chOff x="0" y="0"/>
-          <a:chExt cx="0" cy="0"/>
-        </a:xfrm>
-      </p:grpSpPr>
-      <p:sp>
-        <p:nvSpPr>
-          <p:cNvPr id="2" name="Title 1">
-            <a:extLst>
-              <a:ext uri="{FF2B5EF4-FFF2-40B4-BE49-F238E27FC236}">
-                <a16:creationId xmlns:a16="http://schemas.microsoft.com/office/drawing/2014/main" id="{095714C9-2830-8F52-48E1-0DE77A33E6C0}"/>
-              </a:ext>
-            </a:extLst>
-          </p:cNvPr>
-          <p:cNvSpPr>
-            <a:spLocks noGrp="1"/>
-          </p:cNvSpPr>
-          <p:nvPr>
-            <p:ph type="title"/>
-          </p:nvPr>
-        </p:nvSpPr>
-        <p:spPr/>
-        <p:txBody>
-          <a:bodyPr/>
-          <a:lstStyle/>
-          <a:p>
-            <a:r>
-              <a:rPr lang="en-US" dirty="0"/>
-              <a:t>Squirrel example</a:t>
-            </a:r>
-          </a:p>
-        </p:txBody>
-      </p:sp>
-      <p:sp>
-        <p:nvSpPr>
-          <p:cNvPr id="3" name="Content Placeholder 2">
-            <a:extLst>
-              <a:ext uri="{FF2B5EF4-FFF2-40B4-BE49-F238E27FC236}">
-                <a16:creationId xmlns:a16="http://schemas.microsoft.com/office/drawing/2014/main" id="{F899C2D4-C910-A3FA-78EC-E5C64BEF7BD8}"/>
-              </a:ext>
-            </a:extLst>
-          </p:cNvPr>
-          <p:cNvSpPr>
-            <a:spLocks noGrp="1"/>
-          </p:cNvSpPr>
-          <p:nvPr>
-            <p:ph idx="1"/>
-          </p:nvPr>
-        </p:nvSpPr>
-        <p:spPr/>
-        <p:txBody>
-          <a:bodyPr/>
-          <a:lstStyle/>
-          <a:p>
-            <a:r>
-              <a:rPr lang="en-US" dirty="0"/>
-              <a:t>Add a CV of 0.02 to all lx values, and 0.05 to mx values, with normal error</a:t>
-            </a:r>
-          </a:p>
-          <a:p>
-            <a:r>
-              <a:rPr lang="en-US" dirty="0"/>
-              <a:t>Results, 95% confidence interval of lambda is 0.95 to 1.14. </a:t>
-            </a:r>
-          </a:p>
-          <a:p>
-            <a:endParaRPr lang="en-US" dirty="0"/>
-          </a:p>
-          <a:p>
-            <a:endParaRPr lang="en-US" dirty="0"/>
-          </a:p>
-        </p:txBody>
-      </p:sp>
-      <p:pic>
-        <p:nvPicPr>
-          <p:cNvPr id="3076" name="Picture 4">
-            <a:extLst>
-              <a:ext uri="{FF2B5EF4-FFF2-40B4-BE49-F238E27FC236}">
-                <a16:creationId xmlns:a16="http://schemas.microsoft.com/office/drawing/2014/main" id="{28D90E2E-B9AD-D77F-1FA8-452D29E07BEA}"/>
-              </a:ext>
-            </a:extLst>
-          </p:cNvPr>
-          <p:cNvPicPr>
-            <a:picLocks noChangeAspect="1" noChangeArrowheads="1"/>
-          </p:cNvPicPr>
-          <p:nvPr/>
-        </p:nvPicPr>
-        <p:blipFill>
-          <a:blip r:embed="rId2" cstate="print">
-            <a:extLst>
-              <a:ext uri="{28A0092B-C50C-407E-A947-70E740481C1C}">
-                <a14:useLocalDpi xmlns:a14="http://schemas.microsoft.com/office/drawing/2010/main" val="0"/>
-              </a:ext>
-            </a:extLst>
-          </a:blip>
-          <a:srcRect/>
-          <a:stretch>
-            <a:fillRect/>
-          </a:stretch>
-        </p:blipFill>
-        <p:spPr bwMode="auto">
-          <a:xfrm>
-            <a:off x="609600" y="3352800"/>
-            <a:ext cx="4724400" cy="3374337"/>
-          </a:xfrm>
-          <a:prstGeom prst="rect">
-            <a:avLst/>
-          </a:prstGeom>
-          <a:noFill/>
-          <a:extLst>
-            <a:ext uri="{909E8E84-426E-40DD-AFC4-6F175D3DCCD1}">
-              <a14:hiddenFill xmlns:a14="http://schemas.microsoft.com/office/drawing/2010/main">
-                <a:solidFill>
-                  <a:srgbClr val="FFFFFF"/>
-                </a:solidFill>
-              </a14:hiddenFill>
-            </a:ext>
-          </a:extLst>
-        </p:spPr>
-      </p:pic>
-    </p:spTree>
-    <p:extLst>
-      <p:ext uri="{BB962C8B-B14F-4D97-AF65-F5344CB8AC3E}">
-        <p14:creationId xmlns:p14="http://schemas.microsoft.com/office/powerpoint/2010/main" val="3579452546"/>
-      </p:ext>
-    </p:extLst>
-  </p:cSld>
-  <p:clrMapOvr>
-    <a:masterClrMapping/>
-  </p:clrMapOvr>
-</p:sld>
-</file>
-
-<file path=ppt/slides/slide34.xml><?xml version="1.0" encoding="utf-8"?>
+<file path=ppt/slides/slide35.xml><?xml version="1.0" encoding="utf-8"?>
 <p:sld xmlns:a="http://schemas.openxmlformats.org/drawingml/2006/main" xmlns:r="http://schemas.openxmlformats.org/officeDocument/2006/relationships" xmlns:p="http://schemas.openxmlformats.org/presentationml/2006/main">
   <p:cSld>
     <p:spTree>
@@ -19694,122 +19935,237 @@
           </a:p>
         </p:txBody>
       </p:sp>
-      <p:sp>
-        <p:nvSpPr>
-          <p:cNvPr id="3" name="Content Placeholder 2">
-            <a:extLst>
-              <a:ext uri="{FF2B5EF4-FFF2-40B4-BE49-F238E27FC236}">
-                <a16:creationId xmlns:a16="http://schemas.microsoft.com/office/drawing/2014/main" id="{456E98AC-5FD0-2D5E-89F6-56D525EADF12}"/>
-              </a:ext>
-            </a:extLst>
-          </p:cNvPr>
-          <p:cNvSpPr>
-            <a:spLocks noGrp="1"/>
-          </p:cNvSpPr>
-          <p:nvPr>
-            <p:ph idx="1"/>
-          </p:nvPr>
-        </p:nvSpPr>
-        <p:spPr/>
-        <p:txBody>
-          <a:bodyPr/>
-          <a:lstStyle/>
-          <a:p>
-            <a:r>
-              <a:rPr lang="en-US" dirty="0"/>
-              <a:t>In demographic analysis, parameters are called</a:t>
-            </a:r>
-          </a:p>
-          <a:p>
-            <a:pPr marL="0" indent="0">
-              <a:buNone/>
-            </a:pPr>
-            <a:r>
-              <a:rPr lang="en-US" dirty="0"/>
-              <a:t>x for age or stage</a:t>
-            </a:r>
-          </a:p>
-          <a:p>
-            <a:pPr marL="0" indent="0">
-              <a:buNone/>
-            </a:pPr>
-            <a:r>
-              <a:rPr lang="en-US" dirty="0"/>
-              <a:t>l</a:t>
-            </a:r>
-            <a:r>
-              <a:rPr lang="en-US" baseline="-25000" dirty="0"/>
-              <a:t>x</a:t>
-            </a:r>
-            <a:r>
-              <a:rPr lang="en-US" dirty="0"/>
-              <a:t> is the fraction of females surviving to the beginning of x  (lowercase ell)</a:t>
-            </a:r>
-          </a:p>
-          <a:p>
-            <a:pPr marL="0" indent="0">
-              <a:buNone/>
-            </a:pPr>
-            <a:r>
-              <a:rPr lang="en-US" dirty="0"/>
-              <a:t>m</a:t>
-            </a:r>
-            <a:r>
-              <a:rPr lang="en-US" baseline="-25000" dirty="0"/>
-              <a:t>x</a:t>
-            </a:r>
-            <a:r>
-              <a:rPr lang="en-US" dirty="0"/>
-              <a:t> is production of female offspring per female</a:t>
-            </a:r>
-          </a:p>
-          <a:p>
-            <a:pPr marL="0" indent="0">
-              <a:buNone/>
-            </a:pPr>
-            <a:r>
-              <a:rPr lang="en-US" dirty="0" err="1"/>
-              <a:t>Fecundity</a:t>
-            </a:r>
-            <a:r>
-              <a:rPr lang="en-US" baseline="-25000" dirty="0" err="1"/>
-              <a:t>x</a:t>
-            </a:r>
-            <a:r>
-              <a:rPr lang="en-US" dirty="0"/>
-              <a:t> = l</a:t>
-            </a:r>
-            <a:r>
-              <a:rPr lang="en-US" baseline="-25000" dirty="0"/>
-              <a:t>x </a:t>
-            </a:r>
-            <a:r>
-              <a:rPr lang="en-US" dirty="0"/>
-              <a:t>m</a:t>
-            </a:r>
-            <a:r>
-              <a:rPr lang="en-US" baseline="-25000" dirty="0"/>
-              <a:t>x</a:t>
-            </a:r>
-            <a:r>
-              <a:rPr lang="en-US" dirty="0"/>
-              <a:t> </a:t>
-            </a:r>
-          </a:p>
-          <a:p>
-            <a:pPr marL="0" indent="0">
-              <a:buNone/>
-            </a:pPr>
-            <a:endParaRPr lang="en-US" dirty="0"/>
-          </a:p>
-          <a:p>
-            <a:pPr marL="0" indent="0">
-              <a:buNone/>
-            </a:pPr>
-            <a:endParaRPr lang="en-US" dirty="0"/>
-          </a:p>
-        </p:txBody>
-      </p:sp>
+      <mc:AlternateContent xmlns:mc="http://schemas.openxmlformats.org/markup-compatibility/2006" xmlns:a14="http://schemas.microsoft.com/office/drawing/2010/main">
+        <mc:Choice Requires="a14">
+          <p:sp>
+            <p:nvSpPr>
+              <p:cNvPr id="3" name="Content Placeholder 2">
+                <a:extLst>
+                  <a:ext uri="{FF2B5EF4-FFF2-40B4-BE49-F238E27FC236}">
+                    <a16:creationId xmlns:a16="http://schemas.microsoft.com/office/drawing/2014/main" id="{456E98AC-5FD0-2D5E-89F6-56D525EADF12}"/>
+                  </a:ext>
+                </a:extLst>
+              </p:cNvPr>
+              <p:cNvSpPr>
+                <a:spLocks noGrp="1"/>
+              </p:cNvSpPr>
+              <p:nvPr>
+                <p:ph idx="1"/>
+              </p:nvPr>
+            </p:nvSpPr>
+            <p:spPr/>
+            <p:txBody>
+              <a:bodyPr/>
+              <a:lstStyle/>
+              <a:p>
+                <a:r>
+                  <a:rPr lang="en-US" dirty="0"/>
+                  <a:t>In demographic analysis, parameters are called</a:t>
+                </a:r>
+              </a:p>
+              <a:p>
+                <a:pPr marL="0" indent="0">
+                  <a:buNone/>
+                </a:pPr>
+                <a:r>
+                  <a:rPr lang="en-US" dirty="0"/>
+                  <a:t>x for age or stage</a:t>
+                </a:r>
+              </a:p>
+              <a:p>
+                <a:pPr marL="0" indent="0">
+                  <a:buNone/>
+                </a:pPr>
+                <a:r>
+                  <a:rPr lang="en-US" i="1" dirty="0">
+                    <a:latin typeface="Times New Roman" panose="02020603050405020304" pitchFamily="18" charset="0"/>
+                    <a:cs typeface="Times New Roman" panose="02020603050405020304" pitchFamily="18" charset="0"/>
+                  </a:rPr>
+                  <a:t>l</a:t>
+                </a:r>
+                <a:r>
+                  <a:rPr lang="en-US" i="1" baseline="-25000" dirty="0">
+                    <a:latin typeface="Times New Roman" panose="02020603050405020304" pitchFamily="18" charset="0"/>
+                    <a:cs typeface="Times New Roman" panose="02020603050405020304" pitchFamily="18" charset="0"/>
+                  </a:rPr>
+                  <a:t>x</a:t>
+                </a:r>
+                <a:r>
+                  <a:rPr lang="en-US" dirty="0"/>
+                  <a:t> is the fraction of females surviving to the beginning of x  (lowercase ell)</a:t>
+                </a:r>
+              </a:p>
+              <a:p>
+                <a:pPr marL="0" indent="0">
+                  <a:buNone/>
+                </a:pPr>
+                <a:r>
+                  <a:rPr lang="en-US" i="1" dirty="0"/>
+                  <a:t>m</a:t>
+                </a:r>
+                <a:r>
+                  <a:rPr lang="en-US" i="1" baseline="-25000" dirty="0"/>
+                  <a:t>x</a:t>
+                </a:r>
+                <a:r>
+                  <a:rPr lang="en-US" dirty="0"/>
+                  <a:t> is production of female offspring per female</a:t>
+                </a:r>
+              </a:p>
+              <a:p>
+                <a:pPr marL="0" indent="0">
+                  <a:buNone/>
+                </a:pPr>
+                <a14:m>
+                  <m:oMathPara xmlns:m="http://schemas.openxmlformats.org/officeDocument/2006/math">
+                    <m:oMath>
+                      <m:r>
+                        <a:rPr lang="en-US" b="0" i="1" smtClean="0">
+                          <a:latin typeface="Cambria Math" panose="02040503050406030204" pitchFamily="18" charset="0"/>
+                        </a:rPr>
+                        <m:t>𝐹𝑒𝑐𝑢𝑛𝑑𝑖𝑡</m:t>
+                      </m:r>
+                      <m:sSub>
+                        <m:sSubPr>
+                          <m:ctrlPr>
+                            <a:rPr lang="en-US" b="0" i="1" smtClean="0">
+                              <a:latin typeface="Cambria Math" panose="02040503050406030204" pitchFamily="18" charset="0"/>
+                            </a:rPr>
+                          </m:ctrlPr>
+                        </m:sSubPr>
+                        <m:e>
+                          <m:r>
+                            <a:rPr lang="en-US" b="0" i="1" smtClean="0">
+                              <a:latin typeface="Cambria Math" panose="02040503050406030204" pitchFamily="18" charset="0"/>
+                            </a:rPr>
+                            <m:t>𝑦</m:t>
+                          </m:r>
+                        </m:e>
+                        <m:sub>
+                          <m:r>
+                            <a:rPr lang="en-US" b="0" i="1" smtClean="0">
+                              <a:latin typeface="Cambria Math" panose="02040503050406030204" pitchFamily="18" charset="0"/>
+                            </a:rPr>
+                            <m:t>𝑥</m:t>
+                          </m:r>
+                        </m:sub>
+                      </m:sSub>
+                      <m:r>
+                        <a:rPr lang="en-US" b="0" i="1" smtClean="0">
+                          <a:latin typeface="Cambria Math" panose="02040503050406030204" pitchFamily="18" charset="0"/>
+                        </a:rPr>
+                        <m:t>=</m:t>
+                      </m:r>
+                      <m:sSub>
+                        <m:sSubPr>
+                          <m:ctrlPr>
+                            <a:rPr lang="en-US" b="0" i="1" smtClean="0">
+                              <a:latin typeface="Cambria Math" panose="02040503050406030204" pitchFamily="18" charset="0"/>
+                            </a:rPr>
+                          </m:ctrlPr>
+                        </m:sSubPr>
+                        <m:e>
+                          <m:r>
+                            <a:rPr lang="en-US" b="0" i="1" smtClean="0">
+                              <a:latin typeface="Cambria Math" panose="02040503050406030204" pitchFamily="18" charset="0"/>
+                            </a:rPr>
+                            <m:t>𝑙</m:t>
+                          </m:r>
+                        </m:e>
+                        <m:sub>
+                          <m:r>
+                            <a:rPr lang="en-US" b="0" i="1" smtClean="0">
+                              <a:latin typeface="Cambria Math" panose="02040503050406030204" pitchFamily="18" charset="0"/>
+                            </a:rPr>
+                            <m:t>𝑥</m:t>
+                          </m:r>
+                        </m:sub>
+                      </m:sSub>
+                      <m:sSub>
+                        <m:sSubPr>
+                          <m:ctrlPr>
+                            <a:rPr lang="en-US" b="0" i="1" smtClean="0">
+                              <a:latin typeface="Cambria Math" panose="02040503050406030204" pitchFamily="18" charset="0"/>
+                            </a:rPr>
+                          </m:ctrlPr>
+                        </m:sSubPr>
+                        <m:e>
+                          <m:r>
+                            <a:rPr lang="en-US" b="0" i="1" smtClean="0">
+                              <a:latin typeface="Cambria Math" panose="02040503050406030204" pitchFamily="18" charset="0"/>
+                            </a:rPr>
+                            <m:t>𝑚</m:t>
+                          </m:r>
+                        </m:e>
+                        <m:sub>
+                          <m:r>
+                            <a:rPr lang="en-US" b="0" i="1" smtClean="0">
+                              <a:latin typeface="Cambria Math" panose="02040503050406030204" pitchFamily="18" charset="0"/>
+                            </a:rPr>
+                            <m:t>𝑥</m:t>
+                          </m:r>
+                        </m:sub>
+                      </m:sSub>
+                    </m:oMath>
+                  </m:oMathPara>
+                </a14:m>
+                <a:endParaRPr lang="en-US" dirty="0"/>
+              </a:p>
+              <a:p>
+                <a:pPr marL="0" indent="0">
+                  <a:buNone/>
+                </a:pPr>
+                <a:endParaRPr lang="en-US" dirty="0"/>
+              </a:p>
+              <a:p>
+                <a:pPr marL="0" indent="0">
+                  <a:buNone/>
+                </a:pPr>
+                <a:endParaRPr lang="en-US" dirty="0"/>
+              </a:p>
+            </p:txBody>
+          </p:sp>
+        </mc:Choice>
+        <mc:Fallback xmlns="">
+          <p:sp>
+            <p:nvSpPr>
+              <p:cNvPr id="3" name="Content Placeholder 2">
+                <a:extLst>
+                  <a:ext uri="{FF2B5EF4-FFF2-40B4-BE49-F238E27FC236}">
+                    <a16:creationId xmlns:a16="http://schemas.microsoft.com/office/drawing/2014/main" id="{456E98AC-5FD0-2D5E-89F6-56D525EADF12}"/>
+                  </a:ext>
+                </a:extLst>
+              </p:cNvPr>
+              <p:cNvSpPr>
+                <a:spLocks noGrp="1" noRot="1" noChangeAspect="1" noMove="1" noResize="1" noEditPoints="1" noAdjustHandles="1" noChangeArrowheads="1" noChangeShapeType="1" noTextEdit="1"/>
+              </p:cNvSpPr>
+              <p:nvPr>
+                <p:ph idx="1"/>
+              </p:nvPr>
+            </p:nvSpPr>
+            <p:spPr>
+              <a:blipFill>
+                <a:blip r:embed="rId2"/>
+                <a:stretch>
+                  <a:fillRect l="-1704" t="-1544"/>
+                </a:stretch>
+              </a:blipFill>
+            </p:spPr>
+            <p:txBody>
+              <a:bodyPr/>
+              <a:lstStyle/>
+              <a:p>
+                <a:r>
+                  <a:rPr lang="en-US">
+                    <a:noFill/>
+                  </a:rPr>
+                  <a:t> </a:t>
+                </a:r>
+              </a:p>
+            </p:txBody>
+          </p:sp>
+        </mc:Fallback>
+      </mc:AlternateContent>
       <p:sp>
         <p:nvSpPr>
           <p:cNvPr id="5" name="TextBox 4">

--- a/Module6_demographic/6.LifeTablesLeslieMatrices.pptx
+++ b/Module6_demographic/6.LifeTablesLeslieMatrices.pptx
@@ -205,6 +205,35 @@
     </p:ext>
   </p:extLst>
 </p:presentation>
+</file>
+
+<file path=ppt/changesInfos/changesInfo1.xml><?xml version="1.0" encoding="utf-8"?>
+<pc:chgInfo xmlns:a="http://schemas.openxmlformats.org/drawingml/2006/main" xmlns:r="http://schemas.openxmlformats.org/officeDocument/2006/relationships" xmlns:ac="http://schemas.microsoft.com/office/drawing/2013/main/command" xmlns:pc="http://schemas.microsoft.com/office/powerpoint/2013/main/command">
+  <pc:docChgLst>
+    <pc:chgData name="Babcock, Elizabeth A" userId="02b9ec88-22ae-4f16-80a8-fd6316399148" providerId="ADAL" clId="{CFAE71B8-9659-41D1-BF87-D488A69E897D}"/>
+    <pc:docChg chg="modSld">
+      <pc:chgData name="Babcock, Elizabeth A" userId="02b9ec88-22ae-4f16-80a8-fd6316399148" providerId="ADAL" clId="{CFAE71B8-9659-41D1-BF87-D488A69E897D}" dt="2026-09-08T17:27:12.400" v="0" actId="20577"/>
+      <pc:docMkLst>
+        <pc:docMk/>
+      </pc:docMkLst>
+      <pc:sldChg chg="modSp mod">
+        <pc:chgData name="Babcock, Elizabeth A" userId="02b9ec88-22ae-4f16-80a8-fd6316399148" providerId="ADAL" clId="{CFAE71B8-9659-41D1-BF87-D488A69E897D}" dt="2026-09-08T17:27:12.400" v="0" actId="20577"/>
+        <pc:sldMkLst>
+          <pc:docMk/>
+          <pc:sldMk cId="0" sldId="297"/>
+        </pc:sldMkLst>
+        <pc:spChg chg="mod">
+          <ac:chgData name="Babcock, Elizabeth A" userId="02b9ec88-22ae-4f16-80a8-fd6316399148" providerId="ADAL" clId="{CFAE71B8-9659-41D1-BF87-D488A69E897D}" dt="2026-09-08T17:27:12.400" v="0" actId="20577"/>
+          <ac:spMkLst>
+            <pc:docMk/>
+            <pc:sldMk cId="0" sldId="297"/>
+            <ac:spMk id="64516" creationId="{00000000-0000-0000-0000-000000000000}"/>
+          </ac:spMkLst>
+        </pc:spChg>
+      </pc:sldChg>
+    </pc:docChg>
+  </pc:docChgLst>
+</pc:chgInfo>
 </file>
 
 <file path=ppt/handoutMasters/handoutMaster1.xml><?xml version="1.0" encoding="utf-8"?>
@@ -5645,11 +5674,15 @@
               <a:t>MBE 713: Marine Population Dynamics</a:t>
             </a:r>
             <a:br>
+              <a:rPr lang="en-US" sz="3600"/>
+            </a:br>
+            <a:r>
+              <a:rPr lang="en-US" sz="3600"/>
+              <a:t>6: </a:t>
+            </a:r>
+            <a:r>
               <a:rPr lang="en-US" sz="3600" dirty="0"/>
-            </a:br>
-            <a:r>
-              <a:rPr lang="en-US" sz="3600" dirty="0"/>
-              <a:t>5: Life tables and Leslie matrices</a:t>
+              <a:t>Life tables and Leslie matrices</a:t>
             </a:r>
           </a:p>
         </p:txBody>
@@ -6312,7 +6345,10 @@
                 </a:pPr>
                 <a14:m>
                   <m:oMathPara xmlns:m="http://schemas.openxmlformats.org/officeDocument/2006/math">
-                    <m:oMath>
+                    <m:oMathParaPr>
+                      <m:jc m:val="centerGroup"/>
+                    </m:oMathParaPr>
+                    <m:oMath xmlns:m="http://schemas.openxmlformats.org/officeDocument/2006/math">
                       <m:sSub>
                         <m:sSubPr>
                           <m:ctrlPr>
@@ -6428,7 +6464,10 @@
                 </a:pPr>
                 <a14:m>
                   <m:oMathPara xmlns:m="http://schemas.openxmlformats.org/officeDocument/2006/math">
-                    <m:oMath>
+                    <m:oMathParaPr>
+                      <m:jc m:val="centerGroup"/>
+                    </m:oMathParaPr>
+                    <m:oMath xmlns:m="http://schemas.openxmlformats.org/officeDocument/2006/math">
                       <m:r>
                         <m:rPr>
                           <m:sty m:val="p"/>
@@ -6668,7 +6707,7 @@
                     <m:sSub>
                       <m:sSubPr>
                         <m:ctrlPr>
-                          <a:rPr lang="en-US" sz="2800" b="0" i="0" smtClean="0">
+                          <a:rPr lang="en-US" sz="2800" b="0" i="1" smtClean="0">
                             <a:latin typeface="Cambria Math" panose="02040503050406030204" pitchFamily="18" charset="0"/>
                           </a:rPr>
                         </m:ctrlPr>
@@ -6865,7 +6904,7 @@
                     <m:sSub>
                       <m:sSubPr>
                         <m:ctrlPr>
-                          <a:rPr lang="en-US" b="0">
+                          <a:rPr lang="en-US" b="0" i="1">
                             <a:latin typeface="Cambria Math" panose="02040503050406030204" pitchFamily="18" charset="0"/>
                           </a:rPr>
                         </m:ctrlPr>
@@ -20018,7 +20057,10 @@
                 </a:pPr>
                 <a14:m>
                   <m:oMathPara xmlns:m="http://schemas.openxmlformats.org/officeDocument/2006/math">
-                    <m:oMath>
+                    <m:oMathParaPr>
+                      <m:jc m:val="centerGroup"/>
+                    </m:oMathParaPr>
+                    <m:oMath xmlns:m="http://schemas.openxmlformats.org/officeDocument/2006/math">
                       <m:r>
                         <a:rPr lang="en-US" b="0" i="1" smtClean="0">
                           <a:latin typeface="Cambria Math" panose="02040503050406030204" pitchFamily="18" charset="0"/>

--- a/Module6_demographic/6.LifeTablesLeslieMatrices.pptx
+++ b/Module6_demographic/6.LifeTablesLeslieMatrices.pptx
@@ -5,10 +5,10 @@
     <p:sldMasterId id="2147483653" r:id="rId1"/>
   </p:sldMasterIdLst>
   <p:notesMasterIdLst>
-    <p:notesMasterId r:id="rId37"/>
+    <p:notesMasterId r:id="rId38"/>
   </p:notesMasterIdLst>
   <p:handoutMasterIdLst>
-    <p:handoutMasterId r:id="rId38"/>
+    <p:handoutMasterId r:id="rId39"/>
   </p:handoutMasterIdLst>
   <p:sldIdLst>
     <p:sldId id="297" r:id="rId2"/>
@@ -42,10 +42,11 @@
     <p:sldId id="330" r:id="rId30"/>
     <p:sldId id="332" r:id="rId31"/>
     <p:sldId id="333" r:id="rId32"/>
-    <p:sldId id="336" r:id="rId33"/>
-    <p:sldId id="324" r:id="rId34"/>
-    <p:sldId id="294" r:id="rId35"/>
-    <p:sldId id="337" r:id="rId36"/>
+    <p:sldId id="339" r:id="rId33"/>
+    <p:sldId id="336" r:id="rId34"/>
+    <p:sldId id="324" r:id="rId35"/>
+    <p:sldId id="294" r:id="rId36"/>
+    <p:sldId id="337" r:id="rId37"/>
   </p:sldIdLst>
   <p:sldSz cx="9144000" cy="6858000" type="screen4x3"/>
   <p:notesSz cx="7315200" cy="9601200"/>
@@ -207,12 +208,20 @@
 </p:presentation>
 </file>
 
+<file path=ppt/revisionInfo.xml><?xml version="1.0" encoding="utf-8"?>
+<p1510:revInfo xmlns:a="http://schemas.openxmlformats.org/drawingml/2006/main" xmlns:r="http://schemas.openxmlformats.org/officeDocument/2006/relationships" xmlns:p1510="http://schemas.microsoft.com/office/powerpoint/2015/10/main">
+  <p1510:revLst>
+    <p1510:client id="{AD75E69D-7075-489B-B61A-F5DAB412FA31}" v="1" dt="2026-09-10T17:08:28.848"/>
+  </p1510:revLst>
+</p1510:revInfo>
+</file>
+
 <file path=ppt/changesInfos/changesInfo1.xml><?xml version="1.0" encoding="utf-8"?>
 <pc:chgInfo xmlns:a="http://schemas.openxmlformats.org/drawingml/2006/main" xmlns:r="http://schemas.openxmlformats.org/officeDocument/2006/relationships" xmlns:ac="http://schemas.microsoft.com/office/drawing/2013/main/command" xmlns:pc="http://schemas.microsoft.com/office/powerpoint/2013/main/command">
   <pc:docChgLst>
     <pc:chgData name="Babcock, Elizabeth A" userId="02b9ec88-22ae-4f16-80a8-fd6316399148" providerId="ADAL" clId="{CFAE71B8-9659-41D1-BF87-D488A69E897D}"/>
-    <pc:docChg chg="modSld">
-      <pc:chgData name="Babcock, Elizabeth A" userId="02b9ec88-22ae-4f16-80a8-fd6316399148" providerId="ADAL" clId="{CFAE71B8-9659-41D1-BF87-D488A69E897D}" dt="2026-09-08T17:27:12.400" v="0" actId="20577"/>
+    <pc:docChg chg="addSld modSld">
+      <pc:chgData name="Babcock, Elizabeth A" userId="02b9ec88-22ae-4f16-80a8-fd6316399148" providerId="ADAL" clId="{CFAE71B8-9659-41D1-BF87-D488A69E897D}" dt="2026-09-10T17:08:59.118" v="35" actId="14100"/>
       <pc:docMkLst>
         <pc:docMk/>
       </pc:docMkLst>
@@ -230,6 +239,45 @@
             <ac:spMk id="64516" creationId="{00000000-0000-0000-0000-000000000000}"/>
           </ac:spMkLst>
         </pc:spChg>
+      </pc:sldChg>
+      <pc:sldChg chg="addSp delSp modSp new mod">
+        <pc:chgData name="Babcock, Elizabeth A" userId="02b9ec88-22ae-4f16-80a8-fd6316399148" providerId="ADAL" clId="{CFAE71B8-9659-41D1-BF87-D488A69E897D}" dt="2026-09-10T17:08:59.118" v="35" actId="14100"/>
+        <pc:sldMkLst>
+          <pc:docMk/>
+          <pc:sldMk cId="2865451843" sldId="339"/>
+        </pc:sldMkLst>
+        <pc:spChg chg="mod">
+          <ac:chgData name="Babcock, Elizabeth A" userId="02b9ec88-22ae-4f16-80a8-fd6316399148" providerId="ADAL" clId="{CFAE71B8-9659-41D1-BF87-D488A69E897D}" dt="2026-09-10T17:08:04.090" v="24" actId="20577"/>
+          <ac:spMkLst>
+            <pc:docMk/>
+            <pc:sldMk cId="2865451843" sldId="339"/>
+            <ac:spMk id="2" creationId="{A28175A0-0301-D92C-F2CB-9A1399C9B9A3}"/>
+          </ac:spMkLst>
+        </pc:spChg>
+        <pc:spChg chg="del">
+          <ac:chgData name="Babcock, Elizabeth A" userId="02b9ec88-22ae-4f16-80a8-fd6316399148" providerId="ADAL" clId="{CFAE71B8-9659-41D1-BF87-D488A69E897D}" dt="2026-09-10T17:08:28.848" v="25"/>
+          <ac:spMkLst>
+            <pc:docMk/>
+            <pc:sldMk cId="2865451843" sldId="339"/>
+            <ac:spMk id="3" creationId="{A86EEB8D-87FF-2214-04DD-84EBF3020B3B}"/>
+          </ac:spMkLst>
+        </pc:spChg>
+        <pc:picChg chg="add mod">
+          <ac:chgData name="Babcock, Elizabeth A" userId="02b9ec88-22ae-4f16-80a8-fd6316399148" providerId="ADAL" clId="{CFAE71B8-9659-41D1-BF87-D488A69E897D}" dt="2026-09-10T17:08:50.495" v="32" actId="14100"/>
+          <ac:picMkLst>
+            <pc:docMk/>
+            <pc:sldMk cId="2865451843" sldId="339"/>
+            <ac:picMk id="4" creationId="{5B857F27-2688-5949-4A98-51930D575E40}"/>
+          </ac:picMkLst>
+        </pc:picChg>
+        <pc:picChg chg="add mod">
+          <ac:chgData name="Babcock, Elizabeth A" userId="02b9ec88-22ae-4f16-80a8-fd6316399148" providerId="ADAL" clId="{CFAE71B8-9659-41D1-BF87-D488A69E897D}" dt="2026-09-10T17:08:59.118" v="35" actId="14100"/>
+          <ac:picMkLst>
+            <pc:docMk/>
+            <pc:sldMk cId="2865451843" sldId="339"/>
+            <ac:picMk id="5" creationId="{865310A2-85C9-C3F6-8681-CBE4F8FD2D56}"/>
+          </ac:picMkLst>
+        </pc:picChg>
       </pc:sldChg>
     </pc:docChg>
   </pc:docChgLst>
@@ -1177,7 +1225,7 @@
               <a:pPr>
                 <a:defRPr/>
               </a:pPr>
-              <a:t>34</a:t>
+              <a:t>35</a:t>
             </a:fld>
             <a:endParaRPr lang="en-US"/>
           </a:p>
@@ -6345,10 +6393,7 @@
                 </a:pPr>
                 <a14:m>
                   <m:oMathPara xmlns:m="http://schemas.openxmlformats.org/officeDocument/2006/math">
-                    <m:oMathParaPr>
-                      <m:jc m:val="centerGroup"/>
-                    </m:oMathParaPr>
-                    <m:oMath xmlns:m="http://schemas.openxmlformats.org/officeDocument/2006/math">
+                    <m:oMath>
                       <m:sSub>
                         <m:sSubPr>
                           <m:ctrlPr>
@@ -6464,10 +6509,7 @@
                 </a:pPr>
                 <a14:m>
                   <m:oMathPara xmlns:m="http://schemas.openxmlformats.org/officeDocument/2006/math">
-                    <m:oMathParaPr>
-                      <m:jc m:val="centerGroup"/>
-                    </m:oMathParaPr>
-                    <m:oMath xmlns:m="http://schemas.openxmlformats.org/officeDocument/2006/math">
+                    <m:oMath>
                       <m:r>
                         <m:rPr>
                           <m:sty m:val="p"/>
@@ -6707,7 +6749,7 @@
                     <m:sSub>
                       <m:sSubPr>
                         <m:ctrlPr>
-                          <a:rPr lang="en-US" sz="2800" b="0" i="1" smtClean="0">
+                          <a:rPr lang="en-US" sz="2800" b="0" i="0" smtClean="0">
                             <a:latin typeface="Cambria Math" panose="02040503050406030204" pitchFamily="18" charset="0"/>
                           </a:rPr>
                         </m:ctrlPr>
@@ -6904,7 +6946,7 @@
                     <m:sSub>
                       <m:sSubPr>
                         <m:ctrlPr>
-                          <a:rPr lang="en-US" b="0" i="1">
+                          <a:rPr lang="en-US" b="0">
                             <a:latin typeface="Cambria Math" panose="02040503050406030204" pitchFamily="18" charset="0"/>
                           </a:rPr>
                         </m:ctrlPr>
@@ -12837,6 +12879,126 @@
           <p:cNvPr id="2" name="Title 1">
             <a:extLst>
               <a:ext uri="{FF2B5EF4-FFF2-40B4-BE49-F238E27FC236}">
+                <a16:creationId xmlns:a16="http://schemas.microsoft.com/office/drawing/2014/main" id="{A28175A0-0301-D92C-F2CB-9A1399C9B9A3}"/>
+              </a:ext>
+            </a:extLst>
+          </p:cNvPr>
+          <p:cNvSpPr>
+            <a:spLocks noGrp="1"/>
+          </p:cNvSpPr>
+          <p:nvPr>
+            <p:ph type="title"/>
+          </p:nvPr>
+        </p:nvSpPr>
+        <p:spPr/>
+        <p:txBody>
+          <a:bodyPr/>
+          <a:lstStyle/>
+          <a:p>
+            <a:r>
+              <a:rPr lang="en-US" dirty="0"/>
+              <a:t>Distributions</a:t>
+            </a:r>
+          </a:p>
+        </p:txBody>
+      </p:sp>
+      <p:pic>
+        <p:nvPicPr>
+          <p:cNvPr id="4" name="Content Placeholder 3">
+            <a:extLst>
+              <a:ext uri="{FF2B5EF4-FFF2-40B4-BE49-F238E27FC236}">
+                <a16:creationId xmlns:a16="http://schemas.microsoft.com/office/drawing/2014/main" id="{5B857F27-2688-5949-4A98-51930D575E40}"/>
+              </a:ext>
+            </a:extLst>
+          </p:cNvPr>
+          <p:cNvPicPr>
+            <a:picLocks noGrp="1" noChangeAspect="1"/>
+          </p:cNvPicPr>
+          <p:nvPr>
+            <p:ph idx="1"/>
+          </p:nvPr>
+        </p:nvPicPr>
+        <p:blipFill>
+          <a:blip r:embed="rId2"/>
+          <a:stretch>
+            <a:fillRect/>
+          </a:stretch>
+        </p:blipFill>
+        <p:spPr>
+          <a:xfrm>
+            <a:off x="228600" y="914401"/>
+            <a:ext cx="4373881" cy="3124200"/>
+          </a:xfrm>
+          <a:prstGeom prst="rect">
+            <a:avLst/>
+          </a:prstGeom>
+        </p:spPr>
+      </p:pic>
+      <p:pic>
+        <p:nvPicPr>
+          <p:cNvPr id="5" name="Picture 4">
+            <a:extLst>
+              <a:ext uri="{FF2B5EF4-FFF2-40B4-BE49-F238E27FC236}">
+                <a16:creationId xmlns:a16="http://schemas.microsoft.com/office/drawing/2014/main" id="{865310A2-85C9-C3F6-8681-CBE4F8FD2D56}"/>
+              </a:ext>
+            </a:extLst>
+          </p:cNvPr>
+          <p:cNvPicPr>
+            <a:picLocks noChangeAspect="1"/>
+          </p:cNvPicPr>
+          <p:nvPr/>
+        </p:nvPicPr>
+        <p:blipFill>
+          <a:blip r:embed="rId3"/>
+          <a:stretch>
+            <a:fillRect/>
+          </a:stretch>
+        </p:blipFill>
+        <p:spPr>
+          <a:xfrm>
+            <a:off x="4952128" y="914401"/>
+            <a:ext cx="4267199" cy="3047999"/>
+          </a:xfrm>
+          <a:prstGeom prst="rect">
+            <a:avLst/>
+          </a:prstGeom>
+        </p:spPr>
+      </p:pic>
+    </p:spTree>
+    <p:extLst>
+      <p:ext uri="{BB962C8B-B14F-4D97-AF65-F5344CB8AC3E}">
+        <p14:creationId xmlns:p14="http://schemas.microsoft.com/office/powerpoint/2010/main" val="2865451843"/>
+      </p:ext>
+    </p:extLst>
+  </p:cSld>
+  <p:clrMapOvr>
+    <a:masterClrMapping/>
+  </p:clrMapOvr>
+</p:sld>
+</file>
+
+<file path=ppt/slides/slide33.xml><?xml version="1.0" encoding="utf-8"?>
+<p:sld xmlns:a="http://schemas.openxmlformats.org/drawingml/2006/main" xmlns:r="http://schemas.openxmlformats.org/officeDocument/2006/relationships" xmlns:p="http://schemas.openxmlformats.org/presentationml/2006/main">
+  <p:cSld>
+    <p:spTree>
+      <p:nvGrpSpPr>
+        <p:cNvPr id="1" name=""/>
+        <p:cNvGrpSpPr/>
+        <p:nvPr/>
+      </p:nvGrpSpPr>
+      <p:grpSpPr>
+        <a:xfrm>
+          <a:off x="0" y="0"/>
+          <a:ext cx="0" cy="0"/>
+          <a:chOff x="0" y="0"/>
+          <a:chExt cx="0" cy="0"/>
+        </a:xfrm>
+      </p:grpSpPr>
+      <p:sp>
+        <p:nvSpPr>
+          <p:cNvPr id="2" name="Title 1">
+            <a:extLst>
+              <a:ext uri="{FF2B5EF4-FFF2-40B4-BE49-F238E27FC236}">
                 <a16:creationId xmlns:a16="http://schemas.microsoft.com/office/drawing/2014/main" id="{095714C9-2830-8F52-48E1-0DE77A33E6C0}"/>
               </a:ext>
             </a:extLst>
@@ -12960,7 +13122,7 @@
 </p:sld>
 </file>
 
-<file path=ppt/slides/slide33.xml><?xml version="1.0" encoding="utf-8"?>
+<file path=ppt/slides/slide34.xml><?xml version="1.0" encoding="utf-8"?>
 <p:sld xmlns:a="http://schemas.openxmlformats.org/drawingml/2006/main" xmlns:r="http://schemas.openxmlformats.org/officeDocument/2006/relationships" xmlns:p="http://schemas.openxmlformats.org/presentationml/2006/main">
   <p:cSld>
     <p:spTree>
@@ -13070,7 +13232,7 @@
 </p:sld>
 </file>
 
-<file path=ppt/slides/slide34.xml><?xml version="1.0" encoding="utf-8"?>
+<file path=ppt/slides/slide35.xml><?xml version="1.0" encoding="utf-8"?>
 <p:sld xmlns:a="http://schemas.openxmlformats.org/drawingml/2006/main" xmlns:r="http://schemas.openxmlformats.org/officeDocument/2006/relationships" xmlns:p="http://schemas.openxmlformats.org/presentationml/2006/main">
   <p:cSld>
     <p:spTree>
@@ -13497,7 +13659,7 @@
 </p:sld>
 </file>
 
-<file path=ppt/slides/slide35.xml><?xml version="1.0" encoding="utf-8"?>
+<file path=ppt/slides/slide36.xml><?xml version="1.0" encoding="utf-8"?>
 <p:sld xmlns:a="http://schemas.openxmlformats.org/drawingml/2006/main" xmlns:r="http://schemas.openxmlformats.org/officeDocument/2006/relationships" xmlns:p="http://schemas.openxmlformats.org/presentationml/2006/main">
   <p:cSld>
     <p:spTree>
@@ -20057,10 +20219,7 @@
                 </a:pPr>
                 <a14:m>
                   <m:oMathPara xmlns:m="http://schemas.openxmlformats.org/officeDocument/2006/math">
-                    <m:oMathParaPr>
-                      <m:jc m:val="centerGroup"/>
-                    </m:oMathParaPr>
-                    <m:oMath xmlns:m="http://schemas.openxmlformats.org/officeDocument/2006/math">
+                    <m:oMath>
                       <m:r>
                         <a:rPr lang="en-US" b="0" i="1" smtClean="0">
                           <a:latin typeface="Cambria Math" panose="02040503050406030204" pitchFamily="18" charset="0"/>
